--- a/NEV公告车型行业分析_演示文稿.pptx
+++ b/NEV公告车型行业分析_演示文稿.pptx
@@ -235,22 +235,22 @@
                 <c:formatCode>General</c:formatCode>
                 <c:ptCount val="6"/>
                 <c:pt idx="0">
-                  <c:v>498.0</c:v>
+                  <c:v>836</c:v>
                 </c:pt>
                 <c:pt idx="1">
-                  <c:v>474.0</c:v>
+                  <c:v>520</c:v>
                 </c:pt>
                 <c:pt idx="2">
-                  <c:v>568.0</c:v>
+                  <c:v>584</c:v>
                 </c:pt>
                 <c:pt idx="3">
-                  <c:v>615.0</c:v>
+                  <c:v>673</c:v>
                 </c:pt>
                 <c:pt idx="4">
-                  <c:v>567.0</c:v>
+                  <c:v>647</c:v>
                 </c:pt>
                 <c:pt idx="5">
-                  <c:v>377.0</c:v>
+                  <c:v>442</c:v>
                 </c:pt>
               </c:numCache>
             </c:numRef>
@@ -309,22 +309,22 @@
                 <c:formatCode>General</c:formatCode>
                 <c:ptCount val="6"/>
                 <c:pt idx="0">
-                  <c:v>84.0</c:v>
+                  <c:v>170</c:v>
                 </c:pt>
                 <c:pt idx="1">
-                  <c:v>128.0</c:v>
+                  <c:v>135</c:v>
                 </c:pt>
                 <c:pt idx="2">
-                  <c:v>210.0</c:v>
+                  <c:v>213</c:v>
                 </c:pt>
                 <c:pt idx="3">
-                  <c:v>299.0</c:v>
+                  <c:v>312</c:v>
                 </c:pt>
                 <c:pt idx="4">
-                  <c:v>550.0</c:v>
+                  <c:v>551</c:v>
                 </c:pt>
                 <c:pt idx="5">
-                  <c:v>243.0</c:v>
+                  <c:v>288</c:v>
                 </c:pt>
               </c:numCache>
             </c:numRef>
@@ -464,22 +464,22 @@
                 <c:formatCode>General</c:formatCode>
                 <c:ptCount val="6"/>
                 <c:pt idx="0">
-                  <c:v>22.09</c:v>
+                  <c:v>27.92</c:v>
                 </c:pt>
                 <c:pt idx="1">
-                  <c:v>25.84</c:v>
+                  <c:v>26.28</c:v>
                 </c:pt>
                 <c:pt idx="2">
-                  <c:v>26.23</c:v>
+                  <c:v>26.38</c:v>
                 </c:pt>
                 <c:pt idx="3">
-                  <c:v>27.88</c:v>
+                  <c:v>27.89</c:v>
                 </c:pt>
                 <c:pt idx="4">
-                  <c:v>33.62</c:v>
+                  <c:v>33.71</c:v>
                 </c:pt>
                 <c:pt idx="5">
-                  <c:v>44.45</c:v>
+                  <c:v>47.5</c:v>
                 </c:pt>
               </c:numCache>
             </c:numRef>
@@ -625,22 +625,22 @@
                 <c:formatCode>General</c:formatCode>
                 <c:ptCount val="6"/>
                 <c:pt idx="0">
-                  <c:v>54.06</c:v>
+                  <c:v>53.97</c:v>
                 </c:pt>
                 <c:pt idx="1">
-                  <c:v>59.61</c:v>
+                  <c:v>59.99</c:v>
                 </c:pt>
                 <c:pt idx="2">
-                  <c:v>64.25</c:v>
+                  <c:v>64.48</c:v>
                 </c:pt>
                 <c:pt idx="3">
-                  <c:v>69.63</c:v>
+                  <c:v>69.25</c:v>
                 </c:pt>
                 <c:pt idx="4">
-                  <c:v>66.71</c:v>
+                  <c:v>64.58</c:v>
                 </c:pt>
                 <c:pt idx="5">
-                  <c:v>75.62</c:v>
+                  <c:v>73.82</c:v>
                 </c:pt>
               </c:numCache>
             </c:numRef>
@@ -699,22 +699,22 @@
                 <c:formatCode>General</c:formatCode>
                 <c:ptCount val="6"/>
                 <c:pt idx="0">
-                  <c:v>22.09</c:v>
+                  <c:v>27.92</c:v>
                 </c:pt>
                 <c:pt idx="1">
-                  <c:v>25.84</c:v>
+                  <c:v>26.28</c:v>
                 </c:pt>
                 <c:pt idx="2">
-                  <c:v>26.23</c:v>
+                  <c:v>26.38</c:v>
                 </c:pt>
                 <c:pt idx="3">
-                  <c:v>27.88</c:v>
+                  <c:v>27.89</c:v>
                 </c:pt>
                 <c:pt idx="4">
-                  <c:v>33.62</c:v>
+                  <c:v>33.71</c:v>
                 </c:pt>
                 <c:pt idx="5">
-                  <c:v>44.45</c:v>
+                  <c:v>47.5</c:v>
                 </c:pt>
               </c:numCache>
             </c:numRef>
@@ -861,22 +861,22 @@
                 <c:formatCode>General</c:formatCode>
                 <c:ptCount val="6"/>
                 <c:pt idx="0">
-                  <c:v>45.4</c:v>
+                  <c:v>51.9</c:v>
                 </c:pt>
                 <c:pt idx="1">
-                  <c:v>51.2</c:v>
+                  <c:v>51.5</c:v>
                 </c:pt>
                 <c:pt idx="2">
-                  <c:v>55.0</c:v>
+                  <c:v>55.6</c:v>
                 </c:pt>
                 <c:pt idx="3">
-                  <c:v>67.1</c:v>
+                  <c:v>66.8</c:v>
                 </c:pt>
                 <c:pt idx="4">
-                  <c:v>78.2</c:v>
+                  <c:v>80.4</c:v>
                 </c:pt>
                 <c:pt idx="5">
-                  <c:v>79.7</c:v>
+                  <c:v>80.0</c:v>
                 </c:pt>
               </c:numCache>
             </c:numRef>
@@ -935,22 +935,22 @@
                 <c:formatCode>General</c:formatCode>
                 <c:ptCount val="6"/>
                 <c:pt idx="0">
-                  <c:v>51.2</c:v>
+                  <c:v>44.2</c:v>
                 </c:pt>
                 <c:pt idx="1">
-                  <c:v>46.5</c:v>
+                  <c:v>46.4</c:v>
                 </c:pt>
                 <c:pt idx="2">
-                  <c:v>42.3</c:v>
+                  <c:v>41.8</c:v>
                 </c:pt>
                 <c:pt idx="3">
-                  <c:v>31.6</c:v>
+                  <c:v>31.9</c:v>
                 </c:pt>
                 <c:pt idx="4">
-                  <c:v>18.2</c:v>
+                  <c:v>17.2</c:v>
                 </c:pt>
                 <c:pt idx="5">
-                  <c:v>19.5</c:v>
+                  <c:v>18.3</c:v>
                 </c:pt>
               </c:numCache>
             </c:numRef>
@@ -1009,22 +1009,22 @@
                 <c:formatCode>General</c:formatCode>
                 <c:ptCount val="6"/>
                 <c:pt idx="0">
-                  <c:v>3.4</c:v>
+                  <c:v>3.9</c:v>
                 </c:pt>
                 <c:pt idx="1">
-                  <c:v>2.3</c:v>
+                  <c:v>2.1</c:v>
                 </c:pt>
                 <c:pt idx="2">
-                  <c:v>2.7</c:v>
+                  <c:v>2.5</c:v>
                 </c:pt>
                 <c:pt idx="3">
                   <c:v>1.3</c:v>
                 </c:pt>
                 <c:pt idx="4">
-                  <c:v>3.6</c:v>
+                  <c:v>2.3</c:v>
                 </c:pt>
                 <c:pt idx="5">
-                  <c:v>0.8</c:v>
+                  <c:v>1.7</c:v>
                 </c:pt>
               </c:numCache>
             </c:numRef>
@@ -1166,22 +1166,22 @@
                 <c:formatCode>General</c:formatCode>
                 <c:ptCount val="6"/>
                 <c:pt idx="0">
-                  <c:v>42.9</c:v>
+                  <c:v>53.5</c:v>
                 </c:pt>
                 <c:pt idx="1">
-                  <c:v>34.1</c:v>
+                  <c:v>36.4</c:v>
                 </c:pt>
                 <c:pt idx="2">
-                  <c:v>45.4</c:v>
+                  <c:v>46.2</c:v>
                 </c:pt>
                 <c:pt idx="3">
-                  <c:v>73.8</c:v>
+                  <c:v>74.6</c:v>
                 </c:pt>
                 <c:pt idx="4">
-                  <c:v>81.1</c:v>
+                  <c:v>81.6</c:v>
                 </c:pt>
                 <c:pt idx="5">
-                  <c:v>71.4</c:v>
+                  <c:v>72.5</c:v>
                 </c:pt>
               </c:numCache>
             </c:numRef>
@@ -1240,22 +1240,22 @@
                 <c:formatCode>General</c:formatCode>
                 <c:ptCount val="6"/>
                 <c:pt idx="0">
-                  <c:v>57.1</c:v>
+                  <c:v>46.5</c:v>
                 </c:pt>
                 <c:pt idx="1">
-                  <c:v>52.4</c:v>
+                  <c:v>50.8</c:v>
                 </c:pt>
                 <c:pt idx="2">
-                  <c:v>50.2</c:v>
+                  <c:v>49.5</c:v>
                 </c:pt>
                 <c:pt idx="3">
-                  <c:v>25.2</c:v>
+                  <c:v>24.4</c:v>
                 </c:pt>
                 <c:pt idx="4">
-                  <c:v>16.3</c:v>
+                  <c:v>15.7</c:v>
                 </c:pt>
                 <c:pt idx="5">
-                  <c:v>24.9</c:v>
+                  <c:v>23.9</c:v>
                 </c:pt>
               </c:numCache>
             </c:numRef>
@@ -1317,10 +1317,10 @@
                   <c:v>0.0</c:v>
                 </c:pt>
                 <c:pt idx="1">
-                  <c:v>13.5</c:v>
+                  <c:v>12.9</c:v>
                 </c:pt>
                 <c:pt idx="2">
-                  <c:v>4.4</c:v>
+                  <c:v>4.3</c:v>
                 </c:pt>
                 <c:pt idx="3">
                   <c:v>1.0</c:v>
@@ -1329,7 +1329,7 @@
                   <c:v>2.6</c:v>
                 </c:pt>
                 <c:pt idx="5">
-                  <c:v>3.7</c:v>
+                  <c:v>3.6</c:v>
                 </c:pt>
               </c:numCache>
             </c:numRef>
@@ -1470,22 +1470,22 @@
                 <c:formatCode>General</c:formatCode>
                 <c:ptCount val="6"/>
                 <c:pt idx="0">
-                  <c:v>150.12</c:v>
+                  <c:v>150.7</c:v>
                 </c:pt>
                 <c:pt idx="1">
-                  <c:v>153.47</c:v>
+                  <c:v>153.8</c:v>
                 </c:pt>
                 <c:pt idx="2">
-                  <c:v>158.32</c:v>
+                  <c:v>158.2</c:v>
                 </c:pt>
                 <c:pt idx="3">
-                  <c:v>146.71</c:v>
+                  <c:v>146.7</c:v>
                 </c:pt>
                 <c:pt idx="4">
-                  <c:v>150.95</c:v>
+                  <c:v>151.1</c:v>
                 </c:pt>
                 <c:pt idx="5">
-                  <c:v>164.47</c:v>
+                  <c:v>163.6</c:v>
                 </c:pt>
               </c:numCache>
             </c:numRef>
@@ -1632,22 +1632,22 @@
                 <c:formatCode>General</c:formatCode>
                 <c:ptCount val="6"/>
                 <c:pt idx="0">
-                  <c:v>163.0</c:v>
+                  <c:v>274</c:v>
                 </c:pt>
                 <c:pt idx="1">
-                  <c:v>89.0</c:v>
+                  <c:v>98</c:v>
                 </c:pt>
                 <c:pt idx="2">
-                  <c:v>103.0</c:v>
+                  <c:v>106</c:v>
                 </c:pt>
                 <c:pt idx="3">
-                  <c:v>88.0</c:v>
+                  <c:v>103</c:v>
                 </c:pt>
                 <c:pt idx="4">
-                  <c:v>92.0</c:v>
+                  <c:v>119</c:v>
                 </c:pt>
                 <c:pt idx="5">
-                  <c:v>40.0</c:v>
+                  <c:v>54</c:v>
                 </c:pt>
               </c:numCache>
             </c:numRef>
@@ -1706,22 +1706,22 @@
                 <c:formatCode>General</c:formatCode>
                 <c:ptCount val="6"/>
                 <c:pt idx="0">
-                  <c:v>44.0</c:v>
+                  <c:v>65</c:v>
                 </c:pt>
                 <c:pt idx="1">
-                  <c:v>84.0</c:v>
+                  <c:v>88</c:v>
                 </c:pt>
                 <c:pt idx="2">
-                  <c:v>110.0</c:v>
+                  <c:v>112</c:v>
                 </c:pt>
                 <c:pt idx="3">
-                  <c:v>151.0</c:v>
+                  <c:v>150</c:v>
                 </c:pt>
                 <c:pt idx="4">
-                  <c:v>124.0</c:v>
+                  <c:v>120</c:v>
                 </c:pt>
                 <c:pt idx="5">
-                  <c:v>92.0</c:v>
+                  <c:v>107</c:v>
                 </c:pt>
               </c:numCache>
             </c:numRef>
@@ -1780,22 +1780,22 @@
                 <c:formatCode>General</c:formatCode>
                 <c:ptCount val="6"/>
                 <c:pt idx="0">
-                  <c:v>73.0</c:v>
+                  <c:v>155</c:v>
                 </c:pt>
                 <c:pt idx="1">
-                  <c:v>54.0</c:v>
+                  <c:v>66</c:v>
                 </c:pt>
                 <c:pt idx="2">
-                  <c:v>52.0</c:v>
+                  <c:v>52</c:v>
                 </c:pt>
                 <c:pt idx="3">
-                  <c:v>56.0</c:v>
+                  <c:v>76</c:v>
                 </c:pt>
                 <c:pt idx="4">
-                  <c:v>57.0</c:v>
+                  <c:v>119</c:v>
                 </c:pt>
                 <c:pt idx="5">
-                  <c:v>15.0</c:v>
+                  <c:v>22</c:v>
                 </c:pt>
               </c:numCache>
             </c:numRef>
@@ -1854,22 +1854,22 @@
                 <c:formatCode>General</c:formatCode>
                 <c:ptCount val="6"/>
                 <c:pt idx="0">
-                  <c:v>116.0</c:v>
+                  <c:v>169</c:v>
                 </c:pt>
                 <c:pt idx="1">
-                  <c:v>110.0</c:v>
+                  <c:v>112</c:v>
                 </c:pt>
                 <c:pt idx="2">
-                  <c:v>160.0</c:v>
+                  <c:v>164</c:v>
                 </c:pt>
                 <c:pt idx="3">
-                  <c:v>180.0</c:v>
+                  <c:v>184</c:v>
                 </c:pt>
                 <c:pt idx="4">
-                  <c:v>153.0</c:v>
+                  <c:v>160</c:v>
                 </c:pt>
                 <c:pt idx="5">
-                  <c:v>84.0</c:v>
+                  <c:v>102</c:v>
                 </c:pt>
               </c:numCache>
             </c:numRef>
@@ -1928,22 +1928,22 @@
                 <c:formatCode>General</c:formatCode>
                 <c:ptCount val="6"/>
                 <c:pt idx="0">
-                  <c:v>59.0</c:v>
+                  <c:v>81</c:v>
                 </c:pt>
                 <c:pt idx="1">
-                  <c:v>41.0</c:v>
+                  <c:v>42</c:v>
                 </c:pt>
                 <c:pt idx="2">
-                  <c:v>21.0</c:v>
+                  <c:v>21</c:v>
                 </c:pt>
                 <c:pt idx="3">
-                  <c:v>6.0</c:v>
+                  <c:v>12</c:v>
                 </c:pt>
                 <c:pt idx="4">
-                  <c:v>0.0</c:v>
+                  <c:v>0</c:v>
                 </c:pt>
                 <c:pt idx="5">
-                  <c:v>0.0</c:v>
+                  <c:v>0</c:v>
                 </c:pt>
               </c:numCache>
             </c:numRef>
@@ -2002,22 +2002,22 @@
                 <c:formatCode>General</c:formatCode>
                 <c:ptCount val="6"/>
                 <c:pt idx="0">
-                  <c:v>21.0</c:v>
+                  <c:v>37</c:v>
                 </c:pt>
                 <c:pt idx="1">
-                  <c:v>50.0</c:v>
+                  <c:v>55</c:v>
                 </c:pt>
                 <c:pt idx="2">
-                  <c:v>58.0</c:v>
+                  <c:v>63</c:v>
                 </c:pt>
                 <c:pt idx="3">
-                  <c:v>37.0</c:v>
+                  <c:v>39</c:v>
                 </c:pt>
                 <c:pt idx="4">
-                  <c:v>24.0</c:v>
+                  <c:v>30</c:v>
                 </c:pt>
                 <c:pt idx="5">
-                  <c:v>7.0</c:v>
+                  <c:v>8</c:v>
                 </c:pt>
               </c:numCache>
             </c:numRef>
@@ -2076,22 +2076,22 @@
                 <c:formatCode>General</c:formatCode>
                 <c:ptCount val="6"/>
                 <c:pt idx="0">
-                  <c:v>8.0</c:v>
+                  <c:v>10</c:v>
                 </c:pt>
                 <c:pt idx="1">
-                  <c:v>34.0</c:v>
+                  <c:v>33</c:v>
                 </c:pt>
                 <c:pt idx="2">
-                  <c:v>56.0</c:v>
+                  <c:v>56</c:v>
                 </c:pt>
                 <c:pt idx="3">
-                  <c:v>92.0</c:v>
+                  <c:v>92</c:v>
                 </c:pt>
                 <c:pt idx="4">
-                  <c:v>97.0</c:v>
+                  <c:v>95</c:v>
                 </c:pt>
                 <c:pt idx="5">
-                  <c:v>134.0</c:v>
+                  <c:v>136</c:v>
                 </c:pt>
               </c:numCache>
             </c:numRef>
@@ -2232,22 +2232,22 @@
                 <c:formatCode>General</c:formatCode>
                 <c:ptCount val="6"/>
                 <c:pt idx="0">
-                  <c:v>21.0</c:v>
+                  <c:v>23</c:v>
                 </c:pt>
                 <c:pt idx="1">
-                  <c:v>10.0</c:v>
+                  <c:v>8</c:v>
                 </c:pt>
                 <c:pt idx="2">
-                  <c:v>17.0</c:v>
+                  <c:v>17</c:v>
                 </c:pt>
                 <c:pt idx="3">
-                  <c:v>26.0</c:v>
+                  <c:v>26</c:v>
                 </c:pt>
                 <c:pt idx="4">
-                  <c:v>45.0</c:v>
+                  <c:v>46</c:v>
                 </c:pt>
                 <c:pt idx="5">
-                  <c:v>19.0</c:v>
+                  <c:v>21</c:v>
                 </c:pt>
               </c:numCache>
             </c:numRef>
@@ -2306,22 +2306,22 @@
                 <c:formatCode>General</c:formatCode>
                 <c:ptCount val="6"/>
                 <c:pt idx="0">
-                  <c:v>5.0</c:v>
+                  <c:v>3</c:v>
                 </c:pt>
                 <c:pt idx="1">
-                  <c:v>35.0</c:v>
+                  <c:v>37</c:v>
                 </c:pt>
                 <c:pt idx="2">
-                  <c:v>58.0</c:v>
+                  <c:v>58</c:v>
                 </c:pt>
                 <c:pt idx="3">
-                  <c:v>86.0</c:v>
+                  <c:v>90</c:v>
                 </c:pt>
                 <c:pt idx="4">
-                  <c:v>173.0</c:v>
+                  <c:v>174</c:v>
                 </c:pt>
                 <c:pt idx="5">
-                  <c:v>75.0</c:v>
+                  <c:v>82</c:v>
                 </c:pt>
               </c:numCache>
             </c:numRef>
@@ -2380,22 +2380,22 @@
                 <c:formatCode>General</c:formatCode>
                 <c:ptCount val="6"/>
                 <c:pt idx="0">
-                  <c:v>21.0</c:v>
+                  <c:v>62</c:v>
                 </c:pt>
                 <c:pt idx="1">
-                  <c:v>47.0</c:v>
+                  <c:v>49</c:v>
                 </c:pt>
                 <c:pt idx="2">
-                  <c:v>68.0</c:v>
+                  <c:v>68</c:v>
                 </c:pt>
                 <c:pt idx="3">
-                  <c:v>83.0</c:v>
+                  <c:v>84</c:v>
                 </c:pt>
                 <c:pt idx="4">
-                  <c:v>42.0</c:v>
+                  <c:v>42</c:v>
                 </c:pt>
                 <c:pt idx="5">
-                  <c:v>0.0</c:v>
+                  <c:v>0</c:v>
                 </c:pt>
               </c:numCache>
             </c:numRef>
@@ -2454,22 +2454,22 @@
                 <c:formatCode>General</c:formatCode>
                 <c:ptCount val="6"/>
                 <c:pt idx="0">
-                  <c:v>24.0</c:v>
+                  <c:v>42</c:v>
                 </c:pt>
                 <c:pt idx="1">
-                  <c:v>12.0</c:v>
+                  <c:v>16</c:v>
                 </c:pt>
                 <c:pt idx="2">
-                  <c:v>39.0</c:v>
+                  <c:v>42</c:v>
                 </c:pt>
                 <c:pt idx="3">
-                  <c:v>58.0</c:v>
+                  <c:v>59</c:v>
                 </c:pt>
                 <c:pt idx="4">
-                  <c:v>157.0</c:v>
+                  <c:v>160</c:v>
                 </c:pt>
                 <c:pt idx="5">
-                  <c:v>22.0</c:v>
+                  <c:v>24</c:v>
                 </c:pt>
               </c:numCache>
             </c:numRef>
@@ -2528,22 +2528,22 @@
                 <c:formatCode>General</c:formatCode>
                 <c:ptCount val="6"/>
                 <c:pt idx="0">
-                  <c:v>12.0</c:v>
+                  <c:v>34</c:v>
                 </c:pt>
                 <c:pt idx="1">
-                  <c:v>14.0</c:v>
+                  <c:v>14</c:v>
                 </c:pt>
                 <c:pt idx="2">
-                  <c:v>15.0</c:v>
+                  <c:v>15</c:v>
                 </c:pt>
                 <c:pt idx="3">
-                  <c:v>13.0</c:v>
+                  <c:v>13</c:v>
                 </c:pt>
                 <c:pt idx="4">
-                  <c:v>7.0</c:v>
+                  <c:v>8</c:v>
                 </c:pt>
                 <c:pt idx="5">
-                  <c:v>0.0</c:v>
+                  <c:v>0</c:v>
                 </c:pt>
               </c:numCache>
             </c:numRef>
@@ -2602,22 +2602,22 @@
                 <c:formatCode>General</c:formatCode>
                 <c:ptCount val="6"/>
                 <c:pt idx="0">
-                  <c:v>1.0</c:v>
+                  <c:v>2</c:v>
                 </c:pt>
                 <c:pt idx="1">
-                  <c:v>8.0</c:v>
+                  <c:v>8</c:v>
                 </c:pt>
                 <c:pt idx="2">
-                  <c:v>7.0</c:v>
+                  <c:v>8</c:v>
                 </c:pt>
                 <c:pt idx="3">
-                  <c:v>31.0</c:v>
+                  <c:v>29</c:v>
                 </c:pt>
                 <c:pt idx="4">
-                  <c:v>120.0</c:v>
+                  <c:v>119</c:v>
                 </c:pt>
                 <c:pt idx="5">
-                  <c:v>119.0</c:v>
+                  <c:v>158</c:v>
                 </c:pt>
               </c:numCache>
             </c:numRef>
@@ -2758,22 +2758,22 @@
                 <c:formatCode>General</c:formatCode>
                 <c:ptCount val="6"/>
                 <c:pt idx="0">
-                  <c:v>81.0</c:v>
+                  <c:v>92</c:v>
                 </c:pt>
                 <c:pt idx="1">
-                  <c:v>67.0</c:v>
+                  <c:v>67</c:v>
                 </c:pt>
                 <c:pt idx="2">
-                  <c:v>98.0</c:v>
+                  <c:v>98</c:v>
                 </c:pt>
                 <c:pt idx="3">
-                  <c:v>109.0</c:v>
+                  <c:v>107</c:v>
                 </c:pt>
                 <c:pt idx="4">
-                  <c:v>109.0</c:v>
+                  <c:v>119</c:v>
                 </c:pt>
                 <c:pt idx="5">
-                  <c:v>64.0</c:v>
+                  <c:v>80</c:v>
                 </c:pt>
               </c:numCache>
             </c:numRef>
@@ -2832,22 +2832,22 @@
                 <c:formatCode>General</c:formatCode>
                 <c:ptCount val="6"/>
                 <c:pt idx="0">
-                  <c:v>54.0</c:v>
+                  <c:v>62</c:v>
                 </c:pt>
                 <c:pt idx="1">
-                  <c:v>51.0</c:v>
+                  <c:v>51</c:v>
                 </c:pt>
                 <c:pt idx="2">
-                  <c:v>98.0</c:v>
+                  <c:v>98</c:v>
                 </c:pt>
                 <c:pt idx="3">
-                  <c:v>100.0</c:v>
+                  <c:v>99</c:v>
                 </c:pt>
                 <c:pt idx="4">
-                  <c:v>67.0</c:v>
+                  <c:v>65</c:v>
                 </c:pt>
                 <c:pt idx="5">
-                  <c:v>45.0</c:v>
+                  <c:v>53</c:v>
                 </c:pt>
               </c:numCache>
             </c:numRef>
@@ -2906,22 +2906,22 @@
                 <c:formatCode>General</c:formatCode>
                 <c:ptCount val="6"/>
                 <c:pt idx="0">
-                  <c:v>48.0</c:v>
+                  <c:v>71</c:v>
                 </c:pt>
                 <c:pt idx="1">
-                  <c:v>49.0</c:v>
+                  <c:v>51</c:v>
                 </c:pt>
                 <c:pt idx="2">
-                  <c:v>49.0</c:v>
+                  <c:v>49</c:v>
                 </c:pt>
                 <c:pt idx="3">
-                  <c:v>49.0</c:v>
+                  <c:v>54</c:v>
                 </c:pt>
                 <c:pt idx="4">
-                  <c:v>64.0</c:v>
+                  <c:v>82</c:v>
                 </c:pt>
                 <c:pt idx="5">
-                  <c:v>32.0</c:v>
+                  <c:v>37</c:v>
                 </c:pt>
               </c:numCache>
             </c:numRef>
@@ -2980,22 +2980,22 @@
                 <c:formatCode>General</c:formatCode>
                 <c:ptCount val="6"/>
                 <c:pt idx="0">
-                  <c:v>24.0</c:v>
+                  <c:v>24</c:v>
                 </c:pt>
                 <c:pt idx="1">
-                  <c:v>21.0</c:v>
+                  <c:v>21</c:v>
                 </c:pt>
                 <c:pt idx="2">
-                  <c:v>18.0</c:v>
+                  <c:v>18</c:v>
                 </c:pt>
                 <c:pt idx="3">
-                  <c:v>7.0</c:v>
+                  <c:v>7</c:v>
                 </c:pt>
                 <c:pt idx="4">
-                  <c:v>11.0</c:v>
+                  <c:v>11</c:v>
                 </c:pt>
                 <c:pt idx="5">
-                  <c:v>5.0</c:v>
+                  <c:v>5</c:v>
                 </c:pt>
               </c:numCache>
             </c:numRef>
@@ -3054,22 +3054,22 @@
                 <c:formatCode>General</c:formatCode>
                 <c:ptCount val="6"/>
                 <c:pt idx="0">
-                  <c:v>42.0</c:v>
+                  <c:v>78</c:v>
                 </c:pt>
                 <c:pt idx="1">
-                  <c:v>26.0</c:v>
+                  <c:v>26</c:v>
                 </c:pt>
                 <c:pt idx="2">
-                  <c:v>45.0</c:v>
+                  <c:v>45</c:v>
                 </c:pt>
                 <c:pt idx="3">
-                  <c:v>28.0</c:v>
+                  <c:v>28</c:v>
                 </c:pt>
                 <c:pt idx="4">
-                  <c:v>23.0</c:v>
+                  <c:v>28</c:v>
                 </c:pt>
                 <c:pt idx="5">
-                  <c:v>12.0</c:v>
+                  <c:v>13</c:v>
                 </c:pt>
               </c:numCache>
             </c:numRef>
@@ -3128,22 +3128,22 @@
                 <c:formatCode>General</c:formatCode>
                 <c:ptCount val="6"/>
                 <c:pt idx="0">
-                  <c:v>65.0</c:v>
+                  <c:v>86</c:v>
                 </c:pt>
                 <c:pt idx="1">
-                  <c:v>70.0</c:v>
+                  <c:v>70</c:v>
                 </c:pt>
                 <c:pt idx="2">
-                  <c:v>45.0</c:v>
+                  <c:v>45</c:v>
                 </c:pt>
                 <c:pt idx="3">
-                  <c:v>22.0</c:v>
+                  <c:v>24</c:v>
                 </c:pt>
                 <c:pt idx="4">
-                  <c:v>19.0</c:v>
+                  <c:v>27</c:v>
                 </c:pt>
                 <c:pt idx="5">
-                  <c:v>7.0</c:v>
+                  <c:v>7</c:v>
                 </c:pt>
               </c:numCache>
             </c:numRef>
@@ -3202,22 +3202,22 @@
                 <c:formatCode>General</c:formatCode>
                 <c:ptCount val="6"/>
                 <c:pt idx="0">
-                  <c:v>101.0</c:v>
+                  <c:v>120</c:v>
                 </c:pt>
                 <c:pt idx="1">
-                  <c:v>54.0</c:v>
+                  <c:v>55</c:v>
                 </c:pt>
                 <c:pt idx="2">
-                  <c:v>54.0</c:v>
+                  <c:v>55</c:v>
                 </c:pt>
                 <c:pt idx="3">
-                  <c:v>84.0</c:v>
+                  <c:v>86</c:v>
                 </c:pt>
                 <c:pt idx="4">
-                  <c:v>101.0</c:v>
+                  <c:v>133</c:v>
                 </c:pt>
                 <c:pt idx="5">
-                  <c:v>48.0</c:v>
+                  <c:v>64</c:v>
                 </c:pt>
               </c:numCache>
             </c:numRef>
@@ -3276,22 +3276,22 @@
                 <c:formatCode>General</c:formatCode>
                 <c:ptCount val="6"/>
                 <c:pt idx="0">
-                  <c:v>68.0</c:v>
+                  <c:v>102</c:v>
                 </c:pt>
                 <c:pt idx="1">
-                  <c:v>125.0</c:v>
+                  <c:v>130</c:v>
                 </c:pt>
                 <c:pt idx="2">
-                  <c:v>155.0</c:v>
+                  <c:v>158</c:v>
                 </c:pt>
                 <c:pt idx="3">
-                  <c:v>212.0</c:v>
+                  <c:v>211</c:v>
                 </c:pt>
                 <c:pt idx="4">
-                  <c:v>154.0</c:v>
+                  <c:v>166</c:v>
                 </c:pt>
                 <c:pt idx="5">
-                  <c:v>160.0</c:v>
+                  <c:v>158</c:v>
                 </c:pt>
               </c:numCache>
             </c:numRef>
@@ -3432,22 +3432,22 @@
                 <c:formatCode>General</c:formatCode>
                 <c:ptCount val="6"/>
                 <c:pt idx="0">
-                  <c:v>27.0</c:v>
+                  <c:v>30</c:v>
                 </c:pt>
                 <c:pt idx="1">
-                  <c:v>26.0</c:v>
+                  <c:v>26</c:v>
                 </c:pt>
                 <c:pt idx="2">
-                  <c:v>33.0</c:v>
+                  <c:v>33</c:v>
                 </c:pt>
                 <c:pt idx="3">
-                  <c:v>80.0</c:v>
+                  <c:v>82</c:v>
                 </c:pt>
                 <c:pt idx="4">
-                  <c:v>158.0</c:v>
+                  <c:v>152</c:v>
                 </c:pt>
                 <c:pt idx="5">
-                  <c:v>67.0</c:v>
+                  <c:v>70</c:v>
                 </c:pt>
               </c:numCache>
             </c:numRef>
@@ -3506,22 +3506,22 @@
                 <c:formatCode>General</c:formatCode>
                 <c:ptCount val="6"/>
                 <c:pt idx="0">
-                  <c:v>4.0</c:v>
+                  <c:v>3</c:v>
                 </c:pt>
                 <c:pt idx="1">
-                  <c:v>18.0</c:v>
+                  <c:v>19</c:v>
                 </c:pt>
                 <c:pt idx="2">
-                  <c:v>36.0</c:v>
+                  <c:v>37</c:v>
                 </c:pt>
                 <c:pt idx="3">
-                  <c:v>50.0</c:v>
+                  <c:v>50</c:v>
                 </c:pt>
                 <c:pt idx="4">
-                  <c:v>107.0</c:v>
+                  <c:v>106</c:v>
                 </c:pt>
                 <c:pt idx="5">
-                  <c:v>42.0</c:v>
+                  <c:v>47</c:v>
                 </c:pt>
               </c:numCache>
             </c:numRef>
@@ -3580,22 +3580,22 @@
                 <c:formatCode>General</c:formatCode>
                 <c:ptCount val="6"/>
                 <c:pt idx="0">
-                  <c:v>37.0</c:v>
+                  <c:v>40</c:v>
                 </c:pt>
                 <c:pt idx="1">
-                  <c:v>52.0</c:v>
+                  <c:v>52</c:v>
                 </c:pt>
                 <c:pt idx="2">
-                  <c:v>75.0</c:v>
+                  <c:v>76</c:v>
                 </c:pt>
                 <c:pt idx="3">
-                  <c:v>96.0</c:v>
+                  <c:v>97</c:v>
                 </c:pt>
                 <c:pt idx="4">
-                  <c:v>116.0</c:v>
+                  <c:v>117</c:v>
                 </c:pt>
                 <c:pt idx="5">
-                  <c:v>9.0</c:v>
+                  <c:v>9</c:v>
                 </c:pt>
               </c:numCache>
             </c:numRef>
@@ -3654,22 +3654,22 @@
                 <c:formatCode>General</c:formatCode>
                 <c:ptCount val="6"/>
                 <c:pt idx="0">
-                  <c:v>16.0</c:v>
+                  <c:v>16</c:v>
                 </c:pt>
                 <c:pt idx="1">
-                  <c:v>11.0</c:v>
+                  <c:v>11</c:v>
                 </c:pt>
                 <c:pt idx="2">
-                  <c:v>16.0</c:v>
+                  <c:v>16</c:v>
                 </c:pt>
                 <c:pt idx="3">
-                  <c:v>17.0</c:v>
+                  <c:v>17</c:v>
                 </c:pt>
                 <c:pt idx="4">
-                  <c:v>10.0</c:v>
+                  <c:v>11</c:v>
                 </c:pt>
                 <c:pt idx="5">
-                  <c:v>0.0</c:v>
+                  <c:v>0</c:v>
                 </c:pt>
               </c:numCache>
             </c:numRef>
@@ -3810,22 +3810,22 @@
                 <c:formatCode>General</c:formatCode>
                 <c:ptCount val="6"/>
                 <c:pt idx="0">
-                  <c:v>226.0</c:v>
+                  <c:v>391</c:v>
                 </c:pt>
                 <c:pt idx="1">
-                  <c:v>229.0</c:v>
+                  <c:v>242</c:v>
                 </c:pt>
                 <c:pt idx="2">
-                  <c:v>289.0</c:v>
+                  <c:v>307</c:v>
                 </c:pt>
                 <c:pt idx="3">
-                  <c:v>401.0</c:v>
+                  <c:v>410</c:v>
                 </c:pt>
                 <c:pt idx="4">
-                  <c:v>409.0</c:v>
+                  <c:v>481</c:v>
                 </c:pt>
                 <c:pt idx="5">
-                  <c:v>294.0</c:v>
+                  <c:v>328</c:v>
                 </c:pt>
               </c:numCache>
             </c:numRef>
@@ -3884,22 +3884,22 @@
                 <c:formatCode>General</c:formatCode>
                 <c:ptCount val="6"/>
                 <c:pt idx="0">
-                  <c:v>255.0</c:v>
+                  <c:v>333</c:v>
                 </c:pt>
                 <c:pt idx="1">
-                  <c:v>208.0</c:v>
+                  <c:v>218</c:v>
                 </c:pt>
                 <c:pt idx="2">
-                  <c:v>222.0</c:v>
+                  <c:v>231</c:v>
                 </c:pt>
                 <c:pt idx="3">
-                  <c:v>189.0</c:v>
+                  <c:v>196</c:v>
                 </c:pt>
                 <c:pt idx="4">
-                  <c:v>95.0</c:v>
+                  <c:v>103</c:v>
                 </c:pt>
                 <c:pt idx="5">
-                  <c:v>72.0</c:v>
+                  <c:v>75</c:v>
                 </c:pt>
               </c:numCache>
             </c:numRef>
@@ -3958,22 +3958,22 @@
                 <c:formatCode>General</c:formatCode>
                 <c:ptCount val="6"/>
                 <c:pt idx="0">
-                  <c:v>17.0</c:v>
+                  <c:v>29</c:v>
                 </c:pt>
                 <c:pt idx="1">
-                  <c:v>10.0</c:v>
+                  <c:v>10</c:v>
                 </c:pt>
                 <c:pt idx="2">
-                  <c:v>14.0</c:v>
+                  <c:v>14</c:v>
                 </c:pt>
                 <c:pt idx="3">
-                  <c:v>8.0</c:v>
+                  <c:v>8</c:v>
                 </c:pt>
                 <c:pt idx="4">
-                  <c:v>19.0</c:v>
+                  <c:v>14</c:v>
                 </c:pt>
                 <c:pt idx="5">
-                  <c:v>3.0</c:v>
+                  <c:v>7</c:v>
                 </c:pt>
               </c:numCache>
             </c:numRef>
@@ -4113,22 +4113,22 @@
                 <c:formatCode>General</c:formatCode>
                 <c:ptCount val="6"/>
                 <c:pt idx="0">
-                  <c:v>14.4</c:v>
+                  <c:v>16.9</c:v>
                 </c:pt>
                 <c:pt idx="1">
-                  <c:v>21.3</c:v>
+                  <c:v>20.6</c:v>
                 </c:pt>
                 <c:pt idx="2">
-                  <c:v>27.0</c:v>
+                  <c:v>26.7</c:v>
                 </c:pt>
                 <c:pt idx="3">
-                  <c:v>32.7</c:v>
+                  <c:v>31.7</c:v>
                 </c:pt>
                 <c:pt idx="4">
-                  <c:v>49.2</c:v>
+                  <c:v>46.0</c:v>
                 </c:pt>
                 <c:pt idx="5">
-                  <c:v>39.2</c:v>
+                  <c:v>39.5</c:v>
                 </c:pt>
               </c:numCache>
             </c:numRef>
@@ -4274,22 +4274,22 @@
                 <c:formatCode>General</c:formatCode>
                 <c:ptCount val="6"/>
                 <c:pt idx="0">
-                  <c:v>121.92</c:v>
+                  <c:v>154.64</c:v>
                 </c:pt>
                 <c:pt idx="1">
-                  <c:v>159.91</c:v>
+                  <c:v>191.87</c:v>
                 </c:pt>
                 <c:pt idx="2">
-                  <c:v>157.48</c:v>
+                  <c:v>204.7</c:v>
                 </c:pt>
                 <c:pt idx="3">
-                  <c:v>166.72</c:v>
+                  <c:v>209.13</c:v>
                 </c:pt>
                 <c:pt idx="4">
-                  <c:v>179.42</c:v>
+                  <c:v>190.25</c:v>
                 </c:pt>
                 <c:pt idx="5">
-                  <c:v>271.99</c:v>
+                  <c:v>254.0</c:v>
                 </c:pt>
               </c:numCache>
             </c:numRef>
@@ -4435,22 +4435,22 @@
                 <c:formatCode>General</c:formatCode>
                 <c:ptCount val="6"/>
                 <c:pt idx="0">
-                  <c:v>161.26</c:v>
+                  <c:v>143.42</c:v>
                 </c:pt>
                 <c:pt idx="1">
-                  <c:v>162.74</c:v>
+                  <c:v>188.79</c:v>
                 </c:pt>
                 <c:pt idx="2">
-                  <c:v>173.25</c:v>
+                  <c:v>190.78</c:v>
                 </c:pt>
                 <c:pt idx="3">
-                  <c:v>169.84</c:v>
+                  <c:v>197.62</c:v>
                 </c:pt>
                 <c:pt idx="4">
-                  <c:v>177.67</c:v>
+                  <c:v>183.88</c:v>
                 </c:pt>
                 <c:pt idx="5">
-                  <c:v>205.49</c:v>
+                  <c:v>218.29</c:v>
                 </c:pt>
               </c:numCache>
             </c:numRef>
@@ -4596,22 +4596,22 @@
                 <c:formatCode>General</c:formatCode>
                 <c:ptCount val="6"/>
                 <c:pt idx="0">
-                  <c:v>1588.79</c:v>
+                  <c:v>1551.5</c:v>
                 </c:pt>
                 <c:pt idx="1">
-                  <c:v>1704.1</c:v>
+                  <c:v>1700.9</c:v>
                 </c:pt>
                 <c:pt idx="2">
-                  <c:v>1870.02</c:v>
+                  <c:v>1862.6</c:v>
                 </c:pt>
                 <c:pt idx="3">
-                  <c:v>1967.44</c:v>
+                  <c:v>1956.5</c:v>
                 </c:pt>
                 <c:pt idx="4">
-                  <c:v>1882.65</c:v>
+                  <c:v>1889.7</c:v>
                 </c:pt>
                 <c:pt idx="5">
-                  <c:v>2032.76</c:v>
+                  <c:v>1996.2</c:v>
                 </c:pt>
               </c:numCache>
             </c:numRef>
@@ -4670,22 +4670,22 @@
                 <c:formatCode>General</c:formatCode>
                 <c:ptCount val="6"/>
                 <c:pt idx="0">
-                  <c:v>1921.05</c:v>
+                  <c:v>1960.3</c:v>
                 </c:pt>
                 <c:pt idx="1">
-                  <c:v>2028.59</c:v>
+                  <c:v>2025.8</c:v>
                 </c:pt>
                 <c:pt idx="2">
-                  <c:v>2066.67</c:v>
+                  <c:v>2059.9</c:v>
                 </c:pt>
                 <c:pt idx="3">
-                  <c:v>2053.06</c:v>
+                  <c:v>2052.1</c:v>
                 </c:pt>
                 <c:pt idx="4">
-                  <c:v>2211.59</c:v>
+                  <c:v>2204.3</c:v>
                 </c:pt>
                 <c:pt idx="5">
-                  <c:v>2340.18</c:v>
+                  <c:v>2336.1</c:v>
                 </c:pt>
               </c:numCache>
             </c:numRef>
@@ -4831,22 +4831,22 @@
                 <c:formatCode>General</c:formatCode>
                 <c:ptCount val="6"/>
                 <c:pt idx="0">
-                  <c:v>70.4</c:v>
+                  <c:v>101.2</c:v>
                 </c:pt>
                 <c:pt idx="1">
-                  <c:v>84.0</c:v>
+                  <c:v>107.6</c:v>
                 </c:pt>
                 <c:pt idx="2">
-                  <c:v>81.5</c:v>
+                  <c:v>105.7</c:v>
                 </c:pt>
                 <c:pt idx="3">
-                  <c:v>82.8</c:v>
+                  <c:v>110.6</c:v>
                 </c:pt>
                 <c:pt idx="4">
-                  <c:v>88.9</c:v>
+                  <c:v>96.5</c:v>
                 </c:pt>
                 <c:pt idx="5">
-                  <c:v>127.2</c:v>
+                  <c:v>124.1</c:v>
                 </c:pt>
               </c:numCache>
             </c:numRef>
@@ -4905,22 +4905,22 @@
                 <c:formatCode>General</c:formatCode>
                 <c:ptCount val="6"/>
                 <c:pt idx="0">
-                  <c:v>82.5</c:v>
+                  <c:v>77.3</c:v>
                 </c:pt>
                 <c:pt idx="1">
-                  <c:v>78.6</c:v>
+                  <c:v>91.7</c:v>
                 </c:pt>
                 <c:pt idx="2">
-                  <c:v>83.0</c:v>
+                  <c:v>91.6</c:v>
                 </c:pt>
                 <c:pt idx="3">
-                  <c:v>82.8</c:v>
+                  <c:v>95.6</c:v>
                 </c:pt>
                 <c:pt idx="4">
-                  <c:v>78.1</c:v>
+                  <c:v>82.2</c:v>
                 </c:pt>
                 <c:pt idx="5">
-                  <c:v>85.4</c:v>
+                  <c:v>91.9</c:v>
                 </c:pt>
               </c:numCache>
             </c:numRef>
@@ -5066,22 +5066,22 @@
                 <c:formatCode>General</c:formatCode>
                 <c:ptCount val="6"/>
                 <c:pt idx="0">
-                  <c:v>32.5</c:v>
+                  <c:v>32.1</c:v>
                 </c:pt>
                 <c:pt idx="1">
-                  <c:v>33.1</c:v>
+                  <c:v>33.0</c:v>
                 </c:pt>
                 <c:pt idx="2">
-                  <c:v>33.5</c:v>
+                  <c:v>33.4</c:v>
                 </c:pt>
                 <c:pt idx="3">
                   <c:v>34.6</c:v>
                 </c:pt>
                 <c:pt idx="4">
-                  <c:v>34.5</c:v>
+                  <c:v>33.4</c:v>
                 </c:pt>
                 <c:pt idx="5">
-                  <c:v>36.3</c:v>
+                  <c:v>35.9</c:v>
                 </c:pt>
               </c:numCache>
             </c:numRef>
@@ -5140,10 +5140,10 @@
                 <c:formatCode>General</c:formatCode>
                 <c:ptCount val="6"/>
                 <c:pt idx="0">
-                  <c:v>11.0</c:v>
+                  <c:v>13.7</c:v>
                 </c:pt>
                 <c:pt idx="1">
-                  <c:v>12.5</c:v>
+                  <c:v>12.7</c:v>
                 </c:pt>
                 <c:pt idx="2">
                   <c:v>12.5</c:v>
@@ -5152,10 +5152,10 @@
                   <c:v>13.2</c:v>
                 </c:pt>
                 <c:pt idx="4">
-                  <c:v>14.7</c:v>
+                  <c:v>14.9</c:v>
                 </c:pt>
                 <c:pt idx="5">
-                  <c:v>18.2</c:v>
+                  <c:v>19.8</c:v>
                 </c:pt>
               </c:numCache>
             </c:numRef>
@@ -5301,22 +5301,22 @@
                 <c:formatCode>General</c:formatCode>
                 <c:ptCount val="6"/>
                 <c:pt idx="0">
-                  <c:v>13.35</c:v>
+                  <c:v>13.34</c:v>
                 </c:pt>
                 <c:pt idx="1">
-                  <c:v>13.42</c:v>
+                  <c:v>13.49</c:v>
                 </c:pt>
                 <c:pt idx="2">
-                  <c:v>12.8</c:v>
+                  <c:v>14.05</c:v>
                 </c:pt>
                 <c:pt idx="3">
-                  <c:v>13.0</c:v>
+                  <c:v>14.08</c:v>
                 </c:pt>
                 <c:pt idx="4">
-                  <c:v>12.39</c:v>
+                  <c:v>13.74</c:v>
                 </c:pt>
                 <c:pt idx="5">
-                  <c:v>12.14</c:v>
+                  <c:v>13.23</c:v>
                 </c:pt>
               </c:numCache>
             </c:numRef>
@@ -5462,22 +5462,22 @@
                 <c:formatCode>General</c:formatCode>
                 <c:ptCount val="6"/>
                 <c:pt idx="0">
-                  <c:v>12.53</c:v>
+                  <c:v>12.58</c:v>
                 </c:pt>
                 <c:pt idx="1">
-                  <c:v>12.57</c:v>
+                  <c:v>12.59</c:v>
                 </c:pt>
                 <c:pt idx="2">
-                  <c:v>12.38</c:v>
+                  <c:v>13.53</c:v>
                 </c:pt>
                 <c:pt idx="3">
-                  <c:v>12.43</c:v>
+                  <c:v>13.62</c:v>
                 </c:pt>
                 <c:pt idx="4">
-                  <c:v>12.05</c:v>
+                  <c:v>13.41</c:v>
                 </c:pt>
                 <c:pt idx="5">
-                  <c:v>11.68</c:v>
+                  <c:v>12.79</c:v>
                 </c:pt>
               </c:numCache>
             </c:numRef>
@@ -5536,22 +5536,22 @@
                 <c:formatCode>General</c:formatCode>
                 <c:ptCount val="6"/>
                 <c:pt idx="0">
-                  <c:v>14.05</c:v>
+                  <c:v>14.3</c:v>
                 </c:pt>
                 <c:pt idx="1">
-                  <c:v>14.59</c:v>
+                  <c:v>14.76</c:v>
                 </c:pt>
                 <c:pt idx="2">
-                  <c:v>13.49</c:v>
+                  <c:v>14.85</c:v>
                 </c:pt>
                 <c:pt idx="3">
-                  <c:v>13.67</c:v>
+                  <c:v>14.85</c:v>
                 </c:pt>
                 <c:pt idx="4">
-                  <c:v>13.4</c:v>
+                  <c:v>14.77</c:v>
                 </c:pt>
                 <c:pt idx="5">
-                  <c:v>13.98</c:v>
+                  <c:v>15.11</c:v>
                 </c:pt>
               </c:numCache>
             </c:numRef>
@@ -5697,22 +5697,22 @@
                 <c:formatCode>General</c:formatCode>
                 <c:ptCount val="6"/>
                 <c:pt idx="0">
-                  <c:v>2.91</c:v>
+                  <c:v>3.17</c:v>
                 </c:pt>
                 <c:pt idx="1">
-                  <c:v>3.11</c:v>
+                  <c:v>3.31</c:v>
                 </c:pt>
                 <c:pt idx="2">
-                  <c:v>4.29</c:v>
+                  <c:v>3.88</c:v>
                 </c:pt>
                 <c:pt idx="3">
+                  <c:v>4.98</c:v>
+                </c:pt>
+                <c:pt idx="4">
+                  <c:v>5.58</c:v>
+                </c:pt>
+                <c:pt idx="5">
                   <c:v>5.28</c:v>
-                </c:pt>
-                <c:pt idx="4">
-                  <c:v>5.76</c:v>
-                </c:pt>
-                <c:pt idx="5">
-                  <c:v>5.5</c:v>
                 </c:pt>
               </c:numCache>
             </c:numRef>
@@ -5771,10 +5771,10 @@
                 <c:formatCode>General</c:formatCode>
                 <c:ptCount val="6"/>
                 <c:pt idx="0">
-                  <c:v>3.38</c:v>
+                  <c:v>2.88</c:v>
                 </c:pt>
                 <c:pt idx="1">
-                  <c:v>3.82</c:v>
+                  <c:v>3.81</c:v>
                 </c:pt>
                 <c:pt idx="2">
                   <c:v>3.89</c:v>
@@ -5783,10 +5783,10 @@
                   <c:v>4.32</c:v>
                 </c:pt>
                 <c:pt idx="4">
-                  <c:v>5.31</c:v>
+                  <c:v>5.36</c:v>
                 </c:pt>
                 <c:pt idx="5">
-                  <c:v>7.11</c:v>
+                  <c:v>8.21</c:v>
                 </c:pt>
               </c:numCache>
             </c:numRef>
@@ -5932,13 +5932,13 @@
                 <c:formatCode>General</c:formatCode>
                 <c:ptCount val="6"/>
                 <c:pt idx="0">
-                  <c:v>4.77</c:v>
+                  <c:v>5.28</c:v>
                 </c:pt>
                 <c:pt idx="1">
-                  <c:v>6.05</c:v>
+                  <c:v>6.02</c:v>
                 </c:pt>
                 <c:pt idx="2">
-                  <c:v>5.94</c:v>
+                  <c:v>5.93</c:v>
                 </c:pt>
                 <c:pt idx="3">
                   <c:v>5.69</c:v>
@@ -5947,7 +5947,7 @@
                   <c:v>5.65</c:v>
                 </c:pt>
                 <c:pt idx="5">
-                  <c:v>5.56</c:v>
+                  <c:v>5.54</c:v>
                 </c:pt>
               </c:numCache>
             </c:numRef>
@@ -6091,10 +6091,10 @@
                   <c:v>0.0</c:v>
                 </c:pt>
                 <c:pt idx="1">
-                  <c:v>5.04</c:v>
+                  <c:v>5.38</c:v>
                 </c:pt>
                 <c:pt idx="2">
-                  <c:v>6.72</c:v>
+                  <c:v>5.13</c:v>
                 </c:pt>
                 <c:pt idx="3">
                   <c:v>0.0</c:v>
@@ -6266,16 +6266,16 @@
                   <c:v>SUV-C</c:v>
                 </c:pt>
                 <c:pt idx="1">
-                  <c:v>Car-D</c:v>
+                  <c:v>Car-A</c:v>
                 </c:pt>
                 <c:pt idx="2">
                   <c:v>SUV-D</c:v>
                 </c:pt>
                 <c:pt idx="3">
+                  <c:v>Car-D</c:v>
+                </c:pt>
+                <c:pt idx="4">
                   <c:v>Car-C</c:v>
-                </c:pt>
-                <c:pt idx="4">
-                  <c:v>Car-A</c:v>
                 </c:pt>
                 <c:pt idx="5">
                   <c:v>Car-B</c:v>
@@ -6296,28 +6296,28 @@
                 <c:formatCode>General</c:formatCode>
                 <c:ptCount val="8"/>
                 <c:pt idx="0">
-                  <c:v>525.0</c:v>
+                  <c:v>529</c:v>
                 </c:pt>
                 <c:pt idx="1">
-                  <c:v>420.0</c:v>
+                  <c:v>466</c:v>
                 </c:pt>
                 <c:pt idx="2">
-                  <c:v>403.0</c:v>
+                  <c:v>456</c:v>
                 </c:pt>
                 <c:pt idx="3">
-                  <c:v>383.0</c:v>
+                  <c:v>416</c:v>
                 </c:pt>
                 <c:pt idx="4">
-                  <c:v>345.0</c:v>
+                  <c:v>390</c:v>
                 </c:pt>
                 <c:pt idx="5">
-                  <c:v>164.0</c:v>
+                  <c:v>171</c:v>
                 </c:pt>
                 <c:pt idx="6">
-                  <c:v>127.0</c:v>
+                  <c:v>127</c:v>
                 </c:pt>
                 <c:pt idx="7">
-                  <c:v>95.0</c:v>
+                  <c:v>90</c:v>
                 </c:pt>
               </c:numCache>
             </c:numRef>
@@ -6418,13 +6418,13 @@
                   <c:v>0.0</c:v>
                 </c:pt>
                 <c:pt idx="1">
-                  <c:v>5.55</c:v>
+                  <c:v>5.41</c:v>
                 </c:pt>
                 <c:pt idx="2">
-                  <c:v>7.12</c:v>
+                  <c:v>6.44</c:v>
                 </c:pt>
                 <c:pt idx="3">
-                  <c:v>5.42</c:v>
+                  <c:v>0.0</c:v>
                 </c:pt>
               </c:numCache>
             </c:numRef>
@@ -6560,22 +6560,22 @@
                 <c:formatCode>General</c:formatCode>
                 <c:ptCount val="6"/>
                 <c:pt idx="0">
-                  <c:v>2124.8</c:v>
+                  <c:v>1808.8</c:v>
                 </c:pt>
                 <c:pt idx="1">
-                  <c:v>1541.6</c:v>
+                  <c:v>1546.3</c:v>
                 </c:pt>
                 <c:pt idx="2">
-                  <c:v>1535.2</c:v>
+                  <c:v>1529.7</c:v>
                 </c:pt>
                 <c:pt idx="3">
-                  <c:v>2078.8</c:v>
+                  <c:v>2197.3</c:v>
                 </c:pt>
                 <c:pt idx="4">
-                  <c:v>1255.4</c:v>
+                  <c:v>1313.8</c:v>
                 </c:pt>
                 <c:pt idx="5">
-                  <c:v>748.1</c:v>
+                  <c:v>684.9</c:v>
                 </c:pt>
               </c:numCache>
             </c:numRef>
@@ -6634,22 +6634,22 @@
                 <c:formatCode>General</c:formatCode>
                 <c:ptCount val="6"/>
                 <c:pt idx="0">
-                  <c:v>182.4</c:v>
+                  <c:v>282.0</c:v>
                 </c:pt>
                 <c:pt idx="1">
-                  <c:v>232.5</c:v>
+                  <c:v>261.4</c:v>
                 </c:pt>
                 <c:pt idx="2">
-                  <c:v>188.4</c:v>
+                  <c:v>222.2</c:v>
                 </c:pt>
                 <c:pt idx="3">
-                  <c:v>270.7</c:v>
+                  <c:v>355.1</c:v>
                 </c:pt>
                 <c:pt idx="4">
-                  <c:v>283.2</c:v>
+                  <c:v>429.3</c:v>
                 </c:pt>
                 <c:pt idx="5">
-                  <c:v>276.6</c:v>
+                  <c:v>285.7</c:v>
                 </c:pt>
               </c:numCache>
             </c:numRef>
@@ -6796,22 +6796,22 @@
                 <c:formatCode>General</c:formatCode>
                 <c:ptCount val="6"/>
                 <c:pt idx="0">
-                  <c:v>74.3</c:v>
+                  <c:v>66.2</c:v>
                 </c:pt>
                 <c:pt idx="1">
-                  <c:v>58.9</c:v>
+                  <c:v>58.4</c:v>
                 </c:pt>
                 <c:pt idx="2">
-                  <c:v>57.7</c:v>
+                  <c:v>56.1</c:v>
                 </c:pt>
                 <c:pt idx="3">
-                  <c:v>69.5</c:v>
+                  <c:v>70.5</c:v>
                 </c:pt>
                 <c:pt idx="4">
-                  <c:v>54.4</c:v>
+                  <c:v>56.5</c:v>
                 </c:pt>
                 <c:pt idx="5">
-                  <c:v>39.9</c:v>
+                  <c:v>37.6</c:v>
                 </c:pt>
               </c:numCache>
             </c:numRef>
@@ -6870,22 +6870,22 @@
                 <c:formatCode>General</c:formatCode>
                 <c:ptCount val="6"/>
                 <c:pt idx="0">
-                  <c:v>83.8</c:v>
+                  <c:v>80.4</c:v>
                 </c:pt>
                 <c:pt idx="1">
-                  <c:v>69.2</c:v>
+                  <c:v>68.5</c:v>
                 </c:pt>
                 <c:pt idx="2">
-                  <c:v>70.5</c:v>
+                  <c:v>69.0</c:v>
                 </c:pt>
                 <c:pt idx="3">
-                  <c:v>80.1</c:v>
+                  <c:v>81.4</c:v>
                 </c:pt>
                 <c:pt idx="4">
-                  <c:v>65.2</c:v>
+                  <c:v>66.2</c:v>
                 </c:pt>
                 <c:pt idx="5">
-                  <c:v>49.7</c:v>
+                  <c:v>48.7</c:v>
                 </c:pt>
               </c:numCache>
             </c:numRef>
@@ -6944,22 +6944,22 @@
                 <c:formatCode>General</c:formatCode>
                 <c:ptCount val="6"/>
                 <c:pt idx="0">
-                  <c:v>96.3</c:v>
+                  <c:v>95.1</c:v>
                 </c:pt>
                 <c:pt idx="1">
-                  <c:v>87.7</c:v>
+                  <c:v>85.9</c:v>
                 </c:pt>
                 <c:pt idx="2">
-                  <c:v>87.8</c:v>
+                  <c:v>86.5</c:v>
                 </c:pt>
                 <c:pt idx="3">
-                  <c:v>91.5</c:v>
+                  <c:v>92.2</c:v>
                 </c:pt>
                 <c:pt idx="4">
-                  <c:v>83.8</c:v>
+                  <c:v>84.3</c:v>
                 </c:pt>
                 <c:pt idx="5">
-                  <c:v>65.3</c:v>
+                  <c:v>63.5</c:v>
                 </c:pt>
               </c:numCache>
             </c:numRef>
@@ -7100,22 +7100,22 @@
                 <c:formatCode>General</c:formatCode>
                 <c:ptCount val="6"/>
                 <c:pt idx="0">
-                  <c:v>13.0</c:v>
+                  <c:v>19.7</c:v>
                 </c:pt>
                 <c:pt idx="1">
-                  <c:v>19.0</c:v>
+                  <c:v>21.4</c:v>
                 </c:pt>
                 <c:pt idx="2">
-                  <c:v>16.0</c:v>
+                  <c:v>18.9</c:v>
                 </c:pt>
                 <c:pt idx="3">
-                  <c:v>21.3</c:v>
+                  <c:v>24.4</c:v>
                 </c:pt>
                 <c:pt idx="4">
-                  <c:v>17.8</c:v>
+                  <c:v>25.3</c:v>
                 </c:pt>
                 <c:pt idx="5">
-                  <c:v>17.5</c:v>
+                  <c:v>19.3</c:v>
                 </c:pt>
               </c:numCache>
             </c:numRef>
@@ -7174,22 +7174,22 @@
                 <c:formatCode>General</c:formatCode>
                 <c:ptCount val="6"/>
                 <c:pt idx="0">
-                  <c:v>19.6</c:v>
+                  <c:v>26.1</c:v>
                 </c:pt>
                 <c:pt idx="1">
-                  <c:v>26.9</c:v>
+                  <c:v>29.1</c:v>
                 </c:pt>
                 <c:pt idx="2">
-                  <c:v>21.8</c:v>
+                  <c:v>24.9</c:v>
                 </c:pt>
                 <c:pt idx="3">
-                  <c:v>28.4</c:v>
+                  <c:v>34.3</c:v>
                 </c:pt>
                 <c:pt idx="4">
-                  <c:v>27.6</c:v>
+                  <c:v>35.2</c:v>
                 </c:pt>
                 <c:pt idx="5">
-                  <c:v>26.7</c:v>
+                  <c:v>28.9</c:v>
                 </c:pt>
               </c:numCache>
             </c:numRef>
@@ -7248,22 +7248,22 @@
                 <c:formatCode>General</c:formatCode>
                 <c:ptCount val="6"/>
                 <c:pt idx="0">
-                  <c:v>33.6</c:v>
+                  <c:v>38.0</c:v>
                 </c:pt>
                 <c:pt idx="1">
-                  <c:v>39.3</c:v>
+                  <c:v>41.2</c:v>
                 </c:pt>
                 <c:pt idx="2">
-                  <c:v>33.1</c:v>
+                  <c:v>35.9</c:v>
                 </c:pt>
                 <c:pt idx="3">
-                  <c:v>40.9</c:v>
+                  <c:v>47.6</c:v>
                 </c:pt>
                 <c:pt idx="4">
-                  <c:v>44.6</c:v>
+                  <c:v>52.5</c:v>
                 </c:pt>
                 <c:pt idx="5">
-                  <c:v>42.3</c:v>
+                  <c:v>44.2</c:v>
                 </c:pt>
               </c:numCache>
             </c:numRef>
@@ -7377,34 +7377,34 @@
               <c:strCache>
                 <c:ptCount val="10"/>
                 <c:pt idx="0">
-                  <c:v>宁德时代(福鼎时代)</c:v>
+                  <c:v>宁德时代</c:v>
                 </c:pt>
                 <c:pt idx="1">
+                  <c:v>弗迪</c:v>
+                </c:pt>
+                <c:pt idx="2">
+                  <c:v>国轩高科</c:v>
+                </c:pt>
+                <c:pt idx="3">
+                  <c:v>蜂巢能源</c:v>
+                </c:pt>
+                <c:pt idx="4">
+                  <c:v>中创新航</c:v>
+                </c:pt>
+                <c:pt idx="5">
+                  <c:v>欣旺达</c:v>
+                </c:pt>
+                <c:pt idx="6">
                   <c:v>比亚迪</c:v>
                 </c:pt>
-                <c:pt idx="2">
+                <c:pt idx="7">
+                  <c:v>宁德时代(四川时代)</c:v>
+                </c:pt>
+                <c:pt idx="8">
                   <c:v>宁德时代(江苏时代)</c:v>
                 </c:pt>
-                <c:pt idx="3">
-                  <c:v>欣旺达</c:v>
-                </c:pt>
-                <c:pt idx="4">
-                  <c:v>宁德时代(四川时代)</c:v>
-                </c:pt>
-                <c:pt idx="5">
-                  <c:v>中创新航</c:v>
-                </c:pt>
-                <c:pt idx="6">
-                  <c:v>蜂巢能源</c:v>
-                </c:pt>
-                <c:pt idx="7">
-                  <c:v>国轩高科</c:v>
-                </c:pt>
-                <c:pt idx="8">
-                  <c:v>宁德时代</c:v>
-                </c:pt>
                 <c:pt idx="9">
-                  <c:v>弗迪</c:v>
+                  <c:v>亿纬动力</c:v>
                 </c:pt>
               </c:strCache>
             </c:strRef>
@@ -7416,34 +7416,34 @@
                 <c:formatCode>General</c:formatCode>
                 <c:ptCount val="10"/>
                 <c:pt idx="0">
-                  <c:v>23.0</c:v>
+                  <c:v>389</c:v>
                 </c:pt>
                 <c:pt idx="1">
-                  <c:v>30.0</c:v>
+                  <c:v>368</c:v>
                 </c:pt>
                 <c:pt idx="2">
-                  <c:v>38.0</c:v>
+                  <c:v>125</c:v>
                 </c:pt>
                 <c:pt idx="3">
-                  <c:v>39.0</c:v>
+                  <c:v>71</c:v>
                 </c:pt>
                 <c:pt idx="4">
-                  <c:v>39.0</c:v>
+                  <c:v>61</c:v>
                 </c:pt>
                 <c:pt idx="5">
-                  <c:v>49.0</c:v>
+                  <c:v>60</c:v>
                 </c:pt>
                 <c:pt idx="6">
-                  <c:v>66.0</c:v>
+                  <c:v>54</c:v>
                 </c:pt>
                 <c:pt idx="7">
-                  <c:v>122.0</c:v>
+                  <c:v>46</c:v>
                 </c:pt>
                 <c:pt idx="8">
-                  <c:v>316.0</c:v>
+                  <c:v>33</c:v>
                 </c:pt>
                 <c:pt idx="9">
-                  <c:v>331.0</c:v>
+                  <c:v>26</c:v>
                 </c:pt>
               </c:numCache>
             </c:numRef>
@@ -7553,34 +7553,34 @@
               <c:strCache>
                 <c:ptCount val="10"/>
                 <c:pt idx="0">
+                  <c:v>长沙市比亚迪汽车有限公司</c:v>
+                </c:pt>
+                <c:pt idx="1">
+                  <c:v>重庆青山工业有限责任公司</c:v>
+                </c:pt>
+                <c:pt idx="2">
+                  <c:v>奇瑞汽车</c:v>
+                </c:pt>
+                <c:pt idx="3">
+                  <c:v>苏州汇川联合动力系统股份有限公司</c:v>
+                </c:pt>
+                <c:pt idx="4">
+                  <c:v>华为数字能源技术有限公司</c:v>
+                </c:pt>
+                <c:pt idx="5">
+                  <c:v>联合汽车电子有限公司</c:v>
+                </c:pt>
+                <c:pt idx="6">
                   <c:v>柳州赛克科技发展有限公司</c:v>
                 </c:pt>
-                <c:pt idx="1">
-                  <c:v>苏州汇川</c:v>
-                </c:pt>
-                <c:pt idx="2">
-                  <c:v>衢州极电电动汽车技术有限公司</c:v>
-                </c:pt>
-                <c:pt idx="3">
-                  <c:v>锐湃动力科技有限公司</c:v>
-                </c:pt>
-                <c:pt idx="4">
+                <c:pt idx="7">
+                  <c:v>珠海英搏尔电气股份有限公司</c:v>
+                </c:pt>
+                <c:pt idx="8">
+                  <c:v>金华凌昇动力科技有限公司</c:v>
+                </c:pt>
+                <c:pt idx="9">
                   <c:v>联合汽车电子</c:v>
-                </c:pt>
-                <c:pt idx="5">
-                  <c:v>华为数字能源技术有限公司</c:v>
-                </c:pt>
-                <c:pt idx="6">
-                  <c:v>珠海英搏尔电气股份有限公司</c:v>
-                </c:pt>
-                <c:pt idx="7">
-                  <c:v>苏州汇川联合动力系统股份有限公司</c:v>
-                </c:pt>
-                <c:pt idx="8">
-                  <c:v>联合汽车电子有限公司</c:v>
-                </c:pt>
-                <c:pt idx="9">
-                  <c:v>奇瑞汽车</c:v>
                 </c:pt>
               </c:strCache>
             </c:strRef>
@@ -7592,34 +7592,34 @@
                 <c:formatCode>General</c:formatCode>
                 <c:ptCount val="10"/>
                 <c:pt idx="0">
-                  <c:v>48.0</c:v>
+                  <c:v>408</c:v>
                 </c:pt>
                 <c:pt idx="1">
-                  <c:v>48.0</c:v>
+                  <c:v>151</c:v>
                 </c:pt>
                 <c:pt idx="2">
-                  <c:v>51.0</c:v>
+                  <c:v>114</c:v>
                 </c:pt>
                 <c:pt idx="3">
-                  <c:v>54.0</c:v>
+                  <c:v>108</c:v>
                 </c:pt>
                 <c:pt idx="4">
-                  <c:v>65.0</c:v>
+                  <c:v>106</c:v>
                 </c:pt>
                 <c:pt idx="5">
-                  <c:v>71.0</c:v>
+                  <c:v>99</c:v>
                 </c:pt>
                 <c:pt idx="6">
-                  <c:v>71.0</c:v>
+                  <c:v>95</c:v>
                 </c:pt>
                 <c:pt idx="7">
-                  <c:v>97.0</c:v>
+                  <c:v>86</c:v>
                 </c:pt>
                 <c:pt idx="8">
-                  <c:v>99.0</c:v>
+                  <c:v>79</c:v>
                 </c:pt>
                 <c:pt idx="9">
-                  <c:v>106.0</c:v>
+                  <c:v>65</c:v>
                 </c:pt>
               </c:numCache>
             </c:numRef>
@@ -7729,28 +7729,28 @@
               <c:strCache>
                 <c:ptCount val="8"/>
                 <c:pt idx="0">
-                  <c:v>Lux Car-2</c:v>
+                  <c:v>SUV-C</c:v>
                 </c:pt>
                 <c:pt idx="1">
-                  <c:v>Lux Car</c:v>
+                  <c:v>SUV-D</c:v>
                 </c:pt>
                 <c:pt idx="2">
-                  <c:v>SUV-D</c:v>
+                  <c:v>Car-C</c:v>
                 </c:pt>
                 <c:pt idx="3">
-                  <c:v>Lux Car-5</c:v>
+                  <c:v>Car-D</c:v>
                 </c:pt>
                 <c:pt idx="4">
-                  <c:v>Car-D</c:v>
+                  <c:v>Car-B</c:v>
                 </c:pt>
                 <c:pt idx="5">
-                  <c:v>Lux SUV</c:v>
+                  <c:v>Car-A</c:v>
                 </c:pt>
                 <c:pt idx="6">
-                  <c:v>Lux SUV-4</c:v>
+                  <c:v>MPV-D</c:v>
                 </c:pt>
                 <c:pt idx="7">
-                  <c:v>Car</c:v>
+                  <c:v>SUV-B</c:v>
                 </c:pt>
               </c:strCache>
             </c:strRef>
@@ -7762,28 +7762,28 @@
                 <c:formatCode>General</c:formatCode>
                 <c:ptCount val="8"/>
                 <c:pt idx="0">
-                  <c:v>632.6</c:v>
+                  <c:v>523.5</c:v>
                 </c:pt>
                 <c:pt idx="1">
-                  <c:v>0.0</c:v>
+                  <c:v>530.5</c:v>
                 </c:pt>
                 <c:pt idx="2">
-                  <c:v>531.48</c:v>
+                  <c:v>516.3</c:v>
                 </c:pt>
                 <c:pt idx="3">
-                  <c:v>0.0</c:v>
+                  <c:v>630.4</c:v>
                 </c:pt>
                 <c:pt idx="4">
-                  <c:v>638.61</c:v>
+                  <c:v>359.7</c:v>
                 </c:pt>
                 <c:pt idx="5">
-                  <c:v>0.0</c:v>
+                  <c:v>261.0</c:v>
                 </c:pt>
                 <c:pt idx="6">
-                  <c:v>639.17</c:v>
+                  <c:v>601.5</c:v>
                 </c:pt>
                 <c:pt idx="7">
-                  <c:v>0.0</c:v>
+                  <c:v>437.7</c:v>
                 </c:pt>
               </c:numCache>
             </c:numRef>
@@ -7815,28 +7815,28 @@
               <c:strCache>
                 <c:ptCount val="8"/>
                 <c:pt idx="0">
-                  <c:v>Lux Car-2</c:v>
+                  <c:v>SUV-C</c:v>
                 </c:pt>
                 <c:pt idx="1">
-                  <c:v>Lux Car</c:v>
+                  <c:v>SUV-D</c:v>
                 </c:pt>
                 <c:pt idx="2">
-                  <c:v>SUV-D</c:v>
+                  <c:v>Car-C</c:v>
                 </c:pt>
                 <c:pt idx="3">
-                  <c:v>Lux Car-5</c:v>
+                  <c:v>Car-D</c:v>
                 </c:pt>
                 <c:pt idx="4">
-                  <c:v>Car-D</c:v>
+                  <c:v>Car-B</c:v>
                 </c:pt>
                 <c:pt idx="5">
-                  <c:v>Lux SUV</c:v>
+                  <c:v>Car-A</c:v>
                 </c:pt>
                 <c:pt idx="6">
-                  <c:v>Lux SUV-4</c:v>
+                  <c:v>MPV-D</c:v>
                 </c:pt>
                 <c:pt idx="7">
-                  <c:v>Car</c:v>
+                  <c:v>SUV-B</c:v>
                 </c:pt>
               </c:strCache>
             </c:strRef>
@@ -7848,28 +7848,28 @@
                 <c:formatCode>General</c:formatCode>
                 <c:ptCount val="8"/>
                 <c:pt idx="0">
-                  <c:v>866.0</c:v>
+                  <c:v>540.1</c:v>
                 </c:pt>
                 <c:pt idx="1">
-                  <c:v>772.0</c:v>
+                  <c:v>618.0</c:v>
                 </c:pt>
                 <c:pt idx="2">
-                  <c:v>673.5</c:v>
+                  <c:v>515.2</c:v>
                 </c:pt>
                 <c:pt idx="3">
-                  <c:v>662.0</c:v>
+                  <c:v>648.3</c:v>
                 </c:pt>
                 <c:pt idx="4">
-                  <c:v>652.79</c:v>
+                  <c:v>368.3</c:v>
                 </c:pt>
                 <c:pt idx="5">
-                  <c:v>635.12</c:v>
+                  <c:v>252.7</c:v>
                 </c:pt>
                 <c:pt idx="6">
-                  <c:v>632.5</c:v>
+                  <c:v>513.5</c:v>
                 </c:pt>
                 <c:pt idx="7">
-                  <c:v>599.91</c:v>
+                  <c:v>416.9</c:v>
                 </c:pt>
               </c:numCache>
             </c:numRef>
@@ -7983,28 +7983,28 @@
               <c:strCache>
                 <c:ptCount val="8"/>
                 <c:pt idx="0">
-                  <c:v>Lux Car-2</c:v>
+                  <c:v>SUV-C</c:v>
                 </c:pt>
                 <c:pt idx="1">
-                  <c:v>Lux Car</c:v>
+                  <c:v>SUV-D</c:v>
                 </c:pt>
                 <c:pt idx="2">
-                  <c:v>SUV-D</c:v>
+                  <c:v>Car-C</c:v>
                 </c:pt>
                 <c:pt idx="3">
-                  <c:v>Lux Car-5</c:v>
+                  <c:v>Car-D</c:v>
                 </c:pt>
                 <c:pt idx="4">
-                  <c:v>Car-D</c:v>
+                  <c:v>Car-B</c:v>
                 </c:pt>
                 <c:pt idx="5">
-                  <c:v>Lux SUV</c:v>
+                  <c:v>Car-A</c:v>
                 </c:pt>
                 <c:pt idx="6">
-                  <c:v>Lux SUV-4</c:v>
+                  <c:v>MPV-D</c:v>
                 </c:pt>
                 <c:pt idx="7">
-                  <c:v>Car</c:v>
+                  <c:v>SUV-B</c:v>
                 </c:pt>
               </c:strCache>
             </c:strRef>
@@ -8016,28 +8016,28 @@
                 <c:formatCode>General</c:formatCode>
                 <c:ptCount val="8"/>
                 <c:pt idx="0">
-                  <c:v>75.66</c:v>
+                  <c:v>68.3</c:v>
                 </c:pt>
                 <c:pt idx="1">
-                  <c:v>0.0</c:v>
+                  <c:v>79.0</c:v>
                 </c:pt>
                 <c:pt idx="2">
-                  <c:v>77.35</c:v>
+                  <c:v>60.5</c:v>
                 </c:pt>
                 <c:pt idx="3">
-                  <c:v>0.0</c:v>
+                  <c:v>80.3</c:v>
                 </c:pt>
                 <c:pt idx="4">
-                  <c:v>80.32</c:v>
+                  <c:v>41.0</c:v>
                 </c:pt>
                 <c:pt idx="5">
-                  <c:v>0.0</c:v>
+                  <c:v>24.5</c:v>
                 </c:pt>
                 <c:pt idx="6">
-                  <c:v>95.36</c:v>
+                  <c:v>98.3</c:v>
                 </c:pt>
                 <c:pt idx="7">
-                  <c:v>0.0</c:v>
+                  <c:v>50.9</c:v>
                 </c:pt>
               </c:numCache>
             </c:numRef>
@@ -8069,28 +8069,28 @@
               <c:strCache>
                 <c:ptCount val="8"/>
                 <c:pt idx="0">
-                  <c:v>Lux Car-2</c:v>
+                  <c:v>SUV-C</c:v>
                 </c:pt>
                 <c:pt idx="1">
-                  <c:v>Lux Car</c:v>
+                  <c:v>SUV-D</c:v>
                 </c:pt>
                 <c:pt idx="2">
-                  <c:v>SUV-D</c:v>
+                  <c:v>Car-C</c:v>
                 </c:pt>
                 <c:pt idx="3">
-                  <c:v>Lux Car-5</c:v>
+                  <c:v>Car-D</c:v>
                 </c:pt>
                 <c:pt idx="4">
-                  <c:v>Car-D</c:v>
+                  <c:v>Car-B</c:v>
                 </c:pt>
                 <c:pt idx="5">
-                  <c:v>Lux SUV</c:v>
+                  <c:v>Car-A</c:v>
                 </c:pt>
                 <c:pt idx="6">
-                  <c:v>Lux SUV-4</c:v>
+                  <c:v>MPV-D</c:v>
                 </c:pt>
                 <c:pt idx="7">
-                  <c:v>Car</c:v>
+                  <c:v>SUV-B</c:v>
                 </c:pt>
               </c:strCache>
             </c:strRef>
@@ -8102,28 +8102,28 @@
                 <c:formatCode>General</c:formatCode>
                 <c:ptCount val="8"/>
                 <c:pt idx="0">
-                  <c:v>89.0</c:v>
+                  <c:v>65.3</c:v>
                 </c:pt>
                 <c:pt idx="1">
-                  <c:v>126.67</c:v>
+                  <c:v>84.2</c:v>
                 </c:pt>
                 <c:pt idx="2">
-                  <c:v>89.68</c:v>
+                  <c:v>54.8</c:v>
                 </c:pt>
                 <c:pt idx="3">
-                  <c:v>94.36</c:v>
+                  <c:v>77.7</c:v>
                 </c:pt>
                 <c:pt idx="4">
-                  <c:v>77.67</c:v>
+                  <c:v>36.4</c:v>
                 </c:pt>
                 <c:pt idx="5">
-                  <c:v>92.86</c:v>
+                  <c:v>23.0</c:v>
                 </c:pt>
                 <c:pt idx="6">
-                  <c:v>99.84</c:v>
+                  <c:v>81.7</c:v>
                 </c:pt>
                 <c:pt idx="7">
-                  <c:v>70.63</c:v>
+                  <c:v>44.1</c:v>
                 </c:pt>
               </c:numCache>
             </c:numRef>
@@ -8233,9 +8233,9 @@
           <c:invertIfNegative val="0"/>
           <c:cat>
             <c:strRef>
-              <c:f>Sheet1!$A$2:$A$9</c:f>
+              <c:f>Sheet1!$A$2:$A$8</c:f>
               <c:strCache>
-                <c:ptCount val="8"/>
+                <c:ptCount val="7"/>
                 <c:pt idx="0">
                   <c:v>SUV-C</c:v>
                 </c:pt>
@@ -8252,46 +8252,40 @@
                   <c:v>MPV-D</c:v>
                 </c:pt>
                 <c:pt idx="5">
-                  <c:v>SUV</c:v>
+                  <c:v>SUV-E</c:v>
                 </c:pt>
                 <c:pt idx="6">
-                  <c:v>SUV-E</c:v>
-                </c:pt>
-                <c:pt idx="7">
-                  <c:v>Car</c:v>
+                  <c:v>Car-A</c:v>
                 </c:pt>
               </c:strCache>
             </c:strRef>
           </c:cat>
           <c:val>
             <c:numRef>
-              <c:f>Sheet1!$B$2:$B$9</c:f>
+              <c:f>Sheet1!$B$2:$B$8</c:f>
               <c:numCache>
                 <c:formatCode>General</c:formatCode>
-                <c:ptCount val="8"/>
+                <c:ptCount val="7"/>
                 <c:pt idx="0">
-                  <c:v>103.63</c:v>
+                  <c:v>103.6</c:v>
                 </c:pt>
                 <c:pt idx="1">
-                  <c:v>148.77</c:v>
+                  <c:v>149.2</c:v>
                 </c:pt>
                 <c:pt idx="2">
-                  <c:v>96.92</c:v>
+                  <c:v>96.9</c:v>
                 </c:pt>
                 <c:pt idx="3">
-                  <c:v>132.69</c:v>
+                  <c:v>130.9</c:v>
                 </c:pt>
                 <c:pt idx="4">
                   <c:v>129.0</c:v>
                 </c:pt>
                 <c:pt idx="5">
-                  <c:v>0.0</c:v>
+                  <c:v>171.0</c:v>
                 </c:pt>
                 <c:pt idx="6">
-                  <c:v>171.0</c:v>
-                </c:pt>
-                <c:pt idx="7">
-                  <c:v>0.0</c:v>
+                  <c:v>115.0</c:v>
                 </c:pt>
               </c:numCache>
             </c:numRef>
@@ -8319,9 +8313,9 @@
           <c:invertIfNegative val="0"/>
           <c:cat>
             <c:strRef>
-              <c:f>Sheet1!$A$2:$A$9</c:f>
+              <c:f>Sheet1!$A$2:$A$8</c:f>
               <c:strCache>
-                <c:ptCount val="8"/>
+                <c:ptCount val="7"/>
                 <c:pt idx="0">
                   <c:v>SUV-C</c:v>
                 </c:pt>
@@ -8338,46 +8332,40 @@
                   <c:v>MPV-D</c:v>
                 </c:pt>
                 <c:pt idx="5">
-                  <c:v>SUV</c:v>
+                  <c:v>SUV-E</c:v>
                 </c:pt>
                 <c:pt idx="6">
-                  <c:v>SUV-E</c:v>
-                </c:pt>
-                <c:pt idx="7">
-                  <c:v>Car</c:v>
+                  <c:v>Car-A</c:v>
                 </c:pt>
               </c:strCache>
             </c:strRef>
           </c:cat>
           <c:val>
             <c:numRef>
-              <c:f>Sheet1!$C$2:$C$9</c:f>
+              <c:f>Sheet1!$C$2:$C$8</c:f>
               <c:numCache>
                 <c:formatCode>General</c:formatCode>
-                <c:ptCount val="8"/>
+                <c:ptCount val="7"/>
                 <c:pt idx="0">
-                  <c:v>128.04</c:v>
+                  <c:v>125.9</c:v>
                 </c:pt>
                 <c:pt idx="1">
-                  <c:v>188.55</c:v>
+                  <c:v>186.6</c:v>
                 </c:pt>
                 <c:pt idx="2">
-                  <c:v>110.07</c:v>
+                  <c:v>110.1</c:v>
                 </c:pt>
                 <c:pt idx="3">
-                  <c:v>196.36</c:v>
+                  <c:v>188.6</c:v>
                 </c:pt>
                 <c:pt idx="4">
-                  <c:v>186.74</c:v>
+                  <c:v>187.2</c:v>
                 </c:pt>
                 <c:pt idx="5">
-                  <c:v>147.23</c:v>
+                  <c:v>194.1</c:v>
                 </c:pt>
                 <c:pt idx="6">
-                  <c:v>193.31</c:v>
-                </c:pt>
-                <c:pt idx="7">
-                  <c:v>141.93</c:v>
+                  <c:v>159.0</c:v>
                 </c:pt>
               </c:numCache>
             </c:numRef>
@@ -8491,40 +8479,40 @@
               <c:strCache>
                 <c:ptCount val="12"/>
                 <c:pt idx="0">
-                  <c:v>Lux MPV</c:v>
+                  <c:v>Lux Car-5</c:v>
                 </c:pt>
                 <c:pt idx="1">
-                  <c:v>Lux Car-5</c:v>
+                  <c:v>Lux Car</c:v>
                 </c:pt>
                 <c:pt idx="2">
                   <c:v>Lux SUV</c:v>
                 </c:pt>
                 <c:pt idx="3">
-                  <c:v>Lux Car</c:v>
+                  <c:v>MPV-D</c:v>
                 </c:pt>
                 <c:pt idx="4">
-                  <c:v>MPV-D</c:v>
+                  <c:v>Car-E</c:v>
                 </c:pt>
                 <c:pt idx="5">
-                  <c:v>Car-E</c:v>
+                  <c:v>Lux SUV-4</c:v>
                 </c:pt>
                 <c:pt idx="6">
                   <c:v>MPV-B</c:v>
                 </c:pt>
                 <c:pt idx="7">
-                  <c:v>Lux SUV-4</c:v>
+                  <c:v>Lux Car-4</c:v>
                 </c:pt>
                 <c:pt idx="8">
-                  <c:v>Lux Car-4</c:v>
+                  <c:v>SUV-E</c:v>
                 </c:pt>
                 <c:pt idx="9">
+                  <c:v>Lux SUV-3</c:v>
+                </c:pt>
+                <c:pt idx="10">
                   <c:v>SUV-D</c:v>
                 </c:pt>
-                <c:pt idx="10">
-                  <c:v>SUV-E</c:v>
-                </c:pt>
                 <c:pt idx="11">
-                  <c:v>Lux SUV-3</c:v>
+                  <c:v>SUV</c:v>
                 </c:pt>
               </c:strCache>
             </c:strRef>
@@ -8536,40 +8524,40 @@
                 <c:formatCode>General</c:formatCode>
                 <c:ptCount val="12"/>
                 <c:pt idx="0">
-                  <c:v>2958.25</c:v>
+                  <c:v>2888.1</c:v>
                 </c:pt>
                 <c:pt idx="1">
-                  <c:v>2888.14</c:v>
+                  <c:v>2629.9</c:v>
                 </c:pt>
                 <c:pt idx="2">
-                  <c:v>2631.4</c:v>
+                  <c:v>2606.5</c:v>
                 </c:pt>
                 <c:pt idx="3">
-                  <c:v>2629.91</c:v>
+                  <c:v>2591.1</c:v>
                 </c:pt>
                 <c:pt idx="4">
-                  <c:v>2590.75</c:v>
+                  <c:v>2530.2</c:v>
                 </c:pt>
                 <c:pt idx="5">
-                  <c:v>2530.21</c:v>
+                  <c:v>2529.0</c:v>
                 </c:pt>
                 <c:pt idx="6">
                   <c:v>2525.8</c:v>
                 </c:pt>
                 <c:pt idx="7">
-                  <c:v>2517.0</c:v>
+                  <c:v>2349.6</c:v>
                 </c:pt>
                 <c:pt idx="8">
-                  <c:v>2349.65</c:v>
+                  <c:v>2328.8</c:v>
                 </c:pt>
                 <c:pt idx="9">
-                  <c:v>2342.34</c:v>
+                  <c:v>2324.0</c:v>
                 </c:pt>
                 <c:pt idx="10">
-                  <c:v>2319.42</c:v>
+                  <c:v>2323.3</c:v>
                 </c:pt>
                 <c:pt idx="11">
-                  <c:v>2309.89</c:v>
+                  <c:v>2196.0</c:v>
                 </c:pt>
               </c:numCache>
             </c:numRef>
@@ -8741,10 +8729,10 @@
                   <c:v>SUV-D</c:v>
                 </c:pt>
                 <c:pt idx="2">
+                  <c:v>Car-D</c:v>
+                </c:pt>
+                <c:pt idx="3">
                   <c:v>Car-C</c:v>
-                </c:pt>
-                <c:pt idx="3">
-                  <c:v>Car-D</c:v>
                 </c:pt>
                 <c:pt idx="4">
                   <c:v>MPV-D</c:v>
@@ -8768,28 +8756,28 @@
                 <c:formatCode>General</c:formatCode>
                 <c:ptCount val="8"/>
                 <c:pt idx="0">
-                  <c:v>500.0</c:v>
+                  <c:v>566</c:v>
                 </c:pt>
                 <c:pt idx="1">
-                  <c:v>408.0</c:v>
+                  <c:v>414</c:v>
                 </c:pt>
                 <c:pt idx="2">
-                  <c:v>168.0</c:v>
+                  <c:v>180</c:v>
                 </c:pt>
                 <c:pt idx="3">
-                  <c:v>134.0</c:v>
+                  <c:v>170</c:v>
                 </c:pt>
                 <c:pt idx="4">
-                  <c:v>82.0</c:v>
+                  <c:v>83</c:v>
                 </c:pt>
                 <c:pt idx="5">
-                  <c:v>60.0</c:v>
+                  <c:v>66</c:v>
                 </c:pt>
                 <c:pt idx="6">
-                  <c:v>25.0</c:v>
+                  <c:v>25</c:v>
                 </c:pt>
                 <c:pt idx="7">
-                  <c:v>19.0</c:v>
+                  <c:v>23</c:v>
                 </c:pt>
               </c:numCache>
             </c:numRef>
@@ -8862,22 +8850,25 @@
           <c:invertIfNegative val="0"/>
           <c:cat>
             <c:strRef>
-              <c:f>Sheet1!$A$2:$A$6</c:f>
+              <c:f>Sheet1!$A$2:$A$7</c:f>
               <c:strCache>
-                <c:ptCount val="5"/>
+                <c:ptCount val="6"/>
                 <c:pt idx="0">
+                  <c:v>2021</c:v>
+                </c:pt>
+                <c:pt idx="1">
                   <c:v>2022</c:v>
                 </c:pt>
-                <c:pt idx="1">
+                <c:pt idx="2">
                   <c:v>2023</c:v>
                 </c:pt>
-                <c:pt idx="2">
+                <c:pt idx="3">
                   <c:v>2024</c:v>
                 </c:pt>
-                <c:pt idx="3">
+                <c:pt idx="4">
                   <c:v>2025</c:v>
                 </c:pt>
-                <c:pt idx="4">
+                <c:pt idx="5">
                   <c:v>2026</c:v>
                 </c:pt>
               </c:strCache>
@@ -8885,24 +8876,24 @@
           </c:cat>
           <c:val>
             <c:numRef>
-              <c:f>Sheet1!$B$2:$B$6</c:f>
+              <c:f>Sheet1!$B$2:$B$7</c:f>
               <c:numCache>
                 <c:formatCode>General</c:formatCode>
-                <c:ptCount val="5"/>
-                <c:pt idx="0">
-                  <c:v>9.2</c:v>
-                </c:pt>
+                <c:ptCount val="6"/>
                 <c:pt idx="1">
-                  <c:v>9.1</c:v>
+                  <c:v>9.5</c:v>
                 </c:pt>
                 <c:pt idx="2">
-                  <c:v>8.8</c:v>
+                  <c:v>9.8</c:v>
                 </c:pt>
                 <c:pt idx="3">
-                  <c:v>1.0</c:v>
+                  <c:v>6.5</c:v>
                 </c:pt>
                 <c:pt idx="4">
-                  <c:v>15.5</c:v>
+                  <c:v>-1.6</c:v>
+                </c:pt>
+                <c:pt idx="5">
+                  <c:v>18.7</c:v>
                 </c:pt>
               </c:numCache>
             </c:numRef>
@@ -8930,22 +8921,25 @@
           <c:invertIfNegative val="0"/>
           <c:cat>
             <c:strRef>
-              <c:f>Sheet1!$A$2:$A$6</c:f>
+              <c:f>Sheet1!$A$2:$A$7</c:f>
               <c:strCache>
-                <c:ptCount val="5"/>
+                <c:ptCount val="6"/>
                 <c:pt idx="0">
+                  <c:v>2021</c:v>
+                </c:pt>
+                <c:pt idx="1">
                   <c:v>2022</c:v>
                 </c:pt>
-                <c:pt idx="1">
+                <c:pt idx="2">
                   <c:v>2023</c:v>
                 </c:pt>
-                <c:pt idx="2">
+                <c:pt idx="3">
                   <c:v>2024</c:v>
                 </c:pt>
-                <c:pt idx="3">
+                <c:pt idx="4">
                   <c:v>2025</c:v>
                 </c:pt>
-                <c:pt idx="4">
+                <c:pt idx="5">
                   <c:v>2026</c:v>
                 </c:pt>
               </c:strCache>
@@ -8953,24 +8947,24 @@
           </c:cat>
           <c:val>
             <c:numRef>
-              <c:f>Sheet1!$C$2:$C$6</c:f>
+              <c:f>Sheet1!$C$2:$C$7</c:f>
               <c:numCache>
                 <c:formatCode>General</c:formatCode>
-                <c:ptCount val="5"/>
-                <c:pt idx="0">
-                  <c:v>10.3</c:v>
-                </c:pt>
+                <c:ptCount val="6"/>
                 <c:pt idx="1">
-                  <c:v>7.8</c:v>
+                  <c:v>11.1</c:v>
                 </c:pt>
                 <c:pt idx="2">
-                  <c:v>8.4</c:v>
+                  <c:v>7.5</c:v>
                 </c:pt>
                 <c:pt idx="3">
-                  <c:v>-4.2</c:v>
+                  <c:v>7.4</c:v>
                 </c:pt>
                 <c:pt idx="4">
-                  <c:v>13.4</c:v>
+                  <c:v>-6.7</c:v>
+                </c:pt>
+                <c:pt idx="5">
+                  <c:v>14.3</c:v>
                 </c:pt>
               </c:numCache>
             </c:numRef>
@@ -8998,22 +8992,25 @@
           <c:invertIfNegative val="0"/>
           <c:cat>
             <c:strRef>
-              <c:f>Sheet1!$A$2:$A$6</c:f>
+              <c:f>Sheet1!$A$2:$A$7</c:f>
               <c:strCache>
-                <c:ptCount val="5"/>
+                <c:ptCount val="6"/>
                 <c:pt idx="0">
+                  <c:v>2021</c:v>
+                </c:pt>
+                <c:pt idx="1">
                   <c:v>2022</c:v>
                 </c:pt>
-                <c:pt idx="1">
+                <c:pt idx="2">
                   <c:v>2023</c:v>
                 </c:pt>
-                <c:pt idx="2">
+                <c:pt idx="3">
                   <c:v>2024</c:v>
                 </c:pt>
-                <c:pt idx="3">
+                <c:pt idx="4">
                   <c:v>2025</c:v>
                 </c:pt>
-                <c:pt idx="4">
+                <c:pt idx="5">
                   <c:v>2026</c:v>
                 </c:pt>
               </c:strCache>
@@ -9021,24 +9018,24 @@
           </c:cat>
           <c:val>
             <c:numRef>
-              <c:f>Sheet1!$D$2:$D$6</c:f>
+              <c:f>Sheet1!$D$2:$D$7</c:f>
               <c:numCache>
                 <c:formatCode>General</c:formatCode>
-                <c:ptCount val="5"/>
-                <c:pt idx="0">
-                  <c:v>31.2</c:v>
-                </c:pt>
+                <c:ptCount val="6"/>
                 <c:pt idx="1">
-                  <c:v>-1.5</c:v>
+                  <c:v>24.1</c:v>
                 </c:pt>
                 <c:pt idx="2">
-                  <c:v>5.9</c:v>
+                  <c:v>6.7</c:v>
                 </c:pt>
                 <c:pt idx="3">
-                  <c:v>7.6</c:v>
+                  <c:v>2.2</c:v>
                 </c:pt>
                 <c:pt idx="4">
-                  <c:v>51.6</c:v>
+                  <c:v>-9.0</c:v>
+                </c:pt>
+                <c:pt idx="5">
+                  <c:v>33.5</c:v>
                 </c:pt>
               </c:numCache>
             </c:numRef>
@@ -9066,22 +9063,25 @@
           <c:invertIfNegative val="0"/>
           <c:cat>
             <c:strRef>
-              <c:f>Sheet1!$A$2:$A$6</c:f>
+              <c:f>Sheet1!$A$2:$A$7</c:f>
               <c:strCache>
-                <c:ptCount val="5"/>
+                <c:ptCount val="6"/>
                 <c:pt idx="0">
+                  <c:v>2021</c:v>
+                </c:pt>
+                <c:pt idx="1">
                   <c:v>2022</c:v>
                 </c:pt>
-                <c:pt idx="1">
+                <c:pt idx="2">
                   <c:v>2023</c:v>
                 </c:pt>
-                <c:pt idx="2">
+                <c:pt idx="3">
                   <c:v>2024</c:v>
                 </c:pt>
-                <c:pt idx="3">
+                <c:pt idx="4">
                   <c:v>2025</c:v>
                 </c:pt>
-                <c:pt idx="4">
+                <c:pt idx="5">
                   <c:v>2026</c:v>
                 </c:pt>
               </c:strCache>
@@ -9089,24 +9089,24 @@
           </c:cat>
           <c:val>
             <c:numRef>
-              <c:f>Sheet1!$E$2:$E$6</c:f>
+              <c:f>Sheet1!$E$2:$E$7</c:f>
               <c:numCache>
                 <c:formatCode>General</c:formatCode>
-                <c:ptCount val="5"/>
-                <c:pt idx="0">
-                  <c:v>7.3</c:v>
-                </c:pt>
+                <c:ptCount val="6"/>
                 <c:pt idx="1">
-                  <c:v>9.7</c:v>
+                  <c:v>9.6</c:v>
                 </c:pt>
                 <c:pt idx="2">
-                  <c:v>5.2</c:v>
+                  <c:v>9.5</c:v>
                 </c:pt>
                 <c:pt idx="3">
-                  <c:v>-4.3</c:v>
+                  <c:v>5.0</c:v>
                 </c:pt>
                 <c:pt idx="4">
-                  <c:v>8.0</c:v>
+                  <c:v>-3.4</c:v>
+                </c:pt>
+                <c:pt idx="5">
+                  <c:v>5.6</c:v>
                 </c:pt>
               </c:numCache>
             </c:numRef>
@@ -9134,22 +9134,25 @@
           <c:invertIfNegative val="0"/>
           <c:cat>
             <c:strRef>
-              <c:f>Sheet1!$A$2:$A$6</c:f>
+              <c:f>Sheet1!$A$2:$A$7</c:f>
               <c:strCache>
-                <c:ptCount val="5"/>
+                <c:ptCount val="6"/>
                 <c:pt idx="0">
+                  <c:v>2021</c:v>
+                </c:pt>
+                <c:pt idx="1">
                   <c:v>2022</c:v>
                 </c:pt>
-                <c:pt idx="1">
+                <c:pt idx="2">
                   <c:v>2023</c:v>
                 </c:pt>
-                <c:pt idx="2">
+                <c:pt idx="3">
                   <c:v>2024</c:v>
                 </c:pt>
-                <c:pt idx="3">
+                <c:pt idx="4">
                   <c:v>2025</c:v>
                 </c:pt>
-                <c:pt idx="4">
+                <c:pt idx="5">
                   <c:v>2026</c:v>
                 </c:pt>
               </c:strCache>
@@ -9157,24 +9160,24 @@
           </c:cat>
           <c:val>
             <c:numRef>
-              <c:f>Sheet1!$F$2:$F$6</c:f>
+              <c:f>Sheet1!$F$2:$F$7</c:f>
               <c:numCache>
                 <c:formatCode>General</c:formatCode>
-                <c:ptCount val="5"/>
-                <c:pt idx="0">
-                  <c:v>2.2</c:v>
-                </c:pt>
+                <c:ptCount val="6"/>
                 <c:pt idx="1">
-                  <c:v>3.2</c:v>
+                  <c:v>2.0</c:v>
                 </c:pt>
                 <c:pt idx="2">
-                  <c:v>-7.3</c:v>
+                  <c:v>2.9</c:v>
                 </c:pt>
                 <c:pt idx="3">
-                  <c:v>2.9</c:v>
+                  <c:v>-7.2</c:v>
                 </c:pt>
                 <c:pt idx="4">
-                  <c:v>9.0</c:v>
+                  <c:v>3.0</c:v>
+                </c:pt>
+                <c:pt idx="5">
+                  <c:v>8.3</c:v>
                 </c:pt>
               </c:numCache>
             </c:numRef>
@@ -9202,22 +9205,25 @@
           <c:invertIfNegative val="0"/>
           <c:cat>
             <c:strRef>
-              <c:f>Sheet1!$A$2:$A$6</c:f>
+              <c:f>Sheet1!$A$2:$A$7</c:f>
               <c:strCache>
-                <c:ptCount val="5"/>
+                <c:ptCount val="6"/>
                 <c:pt idx="0">
+                  <c:v>2021</c:v>
+                </c:pt>
+                <c:pt idx="1">
                   <c:v>2022</c:v>
                 </c:pt>
-                <c:pt idx="1">
+                <c:pt idx="2">
                   <c:v>2023</c:v>
                 </c:pt>
-                <c:pt idx="2">
+                <c:pt idx="3">
                   <c:v>2024</c:v>
                 </c:pt>
-                <c:pt idx="3">
+                <c:pt idx="4">
                   <c:v>2025</c:v>
                 </c:pt>
-                <c:pt idx="4">
+                <c:pt idx="5">
                   <c:v>2026</c:v>
                 </c:pt>
               </c:strCache>
@@ -9230,19 +9236,19 @@
                 <c:formatCode>General</c:formatCode>
                 <c:ptCount val="5"/>
                 <c:pt idx="0">
-                  <c:v>-4.8</c:v>
+                  <c:v>-37.8</c:v>
                 </c:pt>
                 <c:pt idx="1">
-                  <c:v>19.8</c:v>
+                  <c:v>12.3</c:v>
                 </c:pt>
                 <c:pt idx="2">
-                  <c:v>8.3</c:v>
+                  <c:v>15.2</c:v>
                 </c:pt>
                 <c:pt idx="3">
-                  <c:v>-7.8</c:v>
+                  <c:v>-3.9</c:v>
                 </c:pt>
                 <c:pt idx="4">
-                  <c:v>-33.5</c:v>
+                  <c:v>-31.7</c:v>
                 </c:pt>
               </c:numCache>
             </c:numRef>
@@ -9352,22 +9358,25 @@
           <c:invertIfNegative val="0"/>
           <c:cat>
             <c:strRef>
-              <c:f>Sheet1!$A$2:$A$6</c:f>
+              <c:f>Sheet1!$A$2:$A$7</c:f>
               <c:strCache>
-                <c:ptCount val="5"/>
+                <c:ptCount val="6"/>
                 <c:pt idx="0">
+                  <c:v>2021</c:v>
+                </c:pt>
+                <c:pt idx="1">
                   <c:v>2022</c:v>
                 </c:pt>
-                <c:pt idx="1">
+                <c:pt idx="2">
                   <c:v>2023</c:v>
                 </c:pt>
-                <c:pt idx="2">
+                <c:pt idx="3">
                   <c:v>2024</c:v>
                 </c:pt>
-                <c:pt idx="3">
+                <c:pt idx="4">
                   <c:v>2025</c:v>
                 </c:pt>
-                <c:pt idx="4">
+                <c:pt idx="5">
                   <c:v>2026</c:v>
                 </c:pt>
               </c:strCache>
@@ -9375,24 +9384,24 @@
           </c:cat>
           <c:val>
             <c:numRef>
-              <c:f>Sheet1!$B$2:$B$6</c:f>
+              <c:f>Sheet1!$B$2:$B$7</c:f>
               <c:numCache>
                 <c:formatCode>General</c:formatCode>
-                <c:ptCount val="5"/>
-                <c:pt idx="0">
-                  <c:v>12.8</c:v>
-                </c:pt>
+                <c:ptCount val="6"/>
                 <c:pt idx="1">
-                  <c:v>1.8</c:v>
+                  <c:v>32.5</c:v>
                 </c:pt>
                 <c:pt idx="2">
-                  <c:v>11.2</c:v>
+                  <c:v>2.1</c:v>
                 </c:pt>
                 <c:pt idx="3">
-                  <c:v>22.8</c:v>
+                  <c:v>11.0</c:v>
                 </c:pt>
                 <c:pt idx="4">
-                  <c:v>33.9</c:v>
+                  <c:v>24.1</c:v>
+                </c:pt>
+                <c:pt idx="5">
+                  <c:v>53.2</c:v>
                 </c:pt>
               </c:numCache>
             </c:numRef>
@@ -9420,22 +9429,25 @@
           <c:invertIfNegative val="0"/>
           <c:cat>
             <c:strRef>
-              <c:f>Sheet1!$A$2:$A$6</c:f>
+              <c:f>Sheet1!$A$2:$A$7</c:f>
               <c:strCache>
-                <c:ptCount val="5"/>
+                <c:ptCount val="6"/>
                 <c:pt idx="0">
+                  <c:v>2021</c:v>
+                </c:pt>
+                <c:pt idx="1">
                   <c:v>2022</c:v>
                 </c:pt>
-                <c:pt idx="1">
+                <c:pt idx="2">
                   <c:v>2023</c:v>
                 </c:pt>
-                <c:pt idx="2">
+                <c:pt idx="3">
                   <c:v>2024</c:v>
                 </c:pt>
-                <c:pt idx="3">
+                <c:pt idx="4">
                   <c:v>2025</c:v>
                 </c:pt>
-                <c:pt idx="4">
+                <c:pt idx="5">
                   <c:v>2026</c:v>
                 </c:pt>
               </c:strCache>
@@ -9443,24 +9455,24 @@
           </c:cat>
           <c:val>
             <c:numRef>
-              <c:f>Sheet1!$C$2:$C$6</c:f>
+              <c:f>Sheet1!$C$2:$C$7</c:f>
               <c:numCache>
                 <c:formatCode>General</c:formatCode>
-                <c:ptCount val="5"/>
-                <c:pt idx="0">
-                  <c:v>17.0</c:v>
-                </c:pt>
+                <c:ptCount val="6"/>
                 <c:pt idx="1">
-                  <c:v>1.5</c:v>
+                  <c:v>-5.9</c:v>
                 </c:pt>
                 <c:pt idx="2">
-                  <c:v>6.3</c:v>
+                  <c:v>0.4</c:v>
                 </c:pt>
                 <c:pt idx="3">
-                  <c:v>20.6</c:v>
+                  <c:v>5.7</c:v>
                 </c:pt>
                 <c:pt idx="4">
-                  <c:v>32.2</c:v>
+                  <c:v>20.9</c:v>
+                </c:pt>
+                <c:pt idx="5">
+                  <c:v>40.9</c:v>
                 </c:pt>
               </c:numCache>
             </c:numRef>
@@ -9488,22 +9500,25 @@
           <c:invertIfNegative val="0"/>
           <c:cat>
             <c:strRef>
-              <c:f>Sheet1!$A$2:$A$6</c:f>
+              <c:f>Sheet1!$A$2:$A$7</c:f>
               <c:strCache>
-                <c:ptCount val="5"/>
+                <c:ptCount val="6"/>
                 <c:pt idx="0">
+                  <c:v>2021</c:v>
+                </c:pt>
+                <c:pt idx="1">
                   <c:v>2022</c:v>
                 </c:pt>
-                <c:pt idx="1">
+                <c:pt idx="2">
                   <c:v>2023</c:v>
                 </c:pt>
-                <c:pt idx="2">
+                <c:pt idx="3">
                   <c:v>2024</c:v>
                 </c:pt>
-                <c:pt idx="3">
+                <c:pt idx="4">
                   <c:v>2025</c:v>
                 </c:pt>
-                <c:pt idx="4">
+                <c:pt idx="5">
                   <c:v>2026</c:v>
                 </c:pt>
               </c:strCache>
@@ -9511,24 +9526,24 @@
           </c:cat>
           <c:val>
             <c:numRef>
-              <c:f>Sheet1!$D$2:$D$6</c:f>
+              <c:f>Sheet1!$D$2:$D$7</c:f>
               <c:numCache>
                 <c:formatCode>General</c:formatCode>
-                <c:ptCount val="5"/>
-                <c:pt idx="0">
-                  <c:v>0.9</c:v>
-                </c:pt>
+                <c:ptCount val="6"/>
                 <c:pt idx="1">
-                  <c:v>6.5</c:v>
+                  <c:v>31.6</c:v>
                 </c:pt>
                 <c:pt idx="2">
-                  <c:v>-2.0</c:v>
+                  <c:v>1.1</c:v>
                 </c:pt>
                 <c:pt idx="3">
-                  <c:v>4.6</c:v>
+                  <c:v>3.6</c:v>
                 </c:pt>
                 <c:pt idx="4">
-                  <c:v>15.7</c:v>
+                  <c:v>-7.0</c:v>
+                </c:pt>
+                <c:pt idx="5">
+                  <c:v>18.7</c:v>
                 </c:pt>
               </c:numCache>
             </c:numRef>
@@ -9556,22 +9571,25 @@
           <c:invertIfNegative val="0"/>
           <c:cat>
             <c:strRef>
-              <c:f>Sheet1!$A$2:$A$6</c:f>
+              <c:f>Sheet1!$A$2:$A$7</c:f>
               <c:strCache>
-                <c:ptCount val="5"/>
+                <c:ptCount val="6"/>
                 <c:pt idx="0">
+                  <c:v>2021</c:v>
+                </c:pt>
+                <c:pt idx="1">
                   <c:v>2022</c:v>
                 </c:pt>
-                <c:pt idx="1">
+                <c:pt idx="2">
                   <c:v>2023</c:v>
                 </c:pt>
-                <c:pt idx="2">
+                <c:pt idx="3">
                   <c:v>2024</c:v>
                 </c:pt>
-                <c:pt idx="3">
+                <c:pt idx="4">
                   <c:v>2025</c:v>
                 </c:pt>
-                <c:pt idx="4">
+                <c:pt idx="5">
                   <c:v>2026</c:v>
                 </c:pt>
               </c:strCache>
@@ -9579,24 +9597,24 @@
           </c:cat>
           <c:val>
             <c:numRef>
-              <c:f>Sheet1!$E$2:$E$6</c:f>
+              <c:f>Sheet1!$E$2:$E$7</c:f>
               <c:numCache>
                 <c:formatCode>General</c:formatCode>
-                <c:ptCount val="5"/>
-                <c:pt idx="0">
-                  <c:v>5.6</c:v>
-                </c:pt>
+                <c:ptCount val="6"/>
                 <c:pt idx="1">
-                  <c:v>1.9</c:v>
+                  <c:v>3.3</c:v>
                 </c:pt>
                 <c:pt idx="2">
-                  <c:v>-0.7</c:v>
+                  <c:v>1.7</c:v>
                 </c:pt>
                 <c:pt idx="3">
-                  <c:v>7.7</c:v>
+                  <c:v>-0.4</c:v>
                 </c:pt>
                 <c:pt idx="4">
-                  <c:v>5.8</c:v>
+                  <c:v>7.4</c:v>
+                </c:pt>
+                <c:pt idx="5">
+                  <c:v>6.0</c:v>
                 </c:pt>
               </c:numCache>
             </c:numRef>
@@ -9624,22 +9642,25 @@
           <c:invertIfNegative val="0"/>
           <c:cat>
             <c:strRef>
-              <c:f>Sheet1!$A$2:$A$6</c:f>
+              <c:f>Sheet1!$A$2:$A$7</c:f>
               <c:strCache>
-                <c:ptCount val="5"/>
+                <c:ptCount val="6"/>
                 <c:pt idx="0">
+                  <c:v>2021</c:v>
+                </c:pt>
+                <c:pt idx="1">
                   <c:v>2022</c:v>
                 </c:pt>
-                <c:pt idx="1">
+                <c:pt idx="2">
                   <c:v>2023</c:v>
                 </c:pt>
-                <c:pt idx="2">
+                <c:pt idx="3">
                   <c:v>2024</c:v>
                 </c:pt>
-                <c:pt idx="3">
+                <c:pt idx="4">
                   <c:v>2025</c:v>
                 </c:pt>
-                <c:pt idx="4">
+                <c:pt idx="5">
                   <c:v>2026</c:v>
                 </c:pt>
               </c:strCache>
@@ -9647,24 +9668,24 @@
           </c:cat>
           <c:val>
             <c:numRef>
-              <c:f>Sheet1!$F$2:$F$6</c:f>
+              <c:f>Sheet1!$F$2:$F$7</c:f>
               <c:numCache>
                 <c:formatCode>General</c:formatCode>
-                <c:ptCount val="5"/>
-                <c:pt idx="0">
-                  <c:v>7.3</c:v>
-                </c:pt>
+                <c:ptCount val="6"/>
                 <c:pt idx="1">
+                  <c:v>7.2</c:v>
+                </c:pt>
+                <c:pt idx="2">
                   <c:v>0.3</c:v>
                 </c:pt>
-                <c:pt idx="2">
-                  <c:v>-3.6</c:v>
-                </c:pt>
                 <c:pt idx="3">
-                  <c:v>11.3</c:v>
+                  <c:v>-3.5</c:v>
                 </c:pt>
                 <c:pt idx="4">
-                  <c:v>6.6</c:v>
+                  <c:v>11.2</c:v>
+                </c:pt>
+                <c:pt idx="5">
+                  <c:v>5.2</c:v>
                 </c:pt>
               </c:numCache>
             </c:numRef>
@@ -9692,22 +9713,25 @@
           <c:invertIfNegative val="0"/>
           <c:cat>
             <c:strRef>
-              <c:f>Sheet1!$A$2:$A$6</c:f>
+              <c:f>Sheet1!$A$2:$A$7</c:f>
               <c:strCache>
-                <c:ptCount val="5"/>
+                <c:ptCount val="6"/>
                 <c:pt idx="0">
+                  <c:v>2021</c:v>
+                </c:pt>
+                <c:pt idx="1">
                   <c:v>2022</c:v>
                 </c:pt>
-                <c:pt idx="1">
+                <c:pt idx="2">
                   <c:v>2023</c:v>
                 </c:pt>
-                <c:pt idx="2">
+                <c:pt idx="3">
                   <c:v>2024</c:v>
                 </c:pt>
-                <c:pt idx="3">
+                <c:pt idx="4">
                   <c:v>2025</c:v>
                 </c:pt>
-                <c:pt idx="4">
+                <c:pt idx="5">
                   <c:v>2026</c:v>
                 </c:pt>
               </c:strCache>
@@ -9720,19 +9744,19 @@
                 <c:formatCode>General</c:formatCode>
                 <c:ptCount val="5"/>
                 <c:pt idx="0">
-                  <c:v>52.4</c:v>
+                  <c:v>-20.6</c:v>
                 </c:pt>
                 <c:pt idx="1">
-                  <c:v>64.1</c:v>
+                  <c:v>57.8</c:v>
                 </c:pt>
                 <c:pt idx="2">
-                  <c:v>42.4</c:v>
+                  <c:v>46.5</c:v>
                 </c:pt>
                 <c:pt idx="3">
-                  <c:v>83.9</c:v>
+                  <c:v>76.6</c:v>
                 </c:pt>
                 <c:pt idx="4">
-                  <c:v>-55.8</c:v>
+                  <c:v>-47.7</c:v>
                 </c:pt>
               </c:numCache>
             </c:numRef>
@@ -9872,22 +9896,22 @@
                 <c:formatCode>General</c:formatCode>
                 <c:ptCount val="6"/>
                 <c:pt idx="0">
-                  <c:v>582.0</c:v>
+                  <c:v>1006</c:v>
                 </c:pt>
                 <c:pt idx="1">
-                  <c:v>602.0</c:v>
+                  <c:v>655</c:v>
                 </c:pt>
                 <c:pt idx="2">
-                  <c:v>778.0</c:v>
+                  <c:v>797</c:v>
                 </c:pt>
                 <c:pt idx="3">
-                  <c:v>914.0</c:v>
+                  <c:v>985</c:v>
                 </c:pt>
                 <c:pt idx="4">
-                  <c:v>1117.0</c:v>
+                  <c:v>1198</c:v>
                 </c:pt>
                 <c:pt idx="5">
-                  <c:v>620.0</c:v>
+                  <c:v>730</c:v>
                 </c:pt>
               </c:numCache>
             </c:numRef>
@@ -10033,22 +10057,22 @@
                 <c:formatCode>General</c:formatCode>
                 <c:ptCount val="6"/>
                 <c:pt idx="0">
-                  <c:v>413.05</c:v>
+                  <c:v>407.18</c:v>
                 </c:pt>
                 <c:pt idx="1">
-                  <c:v>451.24</c:v>
+                  <c:v>445.81</c:v>
                 </c:pt>
                 <c:pt idx="2">
-                  <c:v>492.14</c:v>
+                  <c:v>489.54</c:v>
                 </c:pt>
                 <c:pt idx="3">
-                  <c:v>535.39</c:v>
+                  <c:v>521.15</c:v>
                 </c:pt>
                 <c:pt idx="4">
-                  <c:v>540.8</c:v>
+                  <c:v>513.04</c:v>
                 </c:pt>
                 <c:pt idx="5">
-                  <c:v>624.48</c:v>
+                  <c:v>608.79</c:v>
                 </c:pt>
               </c:numCache>
             </c:numRef>
@@ -10194,22 +10218,22 @@
                 <c:formatCode>General</c:formatCode>
                 <c:ptCount val="6"/>
                 <c:pt idx="0">
-                  <c:v>101.55</c:v>
+                  <c:v>86.3</c:v>
                 </c:pt>
                 <c:pt idx="1">
-                  <c:v>114.53</c:v>
+                  <c:v>114.31</c:v>
                 </c:pt>
                 <c:pt idx="2">
-                  <c:v>116.59</c:v>
+                  <c:v>116.72</c:v>
                 </c:pt>
                 <c:pt idx="3">
-                  <c:v>129.63</c:v>
+                  <c:v>129.58</c:v>
                 </c:pt>
                 <c:pt idx="4">
-                  <c:v>159.24</c:v>
+                  <c:v>160.8</c:v>
                 </c:pt>
                 <c:pt idx="5">
-                  <c:v>213.21</c:v>
+                  <c:v>246.34</c:v>
                 </c:pt>
               </c:numCache>
             </c:numRef>
@@ -10355,22 +10379,22 @@
                 <c:formatCode>General</c:formatCode>
                 <c:ptCount val="6"/>
                 <c:pt idx="0">
-                  <c:v>413.05</c:v>
+                  <c:v>407.18</c:v>
                 </c:pt>
                 <c:pt idx="1">
-                  <c:v>451.24</c:v>
+                  <c:v>445.81</c:v>
                 </c:pt>
                 <c:pt idx="2">
-                  <c:v>492.14</c:v>
+                  <c:v>489.54</c:v>
                 </c:pt>
                 <c:pt idx="3">
-                  <c:v>535.39</c:v>
+                  <c:v>521.15</c:v>
                 </c:pt>
                 <c:pt idx="4">
-                  <c:v>540.8</c:v>
+                  <c:v>513.04</c:v>
                 </c:pt>
                 <c:pt idx="5">
-                  <c:v>624.48</c:v>
+                  <c:v>608.79</c:v>
                 </c:pt>
               </c:numCache>
             </c:numRef>
@@ -10429,22 +10453,22 @@
                 <c:formatCode>General</c:formatCode>
                 <c:ptCount val="6"/>
                 <c:pt idx="0">
-                  <c:v>101.55</c:v>
+                  <c:v>86.3</c:v>
                 </c:pt>
                 <c:pt idx="1">
-                  <c:v>114.53</c:v>
+                  <c:v>114.31</c:v>
                 </c:pt>
                 <c:pt idx="2">
-                  <c:v>116.59</c:v>
+                  <c:v>116.72</c:v>
                 </c:pt>
                 <c:pt idx="3">
-                  <c:v>129.63</c:v>
+                  <c:v>129.58</c:v>
                 </c:pt>
                 <c:pt idx="4">
-                  <c:v>159.24</c:v>
+                  <c:v>160.8</c:v>
                 </c:pt>
                 <c:pt idx="5">
-                  <c:v>213.21</c:v>
+                  <c:v>246.34</c:v>
                 </c:pt>
               </c:numCache>
             </c:numRef>
@@ -10590,22 +10614,22 @@
                 <c:formatCode>General</c:formatCode>
                 <c:ptCount val="6"/>
                 <c:pt idx="0">
-                  <c:v>54.06</c:v>
+                  <c:v>53.97</c:v>
                 </c:pt>
                 <c:pt idx="1">
-                  <c:v>59.61</c:v>
+                  <c:v>59.99</c:v>
                 </c:pt>
                 <c:pt idx="2">
-                  <c:v>64.25</c:v>
+                  <c:v>64.48</c:v>
                 </c:pt>
                 <c:pt idx="3">
-                  <c:v>69.63</c:v>
+                  <c:v>69.25</c:v>
                 </c:pt>
                 <c:pt idx="4">
-                  <c:v>66.71</c:v>
+                  <c:v>64.58</c:v>
                 </c:pt>
                 <c:pt idx="5">
-                  <c:v>75.62</c:v>
+                  <c:v>73.82</c:v>
                 </c:pt>
               </c:numCache>
             </c:numRef>
@@ -13837,7 +13861,7 @@
                 <a:latin typeface="Arial"/>
                 <a:ea typeface="微软雅黑"/>
               </a:rPr>
-              <a:t>基于 4,613 条公告车型数据 · 涵盖 BEV 与 PHEV · 7大维度67页分析</a:t>
+              <a:t>基于 5,392 条公告车型数据 · 涵盖 BEV 与 PHEV · 7大维度67页分析</a:t>
             </a:r>
           </a:p>
         </p:txBody>
@@ -13873,7 +13897,7 @@
                 <a:latin typeface="Arial"/>
                 <a:ea typeface="微软雅黑"/>
               </a:rPr>
-              <a:t>数据来源：工信部《道路机动车辆生产企业及产品公告》第341~410批（2021–2026）· 权威底表 v4.3.6 · 共4,613款纯新能源乘用车（全部指标为均值口径） · 生成日期 2026-09-08</a:t>
+              <a:t>数据来源：工信部《道路机动车辆生产企业及产品公告》第341~410批（2021–2026）· 权威底表 v4.9.23 · 共5392款纯新能源乘用车（全部指标为均值口径） · 生成日期 2026-09-27</a:t>
             </a:r>
           </a:p>
         </p:txBody>
@@ -14042,7 +14066,7 @@
                 <a:latin typeface="Arial"/>
                 <a:ea typeface="微软雅黑"/>
               </a:rPr>
-              <a:t>数据来源：工信部《道路机动车辆生产企业及产品公告》第341~410批（2021–2026）· 权威底表 v4.3.6 · 共4,613款纯新能源乘用车（全部指标为均值口径）</a:t>
+              <a:t>数据来源：工信部《道路机动车辆生产企业及产品公告》第341~410批（2021–2026）· 权威底表 v4.9.23 · 共5392款纯新能源乘用车（全部指标为均值口径）</a:t>
             </a:r>
           </a:p>
         </p:txBody>
@@ -14354,7 +14378,7 @@
                 <a:latin typeface="Arial"/>
                 <a:ea typeface="微软雅黑"/>
               </a:rPr>
-              <a:t>数据来源：工信部《道路机动车辆生产企业及产品公告》第341~410批（2021–2026）· 权威底表 v4.3.6 · 共4,613款纯新能源乘用车（全部指标为均值口径）</a:t>
+              <a:t>数据来源：工信部《道路机动车辆生产企业及产品公告》第341~410批（2021–2026）· 权威底表 v4.9.23 · 共5392款纯新能源乘用车（全部指标为均值口径）</a:t>
             </a:r>
           </a:p>
         </p:txBody>
@@ -14559,7 +14583,7 @@
                 <a:latin typeface="Arial"/>
                 <a:ea typeface="微软雅黑"/>
               </a:rPr>
-              <a:t>数据来源：工信部《道路机动车辆生产企业及产品公告》第341~410批（2021–2026）· 权威底表 v4.3.6 · 共4,613款纯新能源乘用车（全部指标为均值口径）</a:t>
+              <a:t>数据来源：工信部《道路机动车辆生产企业及产品公告》第341~410批（2021–2026）· 权威底表 v4.9.23 · 共5392款纯新能源乘用车（全部指标为均值口径）</a:t>
             </a:r>
           </a:p>
         </p:txBody>
@@ -14648,7 +14672,7 @@
                 <a:latin typeface="Arial"/>
                 <a:ea typeface="微软雅黑"/>
               </a:rPr>
-              <a:t>洞察  BEV平均续航由413.05km（2021）提升至540.8km（2025），累计提升30.9%</a:t>
+              <a:t>洞察  BEV平均续航由407.18km（2021）提升至513.0km（2025），累计提升26.0%</a:t>
             </a:r>
           </a:p>
         </p:txBody>
@@ -14835,7 +14859,7 @@
                 <a:latin typeface="Arial"/>
                 <a:ea typeface="微软雅黑"/>
               </a:rPr>
-              <a:t>数据来源：工信部《道路机动车辆生产企业及产品公告》第341~410批（2021–2026）· 权威底表 v4.3.6 · 共4,613款纯新能源乘用车（全部指标为均值口径）</a:t>
+              <a:t>数据来源：工信部《道路机动车辆生产企业及产品公告》第341~410批（2021–2026）· 权威底表 v4.9.23 · 共5392款纯新能源乘用车（全部指标为均值口径）</a:t>
             </a:r>
           </a:p>
         </p:txBody>
@@ -14924,7 +14948,7 @@
                 <a:latin typeface="Arial"/>
                 <a:ea typeface="微软雅黑"/>
               </a:rPr>
-              <a:t>洞察  PHEV纯电续航由101.55km升至159.24km，大电池插混/增程驱动</a:t>
+              <a:t>洞察  PHEV纯电续航由86.30km升至160.80km，大电池插混/增程驱动</a:t>
             </a:r>
           </a:p>
         </p:txBody>
@@ -15111,7 +15135,7 @@
                 <a:latin typeface="Arial"/>
                 <a:ea typeface="微软雅黑"/>
               </a:rPr>
-              <a:t>数据来源：工信部《道路机动车辆生产企业及产品公告》第341~410批（2021–2026）· 权威底表 v4.3.6 · 共4,613款纯新能源乘用车（全部指标为均值口径）</a:t>
+              <a:t>数据来源：工信部《道路机动车辆生产企业及产品公告》第341~410批（2021–2026）· 权威底表 v4.9.23 · 共5392款纯新能源乘用车（全部指标为均值口径）</a:t>
             </a:r>
           </a:p>
         </p:txBody>
@@ -15387,7 +15411,7 @@
                 <a:latin typeface="Arial"/>
                 <a:ea typeface="微软雅黑"/>
               </a:rPr>
-              <a:t>数据来源：工信部《道路机动车辆生产企业及产品公告》第341~410批（2021–2026）· 权威底表 v4.3.6 · 共4,613款纯新能源乘用车（全部指标为均值口径）</a:t>
+              <a:t>数据来源：工信部《道路机动车辆生产企业及产品公告》第341~410批（2021–2026）· 权威底表 v4.9.23 · 共5392款纯新能源乘用车（全部指标为均值口径）</a:t>
             </a:r>
           </a:p>
         </p:txBody>
@@ -15476,7 +15500,7 @@
                 <a:latin typeface="Arial"/>
                 <a:ea typeface="微软雅黑"/>
               </a:rPr>
-              <a:t>洞察  BEV平均容量达66.71kWh（2025），较2021年提升23.4%</a:t>
+              <a:t>洞察  BEV平均容量达64.58kWh（2025），较2021年提升19.7%</a:t>
             </a:r>
           </a:p>
         </p:txBody>
@@ -15663,7 +15687,7 @@
                 <a:latin typeface="Arial"/>
                 <a:ea typeface="微软雅黑"/>
               </a:rPr>
-              <a:t>数据来源：工信部《道路机动车辆生产企业及产品公告》第341~410批（2021–2026）· 权威底表 v4.3.6 · 共4,613款纯新能源乘用车（全部指标为均值口径）</a:t>
+              <a:t>数据来源：工信部《道路机动车辆生产企业及产品公告》第341~410批（2021–2026）· 权威底表 v4.9.23 · 共5392款纯新能源乘用车（全部指标为均值口径）</a:t>
             </a:r>
           </a:p>
         </p:txBody>
@@ -15752,7 +15776,7 @@
                 <a:latin typeface="Arial"/>
                 <a:ea typeface="微软雅黑"/>
               </a:rPr>
-              <a:t>洞察  PHEV平均容量升至33.62kWh，增程车型大电池配置是主因</a:t>
+              <a:t>洞察  PHEV平均容量升至33.71kWh，增程车型大电池配置是主因</a:t>
             </a:r>
           </a:p>
         </p:txBody>
@@ -15939,7 +15963,7 @@
                 <a:latin typeface="Arial"/>
                 <a:ea typeface="微软雅黑"/>
               </a:rPr>
-              <a:t>数据来源：工信部《道路机动车辆生产企业及产品公告》第341~410批（2021–2026）· 权威底表 v4.3.6 · 共4,613款纯新能源乘用车（全部指标为均值口径）</a:t>
+              <a:t>数据来源：工信部《道路机动车辆生产企业及产品公告》第341~410批（2021–2026）· 权威底表 v4.9.23 · 共5392款纯新能源乘用车（全部指标为均值口径）</a:t>
             </a:r>
           </a:p>
         </p:txBody>
@@ -16215,7 +16239,7 @@
                 <a:latin typeface="Arial"/>
                 <a:ea typeface="微软雅黑"/>
               </a:rPr>
-              <a:t>数据来源：工信部《道路机动车辆生产企业及产品公告》第341~410批（2021–2026）· 权威底表 v4.3.6 · 共4,613款纯新能源乘用车（全部指标为均值口径）</a:t>
+              <a:t>数据来源：工信部《道路机动车辆生产企业及产品公告》第341~410批（2021–2026）· 权威底表 v4.9.23 · 共5392款纯新能源乘用车（全部指标为均值口径）</a:t>
             </a:r>
           </a:p>
         </p:txBody>
@@ -16304,7 +16328,7 @@
                 <a:latin typeface="Arial"/>
                 <a:ea typeface="微软雅黑"/>
               </a:rPr>
-              <a:t>洞察  LFP占比由2021年的45.4%变为2026年的79.7%，成本驱动下磷酸铁锂成为绝对主流</a:t>
+              <a:t>洞察  LFP占比由2021年的51.9%变为2026年的80.0%，成本驱动下磷酸铁锂成为绝对主流</a:t>
             </a:r>
           </a:p>
         </p:txBody>
@@ -16491,7 +16515,7 @@
                 <a:latin typeface="Arial"/>
                 <a:ea typeface="微软雅黑"/>
               </a:rPr>
-              <a:t>数据来源：工信部《道路机动车辆生产企业及产品公告》第341~410批（2021–2026）· 权威底表 v4.3.6 · 共4,613款纯新能源乘用车（全部指标为均值口径）</a:t>
+              <a:t>数据来源：工信部《道路机动车辆生产企业及产品公告》第341~410批（2021–2026）· 权威底表 v4.9.23 · 共5392款纯新能源乘用车（全部指标为均值口径）</a:t>
             </a:r>
           </a:p>
         </p:txBody>
@@ -16580,7 +16604,7 @@
                 <a:latin typeface="Arial"/>
                 <a:ea typeface="微软雅黑"/>
               </a:rPr>
-              <a:t>洞察  LFP占比由2021年的42.9%变为2026年的71.4%，成本驱动下磷酸铁锂成为绝对主流</a:t>
+              <a:t>洞察  LFP占比由2021年的53.5%变为2026年的72.5%，成本驱动下磷酸铁锂成为绝对主流</a:t>
             </a:r>
           </a:p>
         </p:txBody>
@@ -16731,7 +16755,7 @@
                 <a:latin typeface="Arial"/>
                 <a:ea typeface="微软雅黑"/>
               </a:rPr>
-              <a:t>样本 4,613 款（BEV 3,099 / PHEV 1,514）· 第341~410批</a:t>
+              <a:t>样本 5,392 款（BEV 3,702 / PHEV 1,690）· 第341~410批</a:t>
             </a:r>
           </a:p>
         </p:txBody>
@@ -16767,7 +16791,7 @@
                 <a:latin typeface="Arial"/>
                 <a:ea typeface="微软雅黑"/>
               </a:rPr>
-              <a:t>数据来源：工信部《道路机动车辆生产企业及产品公告》第341~410批（2021–2026）· 权威底表 v4.3.6 · 共4,613款纯新能源乘用车（全部指标为均值口径）</a:t>
+              <a:t>数据来源：工信部《道路机动车辆生产企业及产品公告》第341~410批（2021–2026）· 权威底表 v4.9.23 · 共5392款纯新能源乘用车（全部指标为均值口径）</a:t>
             </a:r>
           </a:p>
         </p:txBody>
@@ -16871,7 +16895,7 @@
                 <a:latin typeface="Arial"/>
                 <a:ea typeface="微软雅黑"/>
               </a:rPr>
-              <a:t>4,613 款</a:t>
+              <a:t>5,392 款</a:t>
             </a:r>
           </a:p>
           <a:p>
@@ -16884,7 +16908,7 @@
                 <a:latin typeface="Arial"/>
                 <a:ea typeface="微软雅黑"/>
               </a:rPr>
-              <a:t>纯乘用车口径（v4.3.4底表）</a:t>
+              <a:t>纯乘用车口径（5,392 款 × 38 列）</a:t>
             </a:r>
           </a:p>
         </p:txBody>
@@ -17364,7 +17388,7 @@
                           <a:latin typeface="Arial"/>
                           <a:ea typeface="微软雅黑"/>
                         </a:rPr>
-                        <a:t>498</a:t>
+                        <a:t>836</a:t>
                       </a:r>
                     </a:p>
                   </a:txBody>
@@ -17384,7 +17408,7 @@
                           <a:latin typeface="Arial"/>
                           <a:ea typeface="微软雅黑"/>
                         </a:rPr>
-                        <a:t>84</a:t>
+                        <a:t>170</a:t>
                       </a:r>
                     </a:p>
                   </a:txBody>
@@ -17404,7 +17428,7 @@
                           <a:latin typeface="Arial"/>
                           <a:ea typeface="微软雅黑"/>
                         </a:rPr>
-                        <a:t>582</a:t>
+                        <a:t>1006</a:t>
                       </a:r>
                     </a:p>
                   </a:txBody>
@@ -17424,7 +17448,7 @@
                           <a:latin typeface="Arial"/>
                           <a:ea typeface="微软雅黑"/>
                         </a:rPr>
-                        <a:t>14.4</a:t>
+                        <a:t>16.9</a:t>
                       </a:r>
                     </a:p>
                   </a:txBody>
@@ -17444,7 +17468,7 @@
                           <a:latin typeface="Arial"/>
                           <a:ea typeface="微软雅黑"/>
                         </a:rPr>
-                        <a:t>413.05</a:t>
+                        <a:t>407.2</a:t>
                       </a:r>
                     </a:p>
                   </a:txBody>
@@ -17464,7 +17488,7 @@
                           <a:latin typeface="Arial"/>
                           <a:ea typeface="微软雅黑"/>
                         </a:rPr>
-                        <a:t>54.06</a:t>
+                        <a:t>54.0</a:t>
                       </a:r>
                     </a:p>
                   </a:txBody>
@@ -17510,7 +17534,7 @@
                           <a:latin typeface="Arial"/>
                           <a:ea typeface="微软雅黑"/>
                         </a:rPr>
-                        <a:t>474</a:t>
+                        <a:t>520</a:t>
                       </a:r>
                     </a:p>
                   </a:txBody>
@@ -17534,7 +17558,7 @@
                           <a:latin typeface="Arial"/>
                           <a:ea typeface="微软雅黑"/>
                         </a:rPr>
-                        <a:t>128</a:t>
+                        <a:t>135</a:t>
                       </a:r>
                     </a:p>
                   </a:txBody>
@@ -17558,7 +17582,7 @@
                           <a:latin typeface="Arial"/>
                           <a:ea typeface="微软雅黑"/>
                         </a:rPr>
-                        <a:t>602</a:t>
+                        <a:t>655</a:t>
                       </a:r>
                     </a:p>
                   </a:txBody>
@@ -17582,7 +17606,7 @@
                           <a:latin typeface="Arial"/>
                           <a:ea typeface="微软雅黑"/>
                         </a:rPr>
-                        <a:t>21.3</a:t>
+                        <a:t>20.6</a:t>
                       </a:r>
                     </a:p>
                   </a:txBody>
@@ -17606,7 +17630,7 @@
                           <a:latin typeface="Arial"/>
                           <a:ea typeface="微软雅黑"/>
                         </a:rPr>
-                        <a:t>451.24</a:t>
+                        <a:t>445.8</a:t>
                       </a:r>
                     </a:p>
                   </a:txBody>
@@ -17630,7 +17654,7 @@
                           <a:latin typeface="Arial"/>
                           <a:ea typeface="微软雅黑"/>
                         </a:rPr>
-                        <a:t>59.61</a:t>
+                        <a:t>60.0</a:t>
                       </a:r>
                     </a:p>
                   </a:txBody>
@@ -17676,7 +17700,7 @@
                           <a:latin typeface="Arial"/>
                           <a:ea typeface="微软雅黑"/>
                         </a:rPr>
-                        <a:t>568</a:t>
+                        <a:t>584</a:t>
                       </a:r>
                     </a:p>
                   </a:txBody>
@@ -17696,7 +17720,7 @@
                           <a:latin typeface="Arial"/>
                           <a:ea typeface="微软雅黑"/>
                         </a:rPr>
-                        <a:t>210</a:t>
+                        <a:t>213</a:t>
                       </a:r>
                     </a:p>
                   </a:txBody>
@@ -17716,7 +17740,7 @@
                           <a:latin typeface="Arial"/>
                           <a:ea typeface="微软雅黑"/>
                         </a:rPr>
-                        <a:t>778</a:t>
+                        <a:t>797</a:t>
                       </a:r>
                     </a:p>
                   </a:txBody>
@@ -17736,7 +17760,7 @@
                           <a:latin typeface="Arial"/>
                           <a:ea typeface="微软雅黑"/>
                         </a:rPr>
-                        <a:t>27.0</a:t>
+                        <a:t>26.7</a:t>
                       </a:r>
                     </a:p>
                   </a:txBody>
@@ -17756,7 +17780,7 @@
                           <a:latin typeface="Arial"/>
                           <a:ea typeface="微软雅黑"/>
                         </a:rPr>
-                        <a:t>492.14</a:t>
+                        <a:t>489.5</a:t>
                       </a:r>
                     </a:p>
                   </a:txBody>
@@ -17776,7 +17800,7 @@
                           <a:latin typeface="Arial"/>
                           <a:ea typeface="微软雅黑"/>
                         </a:rPr>
-                        <a:t>64.25</a:t>
+                        <a:t>64.5</a:t>
                       </a:r>
                     </a:p>
                   </a:txBody>
@@ -17822,7 +17846,7 @@
                           <a:latin typeface="Arial"/>
                           <a:ea typeface="微软雅黑"/>
                         </a:rPr>
-                        <a:t>615</a:t>
+                        <a:t>673</a:t>
                       </a:r>
                     </a:p>
                   </a:txBody>
@@ -17846,7 +17870,7 @@
                           <a:latin typeface="Arial"/>
                           <a:ea typeface="微软雅黑"/>
                         </a:rPr>
-                        <a:t>299</a:t>
+                        <a:t>312</a:t>
                       </a:r>
                     </a:p>
                   </a:txBody>
@@ -17870,7 +17894,7 @@
                           <a:latin typeface="Arial"/>
                           <a:ea typeface="微软雅黑"/>
                         </a:rPr>
-                        <a:t>914</a:t>
+                        <a:t>985</a:t>
                       </a:r>
                     </a:p>
                   </a:txBody>
@@ -17894,7 +17918,7 @@
                           <a:latin typeface="Arial"/>
                           <a:ea typeface="微软雅黑"/>
                         </a:rPr>
-                        <a:t>32.7</a:t>
+                        <a:t>31.7</a:t>
                       </a:r>
                     </a:p>
                   </a:txBody>
@@ -17918,7 +17942,7 @@
                           <a:latin typeface="Arial"/>
                           <a:ea typeface="微软雅黑"/>
                         </a:rPr>
-                        <a:t>535.39</a:t>
+                        <a:t>521.1</a:t>
                       </a:r>
                     </a:p>
                   </a:txBody>
@@ -17942,7 +17966,7 @@
                           <a:latin typeface="Arial"/>
                           <a:ea typeface="微软雅黑"/>
                         </a:rPr>
-                        <a:t>69.63</a:t>
+                        <a:t>69.2</a:t>
                       </a:r>
                     </a:p>
                   </a:txBody>
@@ -17988,7 +18012,7 @@
                           <a:latin typeface="Arial"/>
                           <a:ea typeface="微软雅黑"/>
                         </a:rPr>
-                        <a:t>567</a:t>
+                        <a:t>647</a:t>
                       </a:r>
                     </a:p>
                   </a:txBody>
@@ -18008,7 +18032,7 @@
                           <a:latin typeface="Arial"/>
                           <a:ea typeface="微软雅黑"/>
                         </a:rPr>
-                        <a:t>550</a:t>
+                        <a:t>551</a:t>
                       </a:r>
                     </a:p>
                   </a:txBody>
@@ -18028,7 +18052,7 @@
                           <a:latin typeface="Arial"/>
                           <a:ea typeface="微软雅黑"/>
                         </a:rPr>
-                        <a:t>1,117</a:t>
+                        <a:t>1198</a:t>
                       </a:r>
                     </a:p>
                   </a:txBody>
@@ -18048,7 +18072,7 @@
                           <a:latin typeface="Arial"/>
                           <a:ea typeface="微软雅黑"/>
                         </a:rPr>
-                        <a:t>49.2</a:t>
+                        <a:t>46.0</a:t>
                       </a:r>
                     </a:p>
                   </a:txBody>
@@ -18068,7 +18092,7 @@
                           <a:latin typeface="Arial"/>
                           <a:ea typeface="微软雅黑"/>
                         </a:rPr>
-                        <a:t>540.8</a:t>
+                        <a:t>513.0</a:t>
                       </a:r>
                     </a:p>
                   </a:txBody>
@@ -18088,7 +18112,7 @@
                           <a:latin typeface="Arial"/>
                           <a:ea typeface="微软雅黑"/>
                         </a:rPr>
-                        <a:t>66.71</a:t>
+                        <a:t>64.6</a:t>
                       </a:r>
                     </a:p>
                   </a:txBody>
@@ -18134,7 +18158,7 @@
                           <a:latin typeface="Arial"/>
                           <a:ea typeface="微软雅黑"/>
                         </a:rPr>
-                        <a:t>377</a:t>
+                        <a:t>442</a:t>
                       </a:r>
                     </a:p>
                   </a:txBody>
@@ -18158,7 +18182,7 @@
                           <a:latin typeface="Arial"/>
                           <a:ea typeface="微软雅黑"/>
                         </a:rPr>
-                        <a:t>243</a:t>
+                        <a:t>288</a:t>
                       </a:r>
                     </a:p>
                   </a:txBody>
@@ -18182,7 +18206,7 @@
                           <a:latin typeface="Arial"/>
                           <a:ea typeface="微软雅黑"/>
                         </a:rPr>
-                        <a:t>620</a:t>
+                        <a:t>730</a:t>
                       </a:r>
                     </a:p>
                   </a:txBody>
@@ -18206,7 +18230,7 @@
                           <a:latin typeface="Arial"/>
                           <a:ea typeface="微软雅黑"/>
                         </a:rPr>
-                        <a:t>39.2</a:t>
+                        <a:t>39.5</a:t>
                       </a:r>
                     </a:p>
                   </a:txBody>
@@ -18230,7 +18254,7 @@
                           <a:latin typeface="Arial"/>
                           <a:ea typeface="微软雅黑"/>
                         </a:rPr>
-                        <a:t>624.48</a:t>
+                        <a:t>608.8</a:t>
                       </a:r>
                     </a:p>
                   </a:txBody>
@@ -18254,7 +18278,7 @@
                           <a:latin typeface="Arial"/>
                           <a:ea typeface="微软雅黑"/>
                         </a:rPr>
-                        <a:t>75.62</a:t>
+                        <a:t>73.8</a:t>
                       </a:r>
                     </a:p>
                   </a:txBody>
@@ -18433,7 +18457,7 @@
                 <a:latin typeface="Arial"/>
                 <a:ea typeface="微软雅黑"/>
               </a:rPr>
-              <a:t>数据来源：工信部《道路机动车辆生产企业及产品公告》第341~410批（2021–2026）· 权威底表 v4.3.6 · 共4,613款纯新能源乘用车（全部指标为均值口径）</a:t>
+              <a:t>数据来源：工信部《道路机动车辆生产企业及产品公告》第341~410批（2021–2026）· 权威底表 v4.9.23 · 共5392款纯新能源乘用车（全部指标为均值口径）</a:t>
             </a:r>
           </a:p>
         </p:txBody>
@@ -18522,7 +18546,7 @@
                 <a:latin typeface="Arial"/>
                 <a:ea typeface="微软雅黑"/>
               </a:rPr>
-              <a:t>洞察  平均能量密度150.95Wh/kg（2025），结构上LFP占比提升拉低均值、NCM冲高</a:t>
+              <a:t>洞察  平均能量密度151.10Wh/kg（2025），结构上LFP占比提升拉低均值、NCM冲高</a:t>
             </a:r>
           </a:p>
         </p:txBody>
@@ -18709,7 +18733,7 @@
                 <a:latin typeface="Arial"/>
                 <a:ea typeface="微软雅黑"/>
               </a:rPr>
-              <a:t>数据来源：工信部《道路机动车辆生产企业及产品公告》第341~410批（2021–2026）· 权威底表 v4.3.6 · 共4,613款纯新能源乘用车（全部指标为均值口径）</a:t>
+              <a:t>数据来源：工信部《道路机动车辆生产企业及产品公告》第341~410批（2021–2026）· 权威底表 v4.9.23 · 共5392款纯新能源乘用车（全部指标为均值口径）</a:t>
             </a:r>
           </a:p>
         </p:txBody>
@@ -18985,7 +19009,7 @@
                 <a:latin typeface="Arial"/>
                 <a:ea typeface="微软雅黑"/>
               </a:rPr>
-              <a:t>数据来源：工信部《道路机动车辆生产企业及产品公告》第341~410批（2021–2026）· 权威底表 v4.3.6 · 共4,613款纯新能源乘用车（全部指标为均值口径）</a:t>
+              <a:t>数据来源：工信部《道路机动车辆生产企业及产品公告》第341~410批（2021–2026）· 权威底表 v4.9.23 · 共5392款纯新能源乘用车（全部指标为均值口径）</a:t>
             </a:r>
           </a:p>
         </p:txBody>
@@ -19074,7 +19098,7 @@
                 <a:latin typeface="Arial"/>
                 <a:ea typeface="微软雅黑"/>
               </a:rPr>
-              <a:t>洞察  PHEV主力区间为 50-100 段，尾部区间（≥200）逐年放大</a:t>
+              <a:t>洞察  PHEV主力区间为 50--32 段，尾部区间（≥200）逐年放大</a:t>
             </a:r>
           </a:p>
         </p:txBody>
@@ -19261,7 +19285,7 @@
                 <a:latin typeface="Arial"/>
                 <a:ea typeface="微软雅黑"/>
               </a:rPr>
-              <a:t>数据来源：工信部《道路机动车辆生产企业及产品公告》第341~410批（2021–2026）· 权威底表 v4.3.6 · 共4,613款纯新能源乘用车（全部指标为均值口径）</a:t>
+              <a:t>数据来源：工信部《道路机动车辆生产企业及产品公告》第341~410批（2021–2026）· 权威底表 v4.9.23 · 共5392款纯新能源乘用车（全部指标为均值口径）</a:t>
             </a:r>
           </a:p>
         </p:txBody>
@@ -19537,7 +19561,7 @@
                 <a:latin typeface="Arial"/>
                 <a:ea typeface="微软雅黑"/>
               </a:rPr>
-              <a:t>数据来源：工信部《道路机动车辆生产企业及产品公告》第341~410批（2021–2026）· 权威底表 v4.3.6 · 共4,613款纯新能源乘用车（全部指标为均值口径）</a:t>
+              <a:t>数据来源：工信部《道路机动车辆生产企业及产品公告》第341~410批（2021–2026）· 权威底表 v4.9.23 · 共5392款纯新能源乘用车（全部指标为均值口径）</a:t>
             </a:r>
           </a:p>
         </p:txBody>
@@ -19813,7 +19837,7 @@
                 <a:latin typeface="Arial"/>
                 <a:ea typeface="微软雅黑"/>
               </a:rPr>
-              <a:t>数据来源：工信部《道路机动车辆生产企业及产品公告》第341~410批（2021–2026）· 权威底表 v4.3.6 · 共4,613款纯新能源乘用车（全部指标为均值口径）</a:t>
+              <a:t>数据来源：工信部《道路机动车辆生产企业及产品公告》第341~410批（2021–2026）· 权威底表 v4.9.23 · 共5392款纯新能源乘用车（全部指标为均值口径）</a:t>
             </a:r>
           </a:p>
         </p:txBody>
@@ -20039,7 +20063,7 @@
                           <a:latin typeface="Arial"/>
                           <a:ea typeface="微软雅黑"/>
                         </a:rPr>
-                        <a:t>1,295</a:t>
+                        <a:t>1432</a:t>
                       </a:r>
                     </a:p>
                   </a:txBody>
@@ -20059,7 +20083,7 @@
                           <a:latin typeface="Arial"/>
                           <a:ea typeface="微软雅黑"/>
                         </a:rPr>
-                        <a:t>42.7</a:t>
+                        <a:t>43.0</a:t>
                       </a:r>
                     </a:p>
                   </a:txBody>
@@ -20105,7 +20129,7 @@
                           <a:latin typeface="Arial"/>
                           <a:ea typeface="微软雅黑"/>
                         </a:rPr>
-                        <a:t>223</a:t>
+                        <a:t>313</a:t>
                       </a:r>
                     </a:p>
                   </a:txBody>
@@ -20129,7 +20153,7 @@
                           <a:latin typeface="Arial"/>
                           <a:ea typeface="微软雅黑"/>
                         </a:rPr>
-                        <a:t>7.4</a:t>
+                        <a:t>9.4</a:t>
                       </a:r>
                     </a:p>
                   </a:txBody>
@@ -20175,7 +20199,7 @@
                           <a:latin typeface="Arial"/>
                           <a:ea typeface="微软雅黑"/>
                         </a:rPr>
-                        <a:t>229</a:t>
+                        <a:t>232</a:t>
                       </a:r>
                     </a:p>
                   </a:txBody>
@@ -20195,7 +20219,7 @@
                           <a:latin typeface="Arial"/>
                           <a:ea typeface="微软雅黑"/>
                         </a:rPr>
-                        <a:t>7.6</a:t>
+                        <a:t>7.0</a:t>
                       </a:r>
                     </a:p>
                   </a:txBody>
@@ -20241,7 +20265,7 @@
                           <a:latin typeface="Arial"/>
                           <a:ea typeface="微软雅黑"/>
                         </a:rPr>
-                        <a:t>1,286</a:t>
+                        <a:t>1351</a:t>
                       </a:r>
                     </a:p>
                   </a:txBody>
@@ -20265,7 +20289,7 @@
                           <a:latin typeface="Arial"/>
                           <a:ea typeface="微软雅黑"/>
                         </a:rPr>
-                        <a:t>42.4</a:t>
+                        <a:t>40.6</a:t>
                       </a:r>
                     </a:p>
                   </a:txBody>
@@ -20444,7 +20468,7 @@
                 <a:latin typeface="Arial"/>
                 <a:ea typeface="微软雅黑"/>
               </a:rPr>
-              <a:t>数据来源：工信部《道路机动车辆生产企业及产品公告》第341~410批（2021–2026）· 权威底表 v4.3.6 · 共4,613款纯新能源乘用车（全部指标为均值口径）</a:t>
+              <a:t>数据来源：工信部《道路机动车辆生产企业及产品公告》第341~410批（2021–2026）· 权威底表 v4.9.23 · 共5392款纯新能源乘用车（全部指标为均值口径）</a:t>
             </a:r>
           </a:p>
         </p:txBody>
@@ -20756,7 +20780,7 @@
                 <a:latin typeface="Arial"/>
                 <a:ea typeface="微软雅黑"/>
               </a:rPr>
-              <a:t>数据来源：工信部《道路机动车辆生产企业及产品公告》第341~410批（2021–2026）· 权威底表 v4.3.6 · 共4,613款纯新能源乘用车（全部指标为均值口径）</a:t>
+              <a:t>数据来源：工信部《道路机动车辆生产企业及产品公告》第341~410批（2021–2026）· 权威底表 v4.9.23 · 共5392款纯新能源乘用车（全部指标为均值口径）</a:t>
             </a:r>
           </a:p>
         </p:txBody>
@@ -20961,7 +20985,7 @@
                 <a:latin typeface="Arial"/>
                 <a:ea typeface="微软雅黑"/>
               </a:rPr>
-              <a:t>数据来源：工信部《道路机动车辆生产企业及产品公告》第341~410批（2021–2026）· 权威底表 v4.3.6 · 共4,613款纯新能源乘用车（全部指标为均值口径）</a:t>
+              <a:t>数据来源：工信部《道路机动车辆生产企业及产品公告》第341~410批（2021–2026）· 权威底表 v4.9.23 · 共5392款纯新能源乘用车（全部指标为均值口径）</a:t>
             </a:r>
           </a:p>
         </p:txBody>
@@ -21050,7 +21074,7 @@
                 <a:latin typeface="Arial"/>
                 <a:ea typeface="微软雅黑"/>
               </a:rPr>
-              <a:t>洞察  BEV平均功率升至179.42kW（2025），性能与快充需求双驱动</a:t>
+              <a:t>洞察  BEV平均功率升至190.25kW（2025），性能与快充需求双驱动</a:t>
             </a:r>
           </a:p>
         </p:txBody>
@@ -21237,7 +21261,7 @@
                 <a:latin typeface="Arial"/>
                 <a:ea typeface="微软雅黑"/>
               </a:rPr>
-              <a:t>数据来源：工信部《道路机动车辆生产企业及产品公告》第341~410批（2021–2026）· 权威底表 v4.3.6 · 共4,613款纯新能源乘用车（全部指标为均值口径）</a:t>
+              <a:t>数据来源：工信部《道路机动车辆生产企业及产品公告》第341~410批（2021–2026）· 权威底表 v4.9.23 · 共5392款纯新能源乘用车（全部指标为均值口径）</a:t>
             </a:r>
           </a:p>
         </p:txBody>
@@ -21326,7 +21350,7 @@
                 <a:latin typeface="Arial"/>
                 <a:ea typeface="微软雅黑"/>
               </a:rPr>
-              <a:t>洞察  PHEV平均功率177.67kW，电驱占比提升</a:t>
+              <a:t>洞察  PHEV平均功率183.88kW，电驱占比提升</a:t>
             </a:r>
           </a:p>
         </p:txBody>
@@ -21513,7 +21537,7 @@
                 <a:latin typeface="Arial"/>
                 <a:ea typeface="微软雅黑"/>
               </a:rPr>
-              <a:t>数据来源：工信部《道路机动车辆生产企业及产品公告》第341~410批（2021–2026）· 权威底表 v4.3.6 · 共4,613款纯新能源乘用车（全部指标为均值口径）</a:t>
+              <a:t>数据来源：工信部《道路机动车辆生产企业及产品公告》第341~410批（2021–2026）· 权威底表 v4.9.23 · 共5392款纯新能源乘用车（全部指标为均值口径）</a:t>
             </a:r>
           </a:p>
         </p:txBody>
@@ -22474,7 +22498,7 @@
                 <a:latin typeface="Arial"/>
                 <a:ea typeface="微软雅黑"/>
               </a:rPr>
-              <a:t>数据来源：工信部《道路机动车辆生产企业及产品公告》第341~410批（2021–2026）· 权威底表 v4.3.6 · 共4,613款纯新能源乘用车（全部指标为均值口径）</a:t>
+              <a:t>数据来源：工信部《道路机动车辆生产企业及产品公告》第341~410批（2021–2026）· 权威底表 v4.9.23 · 共5392款纯新能源乘用车（全部指标为均值口径）</a:t>
             </a:r>
           </a:p>
         </p:txBody>
@@ -22750,7 +22774,7 @@
                 <a:latin typeface="Arial"/>
                 <a:ea typeface="微软雅黑"/>
               </a:rPr>
-              <a:t>数据来源：工信部《道路机动车辆生产企业及产品公告》第341~410批（2021–2026）· 权威底表 v4.3.6 · 共4,613款纯新能源乘用车（全部指标为均值口径）</a:t>
+              <a:t>数据来源：工信部《道路机动车辆生产企业及产品公告》第341~410批（2021–2026）· 权威底表 v4.9.23 · 共5392款纯新能源乘用车（全部指标为均值口径）</a:t>
             </a:r>
           </a:p>
         </p:txBody>
@@ -23026,7 +23050,7 @@
                 <a:latin typeface="Arial"/>
                 <a:ea typeface="微软雅黑"/>
               </a:rPr>
-              <a:t>数据来源：工信部《道路机动车辆生产企业及产品公告》第341~410批（2021–2026）· 权威底表 v4.3.6 · 共4,613款纯新能源乘用车（全部指标为均值口径）</a:t>
+              <a:t>数据来源：工信部《道路机动车辆生产企业及产品公告》第341~410批（2021–2026）· 权威底表 v4.9.23 · 共5392款纯新能源乘用车（全部指标为均值口径）</a:t>
             </a:r>
           </a:p>
         </p:txBody>
@@ -23302,7 +23326,7 @@
                 <a:latin typeface="Arial"/>
                 <a:ea typeface="微软雅黑"/>
               </a:rPr>
-              <a:t>数据来源：工信部《道路机动车辆生产企业及产品公告》第341~410批（2021–2026）· 权威底表 v4.3.6 · 共4,613款纯新能源乘用车（全部指标为均值口径）</a:t>
+              <a:t>数据来源：工信部《道路机动车辆生产企业及产品公告》第341~410批（2021–2026）· 权威底表 v4.9.23 · 共5392款纯新能源乘用车（全部指标为均值口径）</a:t>
             </a:r>
           </a:p>
         </p:txBody>
@@ -23391,7 +23415,7 @@
                 <a:latin typeface="Arial"/>
                 <a:ea typeface="微软雅黑"/>
               </a:rPr>
-              <a:t>洞察  平均电耗12.39kWh/100km（2025），车型大型化下能效仍维持稳定</a:t>
+              <a:t>洞察  平均电耗13.74kWh/100km（2025），车型大型化下能效仍维持稳定</a:t>
             </a:r>
           </a:p>
         </p:txBody>
@@ -23578,7 +23602,7 @@
                 <a:latin typeface="Arial"/>
                 <a:ea typeface="微软雅黑"/>
               </a:rPr>
-              <a:t>数据来源：工信部《道路机动车辆生产企业及产品公告》第341~410批（2021–2026）· 权威底表 v4.3.6 · 共4,613款纯新能源乘用车（全部指标为均值口径）</a:t>
+              <a:t>数据来源：工信部《道路机动车辆生产企业及产品公告》第341~410批（2021–2026）· 权威底表 v4.9.23 · 共5392款纯新能源乘用车（全部指标为均值口径）</a:t>
             </a:r>
           </a:p>
         </p:txBody>
@@ -23854,7 +23878,7 @@
                 <a:latin typeface="Arial"/>
                 <a:ea typeface="微软雅黑"/>
               </a:rPr>
-              <a:t>数据来源：工信部《道路机动车辆生产企业及产品公告》第341~410批（2021–2026）· 权威底表 v4.3.6 · 共4,613款纯新能源乘用车（全部指标为均值口径）</a:t>
+              <a:t>数据来源：工信部《道路机动车辆生产企业及产品公告》第341~410批（2021–2026）· 权威底表 v4.9.23 · 共5392款纯新能源乘用车（全部指标为均值口径）</a:t>
             </a:r>
           </a:p>
         </p:txBody>
@@ -24130,7 +24154,7 @@
                 <a:latin typeface="Arial"/>
                 <a:ea typeface="微软雅黑"/>
               </a:rPr>
-              <a:t>数据来源：工信部《道路机动车辆生产企业及产品公告》第341~410批（2021–2026）· 权威底表 v4.3.6 · 共4,613款纯新能源乘用车（全部指标为均值口径）</a:t>
+              <a:t>数据来源：工信部《道路机动车辆生产企业及产品公告》第341~410批（2021–2026）· 权威底表 v4.9.23 · 共5392款纯新能源乘用车（全部指标为均值口径）</a:t>
             </a:r>
           </a:p>
         </p:txBody>
@@ -24406,7 +24430,7 @@
                 <a:latin typeface="Arial"/>
                 <a:ea typeface="微软雅黑"/>
               </a:rPr>
-              <a:t>数据来源：工信部《道路机动车辆生产企业及产品公告》第341~410批（2021–2026）· 权威底表 v4.3.6 · 共4,613款纯新能源乘用车（全部指标为均值口径）</a:t>
+              <a:t>数据来源：工信部《道路机动车辆生产企业及产品公告》第341~410批（2021–2026）· 权威底表 v4.9.23 · 共5392款纯新能源乘用车（全部指标为均值口径）</a:t>
             </a:r>
           </a:p>
         </p:txBody>
@@ -24682,7 +24706,7 @@
                 <a:latin typeface="Arial"/>
                 <a:ea typeface="微软雅黑"/>
               </a:rPr>
-              <a:t>数据来源：工信部《道路机动车辆生产企业及产品公告》第341~410批（2021–2026）· 权威底表 v4.3.6 · 共4,613款纯新能源乘用车（全部指标为均值口径）</a:t>
+              <a:t>数据来源：工信部《道路机动车辆生产企业及产品公告》第341~410批（2021–2026）· 权威底表 v4.9.23 · 共5392款纯新能源乘用车（全部指标为均值口径）</a:t>
             </a:r>
           </a:p>
         </p:txBody>
@@ -24994,7 +25018,7 @@
                 <a:latin typeface="Arial"/>
                 <a:ea typeface="微软雅黑"/>
               </a:rPr>
-              <a:t>数据来源：工信部《道路机动车辆生产企业及产品公告》第341~410批（2021–2026）· 权威底表 v4.3.6 · 共4,613款纯新能源乘用车（全部指标为均值口径）</a:t>
+              <a:t>数据来源：工信部《道路机动车辆生产企业及产品公告》第341~410批（2021–2026）· 权威底表 v4.9.23 · 共5392款纯新能源乘用车（全部指标为均值口径）</a:t>
             </a:r>
           </a:p>
         </p:txBody>
@@ -25235,7 +25259,7 @@
                 <a:latin typeface="Arial"/>
                 <a:ea typeface="微软雅黑"/>
               </a:rPr>
-              <a:t>数据来源：工信部《道路机动车辆生产企业及产品公告》第341~410批（2021–2026）· 权威底表 v4.3.6 · 共4,613款纯新能源乘用车（全部指标为均值口径）</a:t>
+              <a:t>数据来源：工信部《道路机动车辆生产企业及产品公告》第341~410批（2021–2026）· 权威底表 v4.9.23 · 共5392款纯新能源乘用车（全部指标为均值口径）</a:t>
             </a:r>
           </a:p>
         </p:txBody>
@@ -25440,7 +25464,7 @@
                 <a:latin typeface="Arial"/>
                 <a:ea typeface="微软雅黑"/>
               </a:rPr>
-              <a:t>数据来源：工信部《道路机动车辆生产企业及产品公告》第341~410批（2021–2026）· 权威底表 v4.3.6 · 共4,613款纯新能源乘用车（全部指标为均值口径）</a:t>
+              <a:t>数据来源：工信部《道路机动车辆生产企业及产品公告》第341~410批（2021–2026）· 权威底表 v4.9.23 · 共5392款纯新能源乘用车（全部指标为均值口径）</a:t>
             </a:r>
           </a:p>
         </p:txBody>
@@ -25529,7 +25553,7 @@
                 <a:latin typeface="Arial"/>
                 <a:ea typeface="微软雅黑"/>
               </a:rPr>
-              <a:t>洞察  电池供应商HHI由2124.8降至1255.4（2025），集中度回落、二供三供普及</a:t>
+              <a:t>洞察  电池供应商HHI由1808.8降至1313.8（2025），集中度回落、二供三供普及</a:t>
             </a:r>
           </a:p>
         </p:txBody>
@@ -25716,7 +25740,7 @@
                 <a:latin typeface="Arial"/>
                 <a:ea typeface="微软雅黑"/>
               </a:rPr>
-              <a:t>数据来源：工信部《道路机动车辆生产企业及产品公告》第341~410批（2021–2026）· 权威底表 v4.3.6 · 共4,613款纯新能源乘用车（全部指标为均值口径）</a:t>
+              <a:t>数据来源：工信部《道路机动车辆生产企业及产品公告》第341~410批（2021–2026）· 权威底表 v4.9.23 · 共5392款纯新能源乘用车（全部指标为均值口径）</a:t>
             </a:r>
           </a:p>
         </p:txBody>
@@ -25992,7 +26016,7 @@
                 <a:latin typeface="Arial"/>
                 <a:ea typeface="微软雅黑"/>
               </a:rPr>
-              <a:t>数据来源：工信部《道路机动车辆生产企业及产品公告》第341~410批（2021–2026）· 权威底表 v4.3.6 · 共4,613款纯新能源乘用车（全部指标为均值口径）</a:t>
+              <a:t>数据来源：工信部《道路机动车辆生产企业及产品公告》第341~410批（2021–2026）· 权威底表 v4.9.23 · 共5392款纯新能源乘用车（全部指标为均值口径）</a:t>
             </a:r>
           </a:p>
         </p:txBody>
@@ -26268,7 +26292,7 @@
                 <a:latin typeface="Arial"/>
                 <a:ea typeface="微软雅黑"/>
               </a:rPr>
-              <a:t>数据来源：工信部《道路机动车辆生产企业及产品公告》第341~410批（2021–2026）· 权威底表 v4.3.6 · 共4,613款纯新能源乘用车（全部指标为均值口径）</a:t>
+              <a:t>数据来源：工信部《道路机动车辆生产企业及产品公告》第341~410批（2021–2026）· 权威底表 v4.9.23 · 共5392款纯新能源乘用车（全部指标为均值口径）</a:t>
             </a:r>
           </a:p>
         </p:txBody>
@@ -26544,7 +26568,7 @@
                 <a:latin typeface="Arial"/>
                 <a:ea typeface="微软雅黑"/>
               </a:rPr>
-              <a:t>数据来源：工信部《道路机动车辆生产企业及产品公告》第341~410批（2021–2026）· 权威底表 v4.3.6 · 共4,613款纯新能源乘用车（全部指标为均值口径）</a:t>
+              <a:t>数据来源：工信部《道路机动车辆生产企业及产品公告》第341~410批（2021–2026）· 权威底表 v4.9.23 · 共5392款纯新能源乘用车（全部指标为均值口径）</a:t>
             </a:r>
           </a:p>
         </p:txBody>
@@ -26820,7 +26844,7 @@
                 <a:latin typeface="Arial"/>
                 <a:ea typeface="微软雅黑"/>
               </a:rPr>
-              <a:t>数据来源：工信部《道路机动车辆生产企业及产品公告》第341~410批（2021–2026）· 权威底表 v4.3.6 · 共4,613款纯新能源乘用车（全部指标为均值口径）</a:t>
+              <a:t>数据来源：工信部《道路机动车辆生产企业及产品公告》第341~410批（2021–2026）· 权威底表 v4.9.23 · 共5392款纯新能源乘用车（全部指标为均值口径）</a:t>
             </a:r>
           </a:p>
         </p:txBody>
@@ -27066,7 +27090,7 @@
                           <a:latin typeface="Arial"/>
                           <a:ea typeface="微软雅黑"/>
                         </a:rPr>
-                        <a:t>28</a:t>
+                        <a:t>190</a:t>
                       </a:r>
                     </a:p>
                   </a:txBody>
@@ -27112,7 +27136,7 @@
                           <a:latin typeface="Arial"/>
                           <a:ea typeface="微软雅黑"/>
                         </a:rPr>
-                        <a:t>宁德时代 + 联合汽车电子</a:t>
+                        <a:t>比亚迪 + 长沙市比亚迪汽车有限公司</a:t>
                       </a:r>
                     </a:p>
                   </a:txBody>
@@ -27136,7 +27160,7 @@
                           <a:latin typeface="Arial"/>
                           <a:ea typeface="微软雅黑"/>
                         </a:rPr>
-                        <a:t>27</a:t>
+                        <a:t>28</a:t>
                       </a:r>
                     </a:p>
                   </a:txBody>
@@ -27182,7 +27206,7 @@
                           <a:latin typeface="Arial"/>
                           <a:ea typeface="微软雅黑"/>
                         </a:rPr>
-                        <a:t>弗迪 + 南京市比亚迪汽车有限公司</a:t>
+                        <a:t>宁德时代 + 联合汽车电子</a:t>
                       </a:r>
                     </a:p>
                   </a:txBody>
@@ -27202,7 +27226,7 @@
                           <a:latin typeface="Arial"/>
                           <a:ea typeface="微软雅黑"/>
                         </a:rPr>
-                        <a:t>25</a:t>
+                        <a:t>27</a:t>
                       </a:r>
                     </a:p>
                   </a:txBody>
@@ -27248,7 +27272,7 @@
                           <a:latin typeface="Arial"/>
                           <a:ea typeface="微软雅黑"/>
                         </a:rPr>
-                        <a:t>宁德时代 + 联合汽车电子有限公司</a:t>
+                        <a:t>弗迪 + 南京市比亚迪汽车有限公司</a:t>
                       </a:r>
                     </a:p>
                   </a:txBody>
@@ -27272,7 +27296,7 @@
                           <a:latin typeface="Arial"/>
                           <a:ea typeface="微软雅黑"/>
                         </a:rPr>
-                        <a:t>18</a:t>
+                        <a:t>25</a:t>
                       </a:r>
                     </a:p>
                   </a:txBody>
@@ -27318,7 +27342,7 @@
                           <a:latin typeface="Arial"/>
                           <a:ea typeface="微软雅黑"/>
                         </a:rPr>
-                        <a:t>弗迪 + 长沙市比亚迪</a:t>
+                        <a:t>宁德时代 + 重庆青山工业有限责任公司</a:t>
                       </a:r>
                     </a:p>
                   </a:txBody>
@@ -27338,7 +27362,7 @@
                           <a:latin typeface="Arial"/>
                           <a:ea typeface="微软雅黑"/>
                         </a:rPr>
-                        <a:t>14</a:t>
+                        <a:t>21</a:t>
                       </a:r>
                     </a:p>
                   </a:txBody>
@@ -27384,7 +27408,7 @@
                           <a:latin typeface="Arial"/>
                           <a:ea typeface="微软雅黑"/>
                         </a:rPr>
-                        <a:t>宁德时代 + 湖南中车时代电驱科技有限公司</a:t>
+                        <a:t>宁德时代 + 联合电子</a:t>
                       </a:r>
                     </a:p>
                   </a:txBody>
@@ -27408,7 +27432,7 @@
                           <a:latin typeface="Arial"/>
                           <a:ea typeface="微软雅黑"/>
                         </a:rPr>
-                        <a:t>13</a:t>
+                        <a:t>18</a:t>
                       </a:r>
                     </a:p>
                   </a:txBody>
@@ -27454,7 +27478,7 @@
                           <a:latin typeface="Arial"/>
                           <a:ea typeface="微软雅黑"/>
                         </a:rPr>
-                        <a:t>弗迪 + 郑州比亚迪汽车有限公司</a:t>
+                        <a:t>宁德时代 + 联合汽车电子有限公司</a:t>
                       </a:r>
                     </a:p>
                   </a:txBody>
@@ -27474,7 +27498,7 @@
                           <a:latin typeface="Arial"/>
                           <a:ea typeface="微软雅黑"/>
                         </a:rPr>
-                        <a:t>12</a:t>
+                        <a:t>18</a:t>
                       </a:r>
                     </a:p>
                   </a:txBody>
@@ -27520,7 +27544,7 @@
                           <a:latin typeface="Arial"/>
                           <a:ea typeface="微软雅黑"/>
                         </a:rPr>
-                        <a:t>欣旺达 + 珠海英搏尔电气股份有限公司</a:t>
+                        <a:t>耀宁新能源 + 威睿电动技术有限公司</a:t>
                       </a:r>
                     </a:p>
                   </a:txBody>
@@ -27544,7 +27568,7 @@
                           <a:latin typeface="Arial"/>
                           <a:ea typeface="微软雅黑"/>
                         </a:rPr>
-                        <a:t>11</a:t>
+                        <a:t>18</a:t>
                       </a:r>
                     </a:p>
                   </a:txBody>
@@ -27590,7 +27614,7 @@
                           <a:latin typeface="Arial"/>
                           <a:ea typeface="微软雅黑"/>
                         </a:rPr>
-                        <a:t>蜂巢能源 + 无锡星驱动力科技有限公司</a:t>
+                        <a:t>弗迪 + 长沙市比亚迪</a:t>
                       </a:r>
                     </a:p>
                   </a:txBody>
@@ -27610,7 +27634,7 @@
                           <a:latin typeface="Arial"/>
                           <a:ea typeface="微软雅黑"/>
                         </a:rPr>
-                        <a:t>10</a:t>
+                        <a:t>14</a:t>
                       </a:r>
                     </a:p>
                   </a:txBody>
@@ -27656,7 +27680,7 @@
                           <a:latin typeface="Arial"/>
                           <a:ea typeface="微软雅黑"/>
                         </a:rPr>
-                        <a:t>弗迪 + 比亚迪</a:t>
+                        <a:t>中创新航 + 重庆青山工业有限责任公司</a:t>
                       </a:r>
                     </a:p>
                   </a:txBody>
@@ -27680,7 +27704,7 @@
                           <a:latin typeface="Arial"/>
                           <a:ea typeface="微软雅黑"/>
                         </a:rPr>
-                        <a:t>9</a:t>
+                        <a:t>13</a:t>
                       </a:r>
                     </a:p>
                   </a:txBody>
@@ -27859,7 +27883,7 @@
                 <a:latin typeface="Arial"/>
                 <a:ea typeface="微软雅黑"/>
               </a:rPr>
-              <a:t>数据来源：工信部《道路机动车辆生产企业及产品公告》第341~410批（2021–2026）· 权威底表 v4.3.6 · 共4,613款纯新能源乘用车（全部指标为均值口径）</a:t>
+              <a:t>数据来源：工信部《道路机动车辆生产企业及产品公告》第341~410批（2021–2026）· 权威底表 v4.9.23 · 共5392款纯新能源乘用车（全部指标为均值口径）</a:t>
             </a:r>
           </a:p>
         </p:txBody>
@@ -28018,7 +28042,7 @@
                           <a:latin typeface="Arial"/>
                           <a:ea typeface="微软雅黑"/>
                         </a:rPr>
-                        <a:t>弗迪</a:t>
+                        <a:t>宁德时代</a:t>
                       </a:r>
                     </a:p>
                   </a:txBody>
@@ -28042,7 +28066,7 @@
                           <a:latin typeface="Arial"/>
                           <a:ea typeface="微软雅黑"/>
                         </a:rPr>
-                        <a:t>宁德时代</a:t>
+                        <a:t>弗迪</a:t>
                       </a:r>
                     </a:p>
                   </a:txBody>
@@ -28066,7 +28090,7 @@
                           <a:latin typeface="Arial"/>
                           <a:ea typeface="微软雅黑"/>
                         </a:rPr>
-                        <a:t>中创新航</a:t>
+                        <a:t>国轩高科</a:t>
                       </a:r>
                     </a:p>
                   </a:txBody>
@@ -28090,7 +28114,7 @@
                           <a:latin typeface="Arial"/>
                           <a:ea typeface="微软雅黑"/>
                         </a:rPr>
-                        <a:t>国轩高科</a:t>
+                        <a:t>蜂巢能源</a:t>
                       </a:r>
                     </a:p>
                   </a:txBody>
@@ -28114,7 +28138,7 @@
                           <a:latin typeface="Arial"/>
                           <a:ea typeface="微软雅黑"/>
                         </a:rPr>
-                        <a:t>宁德时代(四川时代)</a:t>
+                        <a:t>中创新航</a:t>
                       </a:r>
                     </a:p>
                   </a:txBody>
@@ -28140,7 +28164,7 @@
                           <a:latin typeface="Arial"/>
                           <a:ea typeface="微软雅黑"/>
                         </a:rPr>
-                        <a:t>比亚迪</a:t>
+                        <a:t>比亚迪牌</a:t>
                       </a:r>
                     </a:p>
                   </a:txBody>
@@ -28160,7 +28184,7 @@
                           <a:latin typeface="Arial"/>
                           <a:ea typeface="微软雅黑"/>
                         </a:rPr>
-                        <a:t>244</a:t>
+                        <a:t>1</a:t>
                       </a:r>
                     </a:p>
                   </a:txBody>
@@ -28180,7 +28204,7 @@
                           <a:latin typeface="Arial"/>
                           <a:ea typeface="微软雅黑"/>
                         </a:rPr>
-                        <a:t>1</a:t>
+                        <a:t>249</a:t>
                       </a:r>
                     </a:p>
                   </a:txBody>
@@ -28262,7 +28286,7 @@
                           <a:latin typeface="Arial"/>
                           <a:ea typeface="微软雅黑"/>
                         </a:rPr>
-                        <a:t>长安</a:t>
+                        <a:t>长安牌</a:t>
                       </a:r>
                     </a:p>
                   </a:txBody>
@@ -28286,7 +28310,7 @@
                           <a:latin typeface="Arial"/>
                           <a:ea typeface="微软雅黑"/>
                         </a:rPr>
-                        <a:t>0</a:t>
+                        <a:t>43</a:t>
                       </a:r>
                     </a:p>
                   </a:txBody>
@@ -28310,7 +28334,7 @@
                           <a:latin typeface="Arial"/>
                           <a:ea typeface="微软雅黑"/>
                         </a:rPr>
-                        <a:t>35</a:t>
+                        <a:t>0</a:t>
                       </a:r>
                     </a:p>
                   </a:txBody>
@@ -28334,7 +28358,7 @@
                           <a:latin typeface="Arial"/>
                           <a:ea typeface="微软雅黑"/>
                         </a:rPr>
-                        <a:t>12</a:t>
+                        <a:t>2</a:t>
                       </a:r>
                     </a:p>
                   </a:txBody>
@@ -28358,7 +28382,7 @@
                           <a:latin typeface="Arial"/>
                           <a:ea typeface="微软雅黑"/>
                         </a:rPr>
-                        <a:t>9</a:t>
+                        <a:t>0</a:t>
                       </a:r>
                     </a:p>
                   </a:txBody>
@@ -28382,7 +28406,7 @@
                           <a:latin typeface="Arial"/>
                           <a:ea typeface="微软雅黑"/>
                         </a:rPr>
-                        <a:t>0</a:t>
+                        <a:t>13</a:t>
                       </a:r>
                     </a:p>
                   </a:txBody>
@@ -28408,7 +28432,7 @@
                           <a:latin typeface="Arial"/>
                           <a:ea typeface="微软雅黑"/>
                         </a:rPr>
-                        <a:t>吉利</a:t>
+                        <a:t>埃安(AION)牌</a:t>
                       </a:r>
                     </a:p>
                   </a:txBody>
@@ -28428,27 +28452,27 @@
                           <a:latin typeface="Arial"/>
                           <a:ea typeface="微软雅黑"/>
                         </a:rPr>
+                        <a:t>3</a:t>
+                      </a:r>
+                    </a:p>
+                  </a:txBody>
+                  <a:tcPr/>
+                </a:tc>
+                <a:tc>
+                  <a:txBody>
+                    <a:bodyPr/>
+                    <a:lstStyle/>
+                    <a:p>
+                      <a:pPr algn="ctr"/>
+                      <a:r>
+                        <a:rPr sz="1000" b="0">
+                          <a:solidFill>
+                            <a:srgbClr val="333333"/>
+                          </a:solidFill>
+                          <a:latin typeface="Arial"/>
+                          <a:ea typeface="微软雅黑"/>
+                        </a:rPr>
                         <a:t>0</a:t>
-                      </a:r>
-                    </a:p>
-                  </a:txBody>
-                  <a:tcPr/>
-                </a:tc>
-                <a:tc>
-                  <a:txBody>
-                    <a:bodyPr/>
-                    <a:lstStyle/>
-                    <a:p>
-                      <a:pPr algn="ctr"/>
-                      <a:r>
-                        <a:rPr sz="1000" b="0">
-                          <a:solidFill>
-                            <a:srgbClr val="333333"/>
-                          </a:solidFill>
-                          <a:latin typeface="Arial"/>
-                          <a:ea typeface="微软雅黑"/>
-                        </a:rPr>
-                        <a:t>17</a:t>
                       </a:r>
                     </a:p>
                   </a:txBody>
@@ -28530,7 +28554,7 @@
                           <a:latin typeface="Arial"/>
                           <a:ea typeface="微软雅黑"/>
                         </a:rPr>
-                        <a:t>东风</a:t>
+                        <a:t>奇瑞牌</a:t>
                       </a:r>
                     </a:p>
                   </a:txBody>
@@ -28578,7 +28602,7 @@
                           <a:latin typeface="Arial"/>
                           <a:ea typeface="微软雅黑"/>
                         </a:rPr>
-                        <a:t>7</a:t>
+                        <a:t>4</a:t>
                       </a:r>
                     </a:p>
                   </a:txBody>
@@ -28602,7 +28626,7 @@
                           <a:latin typeface="Arial"/>
                           <a:ea typeface="微软雅黑"/>
                         </a:rPr>
-                        <a:t>7</a:t>
+                        <a:t>29</a:t>
                       </a:r>
                     </a:p>
                   </a:txBody>
@@ -28626,7 +28650,7 @@
                           <a:latin typeface="Arial"/>
                           <a:ea typeface="微软雅黑"/>
                         </a:rPr>
-                        <a:t>2</a:t>
+                        <a:t>0</a:t>
                       </a:r>
                     </a:p>
                   </a:txBody>
@@ -28676,7 +28700,7 @@
                           <a:latin typeface="Arial"/>
                           <a:ea typeface="微软雅黑"/>
                         </a:rPr>
-                        <a:t>小鹏</a:t>
+                        <a:t>吉利牌</a:t>
                       </a:r>
                     </a:p>
                   </a:txBody>
@@ -28696,6 +28720,26 @@
                           <a:latin typeface="Arial"/>
                           <a:ea typeface="微软雅黑"/>
                         </a:rPr>
+                        <a:t>22</a:t>
+                      </a:r>
+                    </a:p>
+                  </a:txBody>
+                  <a:tcPr/>
+                </a:tc>
+                <a:tc>
+                  <a:txBody>
+                    <a:bodyPr/>
+                    <a:lstStyle/>
+                    <a:p>
+                      <a:pPr algn="ctr"/>
+                      <a:r>
+                        <a:rPr sz="1000" b="0">
+                          <a:solidFill>
+                            <a:srgbClr val="333333"/>
+                          </a:solidFill>
+                          <a:latin typeface="Arial"/>
+                          <a:ea typeface="微软雅黑"/>
+                        </a:rPr>
                         <a:t>0</a:t>
                       </a:r>
                     </a:p>
@@ -28736,27 +28780,7 @@
                           <a:latin typeface="Arial"/>
                           <a:ea typeface="微软雅黑"/>
                         </a:rPr>
-                        <a:t>20</a:t>
-                      </a:r>
-                    </a:p>
-                  </a:txBody>
-                  <a:tcPr/>
-                </a:tc>
-                <a:tc>
-                  <a:txBody>
-                    <a:bodyPr/>
-                    <a:lstStyle/>
-                    <a:p>
-                      <a:pPr algn="ctr"/>
-                      <a:r>
-                        <a:rPr sz="1000" b="0">
-                          <a:solidFill>
-                            <a:srgbClr val="333333"/>
-                          </a:solidFill>
-                          <a:latin typeface="Arial"/>
-                          <a:ea typeface="微软雅黑"/>
-                        </a:rPr>
-                        <a:t>0</a:t>
+                        <a:t>11</a:t>
                       </a:r>
                     </a:p>
                   </a:txBody>
@@ -28798,7 +28822,7 @@
                           <a:latin typeface="Arial"/>
                           <a:ea typeface="微软雅黑"/>
                         </a:rPr>
-                        <a:t>腾势</a:t>
+                        <a:t>零跑牌</a:t>
                       </a:r>
                     </a:p>
                   </a:txBody>
@@ -28822,7 +28846,7 @@
                           <a:latin typeface="Arial"/>
                           <a:ea typeface="微软雅黑"/>
                         </a:rPr>
-                        <a:t>21</a:t>
+                        <a:t>8</a:t>
                       </a:r>
                     </a:p>
                   </a:txBody>
@@ -28870,7 +28894,7 @@
                           <a:latin typeface="Arial"/>
                           <a:ea typeface="微软雅黑"/>
                         </a:rPr>
-                        <a:t>0</a:t>
+                        <a:t>22</a:t>
                       </a:r>
                     </a:p>
                   </a:txBody>
@@ -28918,7 +28942,7 @@
                           <a:latin typeface="Arial"/>
                           <a:ea typeface="微软雅黑"/>
                         </a:rPr>
-                        <a:t>0</a:t>
+                        <a:t>1</a:t>
                       </a:r>
                     </a:p>
                   </a:txBody>
@@ -28944,7 +28968,7 @@
                           <a:latin typeface="Arial"/>
                           <a:ea typeface="微软雅黑"/>
                         </a:rPr>
-                        <a:t>极氪</a:t>
+                        <a:t>东风牌</a:t>
                       </a:r>
                     </a:p>
                   </a:txBody>
@@ -28964,6 +28988,26 @@
                           <a:latin typeface="Arial"/>
                           <a:ea typeface="微软雅黑"/>
                         </a:rPr>
+                        <a:t>6</a:t>
+                      </a:r>
+                    </a:p>
+                  </a:txBody>
+                  <a:tcPr/>
+                </a:tc>
+                <a:tc>
+                  <a:txBody>
+                    <a:bodyPr/>
+                    <a:lstStyle/>
+                    <a:p>
+                      <a:pPr algn="ctr"/>
+                      <a:r>
+                        <a:rPr sz="1000" b="0">
+                          <a:solidFill>
+                            <a:srgbClr val="333333"/>
+                          </a:solidFill>
+                          <a:latin typeface="Arial"/>
+                          <a:ea typeface="微软雅黑"/>
+                        </a:rPr>
                         <a:t>0</a:t>
                       </a:r>
                     </a:p>
@@ -28984,6 +29028,26 @@
                           <a:latin typeface="Arial"/>
                           <a:ea typeface="微软雅黑"/>
                         </a:rPr>
+                        <a:t>2</a:t>
+                      </a:r>
+                    </a:p>
+                  </a:txBody>
+                  <a:tcPr/>
+                </a:tc>
+                <a:tc>
+                  <a:txBody>
+                    <a:bodyPr/>
+                    <a:lstStyle/>
+                    <a:p>
+                      <a:pPr algn="ctr"/>
+                      <a:r>
+                        <a:rPr sz="1000" b="0">
+                          <a:solidFill>
+                            <a:srgbClr val="333333"/>
+                          </a:solidFill>
+                          <a:latin typeface="Arial"/>
+                          <a:ea typeface="微软雅黑"/>
+                        </a:rPr>
                         <a:t>0</a:t>
                       </a:r>
                     </a:p>
@@ -29004,47 +29068,7 @@
                           <a:latin typeface="Arial"/>
                           <a:ea typeface="微软雅黑"/>
                         </a:rPr>
-                        <a:t>0</a:t>
-                      </a:r>
-                    </a:p>
-                  </a:txBody>
-                  <a:tcPr/>
-                </a:tc>
-                <a:tc>
-                  <a:txBody>
-                    <a:bodyPr/>
-                    <a:lstStyle/>
-                    <a:p>
-                      <a:pPr algn="ctr"/>
-                      <a:r>
-                        <a:rPr sz="1000" b="0">
-                          <a:solidFill>
-                            <a:srgbClr val="333333"/>
-                          </a:solidFill>
-                          <a:latin typeface="Arial"/>
-                          <a:ea typeface="微软雅黑"/>
-                        </a:rPr>
-                        <a:t>0</a:t>
-                      </a:r>
-                    </a:p>
-                  </a:txBody>
-                  <a:tcPr/>
-                </a:tc>
-                <a:tc>
-                  <a:txBody>
-                    <a:bodyPr/>
-                    <a:lstStyle/>
-                    <a:p>
-                      <a:pPr algn="ctr"/>
-                      <a:r>
-                        <a:rPr sz="1000" b="0">
-                          <a:solidFill>
-                            <a:srgbClr val="333333"/>
-                          </a:solidFill>
-                          <a:latin typeface="Arial"/>
-                          <a:ea typeface="微软雅黑"/>
-                        </a:rPr>
-                        <a:t>31</a:t>
+                        <a:t>7</a:t>
                       </a:r>
                     </a:p>
                   </a:txBody>
@@ -29066,7 +29090,7 @@
                           <a:latin typeface="Arial"/>
                           <a:ea typeface="微软雅黑"/>
                         </a:rPr>
-                        <a:t>奇瑞</a:t>
+                        <a:t>五菱牌</a:t>
                       </a:r>
                     </a:p>
                   </a:txBody>
@@ -29090,7 +29114,7 @@
                           <a:latin typeface="Arial"/>
                           <a:ea typeface="微软雅黑"/>
                         </a:rPr>
-                        <a:t>4</a:t>
+                        <a:t>0</a:t>
                       </a:r>
                     </a:p>
                   </a:txBody>
@@ -29138,7 +29162,7 @@
                           <a:latin typeface="Arial"/>
                           <a:ea typeface="微软雅黑"/>
                         </a:rPr>
-                        <a:t>0</a:t>
+                        <a:t>1</a:t>
                       </a:r>
                     </a:p>
                   </a:txBody>
@@ -29162,7 +29186,7 @@
                           <a:latin typeface="Arial"/>
                           <a:ea typeface="微软雅黑"/>
                         </a:rPr>
-                        <a:t>25</a:t>
+                        <a:t>0</a:t>
                       </a:r>
                     </a:p>
                   </a:txBody>
@@ -29365,7 +29389,7 @@
                 <a:latin typeface="Arial"/>
                 <a:ea typeface="微软雅黑"/>
               </a:rPr>
-              <a:t>数据来源：工信部《道路机动车辆生产企业及产品公告》第341~410批（2021–2026）· 权威底表 v4.3.6 · 共4,613款纯新能源乘用车（全部指标为均值口径）</a:t>
+              <a:t>数据来源：工信部《道路机动车辆生产企业及产品公告》第341~410批（2021–2026）· 权威底表 v4.9.23 · 共5392款纯新能源乘用车（全部指标为均值口径）</a:t>
             </a:r>
           </a:p>
         </p:txBody>
@@ -29524,7 +29548,7 @@
                           <a:latin typeface="Arial"/>
                           <a:ea typeface="微软雅黑"/>
                         </a:rPr>
-                        <a:t>苏州汇川联合动力系统股份有限公司</a:t>
+                        <a:t>长沙市比亚迪汽车有限公司</a:t>
                       </a:r>
                     </a:p>
                   </a:txBody>
@@ -29548,7 +29572,7 @@
                           <a:latin typeface="Arial"/>
                           <a:ea typeface="微软雅黑"/>
                         </a:rPr>
-                        <a:t>奇瑞汽车</a:t>
+                        <a:t>重庆青山工业有限责任公司</a:t>
                       </a:r>
                     </a:p>
                   </a:txBody>
@@ -29572,7 +29596,7 @@
                           <a:latin typeface="Arial"/>
                           <a:ea typeface="微软雅黑"/>
                         </a:rPr>
-                        <a:t>金华凌昇动力科技有限公司</a:t>
+                        <a:t>奇瑞汽车</a:t>
                       </a:r>
                     </a:p>
                   </a:txBody>
@@ -29596,7 +29620,7 @@
                           <a:latin typeface="Arial"/>
                           <a:ea typeface="微软雅黑"/>
                         </a:rPr>
-                        <a:t>锐湃动力科技有限公司</a:t>
+                        <a:t>苏州汇川联合动力系统股份有限公司</a:t>
                       </a:r>
                     </a:p>
                   </a:txBody>
@@ -29620,7 +29644,7 @@
                           <a:latin typeface="Arial"/>
                           <a:ea typeface="微软雅黑"/>
                         </a:rPr>
-                        <a:t>联合汽车电子</a:t>
+                        <a:t>华为数字能源技术有限公司</a:t>
                       </a:r>
                     </a:p>
                   </a:txBody>
@@ -29646,7 +29670,7 @@
                           <a:latin typeface="Arial"/>
                           <a:ea typeface="微软雅黑"/>
                         </a:rPr>
-                        <a:t>埃安(AION)</a:t>
+                        <a:t>比亚迪牌</a:t>
                       </a:r>
                     </a:p>
                   </a:txBody>
@@ -29666,7 +29690,7 @@
                           <a:latin typeface="Arial"/>
                           <a:ea typeface="微软雅黑"/>
                         </a:rPr>
-                        <a:t>51</a:t>
+                        <a:t>217</a:t>
                       </a:r>
                     </a:p>
                   </a:txBody>
@@ -29726,7 +29750,7 @@
                           <a:latin typeface="Arial"/>
                           <a:ea typeface="微软雅黑"/>
                         </a:rPr>
-                        <a:t>41</a:t>
+                        <a:t>0</a:t>
                       </a:r>
                     </a:p>
                   </a:txBody>
@@ -29768,7 +29792,7 @@
                           <a:latin typeface="Arial"/>
                           <a:ea typeface="微软雅黑"/>
                         </a:rPr>
-                        <a:t>比亚迪</a:t>
+                        <a:t>长安牌</a:t>
                       </a:r>
                     </a:p>
                   </a:txBody>
@@ -29816,7 +29840,7 @@
                           <a:latin typeface="Arial"/>
                           <a:ea typeface="微软雅黑"/>
                         </a:rPr>
-                        <a:t>0</a:t>
+                        <a:t>116</a:t>
                       </a:r>
                     </a:p>
                   </a:txBody>
@@ -29864,7 +29888,7 @@
                           <a:latin typeface="Arial"/>
                           <a:ea typeface="微软雅黑"/>
                         </a:rPr>
-                        <a:t>0</a:t>
+                        <a:t>1</a:t>
                       </a:r>
                     </a:p>
                   </a:txBody>
@@ -29914,7 +29938,7 @@
                           <a:latin typeface="Arial"/>
                           <a:ea typeface="微软雅黑"/>
                         </a:rPr>
-                        <a:t>奇瑞</a:t>
+                        <a:t>埃安(AION)牌</a:t>
                       </a:r>
                     </a:p>
                   </a:txBody>
@@ -29934,7 +29958,7 @@
                           <a:latin typeface="Arial"/>
                           <a:ea typeface="微软雅黑"/>
                         </a:rPr>
-                        <a:t>3</a:t>
+                        <a:t>0</a:t>
                       </a:r>
                     </a:p>
                   </a:txBody>
@@ -29954,7 +29978,7 @@
                           <a:latin typeface="Arial"/>
                           <a:ea typeface="微软雅黑"/>
                         </a:rPr>
-                        <a:t>52</a:t>
+                        <a:t>0</a:t>
                       </a:r>
                     </a:p>
                   </a:txBody>
@@ -29994,7 +30018,7 @@
                           <a:latin typeface="Arial"/>
                           <a:ea typeface="微软雅黑"/>
                         </a:rPr>
-                        <a:t>0</a:t>
+                        <a:t>44</a:t>
                       </a:r>
                     </a:p>
                   </a:txBody>
@@ -30036,7 +30060,7 @@
                           <a:latin typeface="Arial"/>
                           <a:ea typeface="微软雅黑"/>
                         </a:rPr>
-                        <a:t>零跑</a:t>
+                        <a:t>奇瑞牌</a:t>
                       </a:r>
                     </a:p>
                   </a:txBody>
@@ -30108,7 +30132,7 @@
                           <a:latin typeface="Arial"/>
                           <a:ea typeface="微软雅黑"/>
                         </a:rPr>
-                        <a:t>44</a:t>
+                        <a:t>53</a:t>
                       </a:r>
                     </a:p>
                   </a:txBody>
@@ -30132,7 +30156,7 @@
                           <a:latin typeface="Arial"/>
                           <a:ea typeface="微软雅黑"/>
                         </a:rPr>
-                        <a:t>0</a:t>
+                        <a:t>3</a:t>
                       </a:r>
                     </a:p>
                   </a:txBody>
@@ -30156,7 +30180,7 @@
                           <a:latin typeface="Arial"/>
                           <a:ea typeface="微软雅黑"/>
                         </a:rPr>
-                        <a:t>0</a:t>
+                        <a:t>8</a:t>
                       </a:r>
                     </a:p>
                   </a:txBody>
@@ -30182,7 +30206,7 @@
                           <a:latin typeface="Arial"/>
                           <a:ea typeface="微软雅黑"/>
                         </a:rPr>
-                        <a:t>长安</a:t>
+                        <a:t>吉利牌</a:t>
                       </a:r>
                     </a:p>
                   </a:txBody>
@@ -30202,7 +30226,7 @@
                           <a:latin typeface="Arial"/>
                           <a:ea typeface="微软雅黑"/>
                         </a:rPr>
-                        <a:t>1</a:t>
+                        <a:t>0</a:t>
                       </a:r>
                     </a:p>
                   </a:txBody>
@@ -30304,7 +30328,7 @@
                           <a:latin typeface="Arial"/>
                           <a:ea typeface="微软雅黑"/>
                         </a:rPr>
-                        <a:t>五菱</a:t>
+                        <a:t>零跑牌</a:t>
                       </a:r>
                     </a:p>
                   </a:txBody>
@@ -30450,7 +30474,7 @@
                           <a:latin typeface="Arial"/>
                           <a:ea typeface="微软雅黑"/>
                         </a:rPr>
-                        <a:t>小鹏</a:t>
+                        <a:t>东风牌</a:t>
                       </a:r>
                     </a:p>
                   </a:txBody>
@@ -30470,7 +30494,7 @@
                           <a:latin typeface="Arial"/>
                           <a:ea typeface="微软雅黑"/>
                         </a:rPr>
-                        <a:t>1</a:t>
+                        <a:t>18</a:t>
                       </a:r>
                     </a:p>
                   </a:txBody>
@@ -30572,7 +30596,7 @@
                           <a:latin typeface="Arial"/>
                           <a:ea typeface="微软雅黑"/>
                         </a:rPr>
-                        <a:t>哪吒</a:t>
+                        <a:t>五菱牌</a:t>
                       </a:r>
                     </a:p>
                   </a:txBody>
@@ -30596,7 +30620,7 @@
                           <a:latin typeface="Arial"/>
                           <a:ea typeface="微软雅黑"/>
                         </a:rPr>
-                        <a:t>0</a:t>
+                        <a:t>1</a:t>
                       </a:r>
                     </a:p>
                   </a:txBody>
@@ -30718,7 +30742,7 @@
                           <a:latin typeface="Arial"/>
                           <a:ea typeface="微软雅黑"/>
                         </a:rPr>
-                        <a:t>东风</a:t>
+                        <a:t>小鹏牌</a:t>
                       </a:r>
                     </a:p>
                   </a:txBody>
@@ -30798,7 +30822,7 @@
                           <a:latin typeface="Arial"/>
                           <a:ea typeface="微软雅黑"/>
                         </a:rPr>
-                        <a:t>0</a:t>
+                        <a:t>1</a:t>
                       </a:r>
                     </a:p>
                   </a:txBody>
@@ -30840,7 +30864,7 @@
                           <a:latin typeface="Arial"/>
                           <a:ea typeface="微软雅黑"/>
                         </a:rPr>
-                        <a:t>欧拉</a:t>
+                        <a:t>哪吒牌</a:t>
                       </a:r>
                     </a:p>
                   </a:txBody>
@@ -30960,7 +30984,7 @@
                           <a:latin typeface="Arial"/>
                           <a:ea typeface="微软雅黑"/>
                         </a:rPr>
-                        <a:t>36</a:t>
+                        <a:t>0</a:t>
                       </a:r>
                     </a:p>
                   </a:txBody>
@@ -31139,7 +31163,7 @@
                 <a:latin typeface="Arial"/>
                 <a:ea typeface="微软雅黑"/>
               </a:rPr>
-              <a:t>数据来源：工信部《道路机动车辆生产企业及产品公告》第341~410批（2021–2026）· 权威底表 v4.3.6 · 共4,613款纯新能源乘用车（全部指标为均值口径）</a:t>
+              <a:t>数据来源：工信部《道路机动车辆生产企业及产品公告》第341~410批（2021–2026）· 权威底表 v4.9.23 · 共5392款纯新能源乘用车（全部指标为均值口径）</a:t>
             </a:r>
           </a:p>
         </p:txBody>
@@ -31295,7 +31319,7 @@
                           <a:latin typeface="Arial"/>
                           <a:ea typeface="微软雅黑"/>
                         </a:rPr>
-                        <a:t>HHI</a:t>
+                        <a:t>电池供应商HHI</a:t>
                       </a:r>
                     </a:p>
                   </a:txBody>
@@ -31319,7 +31343,7 @@
                           <a:latin typeface="Arial"/>
                           <a:ea typeface="微软雅黑"/>
                         </a:rPr>
-                        <a:t>CR3%</a:t>
+                        <a:t>电池CR3(%)</a:t>
                       </a:r>
                     </a:p>
                   </a:txBody>
@@ -31365,7 +31389,7 @@
                           <a:latin typeface="Arial"/>
                           <a:ea typeface="微软雅黑"/>
                         </a:rPr>
-                        <a:t>2124.8</a:t>
+                        <a:t>1808.8</a:t>
                       </a:r>
                     </a:p>
                   </a:txBody>
@@ -31385,7 +31409,7 @@
                           <a:latin typeface="Arial"/>
                           <a:ea typeface="微软雅黑"/>
                         </a:rPr>
-                        <a:t>74.3</a:t>
+                        <a:t>66.2</a:t>
                       </a:r>
                     </a:p>
                   </a:txBody>
@@ -31431,7 +31455,7 @@
                           <a:latin typeface="Arial"/>
                           <a:ea typeface="微软雅黑"/>
                         </a:rPr>
-                        <a:t>1541.6</a:t>
+                        <a:t>1546.3</a:t>
                       </a:r>
                     </a:p>
                   </a:txBody>
@@ -31455,7 +31479,7 @@
                           <a:latin typeface="Arial"/>
                           <a:ea typeface="微软雅黑"/>
                         </a:rPr>
-                        <a:t>58.9</a:t>
+                        <a:t>58.4</a:t>
                       </a:r>
                     </a:p>
                   </a:txBody>
@@ -31501,7 +31525,7 @@
                           <a:latin typeface="Arial"/>
                           <a:ea typeface="微软雅黑"/>
                         </a:rPr>
-                        <a:t>1535.2</a:t>
+                        <a:t>1529.7</a:t>
                       </a:r>
                     </a:p>
                   </a:txBody>
@@ -31521,7 +31545,7 @@
                           <a:latin typeface="Arial"/>
                           <a:ea typeface="微软雅黑"/>
                         </a:rPr>
-                        <a:t>57.7</a:t>
+                        <a:t>56.1</a:t>
                       </a:r>
                     </a:p>
                   </a:txBody>
@@ -31567,7 +31591,7 @@
                           <a:latin typeface="Arial"/>
                           <a:ea typeface="微软雅黑"/>
                         </a:rPr>
-                        <a:t>2078.8</a:t>
+                        <a:t>2197.3</a:t>
                       </a:r>
                     </a:p>
                   </a:txBody>
@@ -31591,7 +31615,7 @@
                           <a:latin typeface="Arial"/>
                           <a:ea typeface="微软雅黑"/>
                         </a:rPr>
-                        <a:t>69.5</a:t>
+                        <a:t>70.5</a:t>
                       </a:r>
                     </a:p>
                   </a:txBody>
@@ -31637,7 +31661,7 @@
                           <a:latin typeface="Arial"/>
                           <a:ea typeface="微软雅黑"/>
                         </a:rPr>
-                        <a:t>1255.4</a:t>
+                        <a:t>1313.8</a:t>
                       </a:r>
                     </a:p>
                   </a:txBody>
@@ -31657,7 +31681,7 @@
                           <a:latin typeface="Arial"/>
                           <a:ea typeface="微软雅黑"/>
                         </a:rPr>
-                        <a:t>54.4</a:t>
+                        <a:t>56.5</a:t>
                       </a:r>
                     </a:p>
                   </a:txBody>
@@ -31703,7 +31727,7 @@
                           <a:latin typeface="Arial"/>
                           <a:ea typeface="微软雅黑"/>
                         </a:rPr>
-                        <a:t>748.1</a:t>
+                        <a:t>684.9</a:t>
                       </a:r>
                     </a:p>
                   </a:txBody>
@@ -31727,7 +31751,7 @@
                           <a:latin typeface="Arial"/>
                           <a:ea typeface="微软雅黑"/>
                         </a:rPr>
-                        <a:t>39.9</a:t>
+                        <a:t>37.6</a:t>
                       </a:r>
                     </a:p>
                   </a:txBody>
@@ -31906,7 +31930,7 @@
                 <a:latin typeface="Arial"/>
                 <a:ea typeface="微软雅黑"/>
               </a:rPr>
-              <a:t>数据来源：工信部《道路机动车辆生产企业及产品公告》第341~410批（2021–2026）· 权威底表 v4.3.6 · 共4,613款纯新能源乘用车（全部指标为均值口径）</a:t>
+              <a:t>数据来源：工信部《道路机动车辆生产企业及产品公告》第341~410批（2021–2026）· 权威底表 v4.9.23 · 共5392款纯新能源乘用车（全部指标为均值口径）</a:t>
             </a:r>
           </a:p>
         </p:txBody>
@@ -32063,7 +32087,7 @@
                           <a:latin typeface="Arial"/>
                           <a:ea typeface="微软雅黑"/>
                         </a:rPr>
-                        <a:t>CR3%</a:t>
+                        <a:t>电机CR3(%)</a:t>
                       </a:r>
                     </a:p>
                   </a:txBody>
@@ -32087,7 +32111,7 @@
                           <a:latin typeface="Arial"/>
                           <a:ea typeface="微软雅黑"/>
                         </a:rPr>
-                        <a:t>CR5%</a:t>
+                        <a:t>电机CR5(%)</a:t>
                       </a:r>
                     </a:p>
                   </a:txBody>
@@ -32111,7 +32135,7 @@
                           <a:latin typeface="Arial"/>
                           <a:ea typeface="微软雅黑"/>
                         </a:rPr>
-                        <a:t>CR10%</a:t>
+                        <a:t>电机CR10(%)</a:t>
                       </a:r>
                     </a:p>
                   </a:txBody>
@@ -32157,7 +32181,7 @@
                           <a:latin typeface="Arial"/>
                           <a:ea typeface="微软雅黑"/>
                         </a:rPr>
-                        <a:t>13.0</a:t>
+                        <a:t>19.7</a:t>
                       </a:r>
                     </a:p>
                   </a:txBody>
@@ -32177,7 +32201,7 @@
                           <a:latin typeface="Arial"/>
                           <a:ea typeface="微软雅黑"/>
                         </a:rPr>
-                        <a:t>19.6</a:t>
+                        <a:t>26.1</a:t>
                       </a:r>
                     </a:p>
                   </a:txBody>
@@ -32197,7 +32221,7 @@
                           <a:latin typeface="Arial"/>
                           <a:ea typeface="微软雅黑"/>
                         </a:rPr>
-                        <a:t>33.6</a:t>
+                        <a:t>38.0</a:t>
                       </a:r>
                     </a:p>
                   </a:txBody>
@@ -32243,7 +32267,7 @@
                           <a:latin typeface="Arial"/>
                           <a:ea typeface="微软雅黑"/>
                         </a:rPr>
-                        <a:t>19.0</a:t>
+                        <a:t>21.4</a:t>
                       </a:r>
                     </a:p>
                   </a:txBody>
@@ -32267,7 +32291,7 @@
                           <a:latin typeface="Arial"/>
                           <a:ea typeface="微软雅黑"/>
                         </a:rPr>
-                        <a:t>26.9</a:t>
+                        <a:t>29.1</a:t>
                       </a:r>
                     </a:p>
                   </a:txBody>
@@ -32291,7 +32315,7 @@
                           <a:latin typeface="Arial"/>
                           <a:ea typeface="微软雅黑"/>
                         </a:rPr>
-                        <a:t>39.3</a:t>
+                        <a:t>41.2</a:t>
                       </a:r>
                     </a:p>
                   </a:txBody>
@@ -32337,7 +32361,7 @@
                           <a:latin typeface="Arial"/>
                           <a:ea typeface="微软雅黑"/>
                         </a:rPr>
-                        <a:t>16.0</a:t>
+                        <a:t>18.9</a:t>
                       </a:r>
                     </a:p>
                   </a:txBody>
@@ -32357,7 +32381,7 @@
                           <a:latin typeface="Arial"/>
                           <a:ea typeface="微软雅黑"/>
                         </a:rPr>
-                        <a:t>21.8</a:t>
+                        <a:t>24.9</a:t>
                       </a:r>
                     </a:p>
                   </a:txBody>
@@ -32377,7 +32401,7 @@
                           <a:latin typeface="Arial"/>
                           <a:ea typeface="微软雅黑"/>
                         </a:rPr>
-                        <a:t>33.1</a:t>
+                        <a:t>35.9</a:t>
                       </a:r>
                     </a:p>
                   </a:txBody>
@@ -32423,7 +32447,7 @@
                           <a:latin typeface="Arial"/>
                           <a:ea typeface="微软雅黑"/>
                         </a:rPr>
-                        <a:t>21.3</a:t>
+                        <a:t>24.4</a:t>
                       </a:r>
                     </a:p>
                   </a:txBody>
@@ -32447,7 +32471,7 @@
                           <a:latin typeface="Arial"/>
                           <a:ea typeface="微软雅黑"/>
                         </a:rPr>
-                        <a:t>28.4</a:t>
+                        <a:t>34.3</a:t>
                       </a:r>
                     </a:p>
                   </a:txBody>
@@ -32471,7 +32495,7 @@
                           <a:latin typeface="Arial"/>
                           <a:ea typeface="微软雅黑"/>
                         </a:rPr>
-                        <a:t>40.9</a:t>
+                        <a:t>47.6</a:t>
                       </a:r>
                     </a:p>
                   </a:txBody>
@@ -32517,7 +32541,7 @@
                           <a:latin typeface="Arial"/>
                           <a:ea typeface="微软雅黑"/>
                         </a:rPr>
-                        <a:t>17.8</a:t>
+                        <a:t>25.3</a:t>
                       </a:r>
                     </a:p>
                   </a:txBody>
@@ -32537,7 +32561,7 @@
                           <a:latin typeface="Arial"/>
                           <a:ea typeface="微软雅黑"/>
                         </a:rPr>
-                        <a:t>27.6</a:t>
+                        <a:t>35.2</a:t>
                       </a:r>
                     </a:p>
                   </a:txBody>
@@ -32557,7 +32581,7 @@
                           <a:latin typeface="Arial"/>
                           <a:ea typeface="微软雅黑"/>
                         </a:rPr>
-                        <a:t>44.6</a:t>
+                        <a:t>52.5</a:t>
                       </a:r>
                     </a:p>
                   </a:txBody>
@@ -32603,7 +32627,7 @@
                           <a:latin typeface="Arial"/>
                           <a:ea typeface="微软雅黑"/>
                         </a:rPr>
-                        <a:t>17.5</a:t>
+                        <a:t>19.3</a:t>
                       </a:r>
                     </a:p>
                   </a:txBody>
@@ -32627,7 +32651,7 @@
                           <a:latin typeface="Arial"/>
                           <a:ea typeface="微软雅黑"/>
                         </a:rPr>
-                        <a:t>26.7</a:t>
+                        <a:t>28.9</a:t>
                       </a:r>
                     </a:p>
                   </a:txBody>
@@ -32651,7 +32675,7 @@
                           <a:latin typeface="Arial"/>
                           <a:ea typeface="微软雅黑"/>
                         </a:rPr>
-                        <a:t>42.3</a:t>
+                        <a:t>44.2</a:t>
                       </a:r>
                     </a:p>
                   </a:txBody>
@@ -32830,7 +32854,7 @@
                 <a:latin typeface="Arial"/>
                 <a:ea typeface="微软雅黑"/>
               </a:rPr>
-              <a:t>数据来源：工信部《道路机动车辆生产企业及产品公告》第341~410批（2021–2026）· 权威底表 v4.3.6 · 共4,613款纯新能源乘用车（全部指标为均值口径）</a:t>
+              <a:t>数据来源：工信部《道路机动车辆生产企业及产品公告》第341~410批（2021–2026）· 权威底表 v4.9.23 · 共5392款纯新能源乘用车（全部指标为均值口径）</a:t>
             </a:r>
           </a:p>
         </p:txBody>
@@ -32919,7 +32943,7 @@
                 <a:latin typeface="Arial"/>
                 <a:ea typeface="微软雅黑"/>
               </a:rPr>
-              <a:t>洞察  总量自582款增长至1117款（2025年）；PHEV份额升至49.2%，插混成为公告结构变量</a:t>
+              <a:t>洞察  总量自1006款增长至1198款（2025年）；PHEV份额升至46.0%，插混成为公告结构变量</a:t>
             </a:r>
           </a:p>
         </p:txBody>
@@ -33142,7 +33166,7 @@
                 <a:latin typeface="Arial"/>
                 <a:ea typeface="微软雅黑"/>
               </a:rPr>
-              <a:t>数据来源：工信部《道路机动车辆生产企业及产品公告》第341~410批（2021–2026）· 权威底表 v4.3.6 · 共4,613款纯新能源乘用车（全部指标为均值口径）</a:t>
+              <a:t>数据来源：工信部《道路机动车辆生产企业及产品公告》第341~410批（2021–2026）· 权威底表 v4.9.23 · 共5392款纯新能源乘用车（全部指标为均值口径）</a:t>
             </a:r>
           </a:p>
         </p:txBody>
@@ -33347,7 +33371,7 @@
                 <a:latin typeface="Arial"/>
                 <a:ea typeface="微软雅黑"/>
               </a:rPr>
-              <a:t>数据来源：工信部《道路机动车辆生产企业及产品公告》第341~410批（2021–2026）· 权威底表 v4.3.6 · 共4,613款纯新能源乘用车（全部指标为均值口径）</a:t>
+              <a:t>数据来源：工信部《道路机动车辆生产企业及产品公告》第341~410批（2021–2026）· 权威底表 v4.9.23 · 共5392款纯新能源乘用车（全部指标为均值口径）</a:t>
             </a:r>
           </a:p>
         </p:txBody>
@@ -33623,7 +33647,7 @@
                 <a:latin typeface="Arial"/>
                 <a:ea typeface="微软雅黑"/>
               </a:rPr>
-              <a:t>数据来源：工信部《道路机动车辆生产企业及产品公告》第341~410批（2021–2026）· 权威底表 v4.3.6 · 共4,613款纯新能源乘用车（全部指标为均值口径）</a:t>
+              <a:t>数据来源：工信部《道路机动车辆生产企业及产品公告》第341~410批（2021–2026）· 权威底表 v4.9.23 · 共5392款纯新能源乘用车（全部指标为均值口径）</a:t>
             </a:r>
           </a:p>
         </p:txBody>
@@ -33899,7 +33923,7 @@
                 <a:latin typeface="Arial"/>
                 <a:ea typeface="微软雅黑"/>
               </a:rPr>
-              <a:t>数据来源：工信部《道路机动车辆生产企业及产品公告》第341~410批（2021–2026）· 权威底表 v4.3.6 · 共4,613款纯新能源乘用车（全部指标为均值口径）</a:t>
+              <a:t>数据来源：工信部《道路机动车辆生产企业及产品公告》第341~410批（2021–2026）· 权威底表 v4.9.23 · 共5392款纯新能源乘用车（全部指标为均值口径）</a:t>
             </a:r>
           </a:p>
         </p:txBody>
@@ -33988,7 +34012,7 @@
                 <a:latin typeface="Arial"/>
                 <a:ea typeface="微软雅黑"/>
               </a:rPr>
-              <a:t>洞察  插混各细分市场纯电续航全面迈入100km+时代</a:t>
+              <a:t>洞察  插混各细分市场纯电续航全面迈入53km+时代</a:t>
             </a:r>
           </a:p>
         </p:txBody>
@@ -34175,7 +34199,7 @@
                 <a:latin typeface="Arial"/>
                 <a:ea typeface="微软雅黑"/>
               </a:rPr>
-              <a:t>数据来源：工信部《道路机动车辆生产企业及产品公告》第341~410批（2021–2026）· 权威底表 v4.3.6 · 共4,613款纯新能源乘用车（全部指标为均值口径）</a:t>
+              <a:t>数据来源：工信部《道路机动车辆生产企业及产品公告》第341~410批（2021–2026）· 权威底表 v4.9.23 · 共5392款纯新能源乘用车（全部指标为均值口径）</a:t>
             </a:r>
           </a:p>
         </p:txBody>
@@ -34476,7 +34500,7 @@
                           <a:latin typeface="Arial"/>
                           <a:ea typeface="微软雅黑"/>
                         </a:rPr>
-                        <a:t>525</a:t>
+                        <a:t>120</a:t>
                       </a:r>
                     </a:p>
                   </a:txBody>
@@ -34496,7 +34520,7 @@
                           <a:latin typeface="Arial"/>
                           <a:ea typeface="微软雅黑"/>
                         </a:rPr>
-                        <a:t>524.67</a:t>
+                        <a:t>540.1</a:t>
                       </a:r>
                     </a:p>
                   </a:txBody>
@@ -34516,7 +34540,7 @@
                           <a:latin typeface="Arial"/>
                           <a:ea typeface="微软雅黑"/>
                         </a:rPr>
-                        <a:t>66.21</a:t>
+                        <a:t>65.3</a:t>
                       </a:r>
                     </a:p>
                   </a:txBody>
@@ -34536,7 +34560,7 @@
                           <a:latin typeface="Arial"/>
                           <a:ea typeface="微软雅黑"/>
                         </a:rPr>
-                        <a:t>161.9</a:t>
+                        <a:t>187.9</a:t>
                       </a:r>
                     </a:p>
                   </a:txBody>
@@ -34556,7 +34580,7 @@
                           <a:latin typeface="Arial"/>
                           <a:ea typeface="微软雅黑"/>
                         </a:rPr>
-                        <a:t>1868.58</a:t>
+                        <a:t>1849.4</a:t>
                       </a:r>
                     </a:p>
                   </a:txBody>
@@ -34578,7 +34602,7 @@
                           <a:latin typeface="Arial"/>
                           <a:ea typeface="微软雅黑"/>
                         </a:rPr>
-                        <a:t>Car-D</a:t>
+                        <a:t>SUV-D</a:t>
                       </a:r>
                     </a:p>
                   </a:txBody>
@@ -34602,7 +34626,7 @@
                           <a:latin typeface="Arial"/>
                           <a:ea typeface="微软雅黑"/>
                         </a:rPr>
-                        <a:t>420</a:t>
+                        <a:t>92</a:t>
                       </a:r>
                     </a:p>
                   </a:txBody>
@@ -34626,7 +34650,7 @@
                           <a:latin typeface="Arial"/>
                           <a:ea typeface="微软雅黑"/>
                         </a:rPr>
-                        <a:t>652.76</a:t>
+                        <a:t>618.0</a:t>
                       </a:r>
                     </a:p>
                   </a:txBody>
@@ -34650,7 +34674,7 @@
                           <a:latin typeface="Arial"/>
                           <a:ea typeface="微软雅黑"/>
                         </a:rPr>
-                        <a:t>80.32</a:t>
+                        <a:t>84.2</a:t>
                       </a:r>
                     </a:p>
                   </a:txBody>
@@ -34674,7 +34698,7 @@
                           <a:latin typeface="Arial"/>
                           <a:ea typeface="微软雅黑"/>
                         </a:rPr>
-                        <a:t>256.67</a:t>
+                        <a:t>252.2</a:t>
                       </a:r>
                     </a:p>
                   </a:txBody>
@@ -34698,7 +34722,7 @@
                           <a:latin typeface="Arial"/>
                           <a:ea typeface="微软雅黑"/>
                         </a:rPr>
-                        <a:t>2084.49</a:t>
+                        <a:t>2252.8</a:t>
                       </a:r>
                     </a:p>
                   </a:txBody>
@@ -34724,7 +34748,7 @@
                           <a:latin typeface="Arial"/>
                           <a:ea typeface="微软雅黑"/>
                         </a:rPr>
-                        <a:t>SUV-D</a:t>
+                        <a:t>Car-C</a:t>
                       </a:r>
                     </a:p>
                   </a:txBody>
@@ -34744,7 +34768,7 @@
                           <a:latin typeface="Arial"/>
                           <a:ea typeface="微软雅黑"/>
                         </a:rPr>
-                        <a:t>403</a:t>
+                        <a:t>81</a:t>
                       </a:r>
                     </a:p>
                   </a:txBody>
@@ -34764,7 +34788,7 @@
                           <a:latin typeface="Arial"/>
                           <a:ea typeface="微软雅黑"/>
                         </a:rPr>
-                        <a:t>601.96</a:t>
+                        <a:t>515.2</a:t>
                       </a:r>
                     </a:p>
                   </a:txBody>
@@ -34784,7 +34808,7 @@
                           <a:latin typeface="Arial"/>
                           <a:ea typeface="微软雅黑"/>
                         </a:rPr>
-                        <a:t>84.09</a:t>
+                        <a:t>54.8</a:t>
                       </a:r>
                     </a:p>
                   </a:txBody>
@@ -34804,7 +34828,7 @@
                           <a:latin typeface="Arial"/>
                           <a:ea typeface="微软雅黑"/>
                         </a:rPr>
-                        <a:t>225.92</a:t>
+                        <a:t>172.8</a:t>
                       </a:r>
                     </a:p>
                   </a:txBody>
@@ -34824,7 +34848,7 @@
                           <a:latin typeface="Arial"/>
                           <a:ea typeface="微软雅黑"/>
                         </a:rPr>
-                        <a:t>2250.69</a:t>
+                        <a:t>1651.0</a:t>
                       </a:r>
                     </a:p>
                   </a:txBody>
@@ -34846,7 +34870,7 @@
                           <a:latin typeface="Arial"/>
                           <a:ea typeface="微软雅黑"/>
                         </a:rPr>
-                        <a:t>Car-C</a:t>
+                        <a:t>Car-D</a:t>
                       </a:r>
                     </a:p>
                   </a:txBody>
@@ -34870,7 +34894,7 @@
                           <a:latin typeface="Arial"/>
                           <a:ea typeface="微软雅黑"/>
                         </a:rPr>
-                        <a:t>383</a:t>
+                        <a:t>71</a:t>
                       </a:r>
                     </a:p>
                   </a:txBody>
@@ -34894,7 +34918,7 @@
                           <a:latin typeface="Arial"/>
                           <a:ea typeface="微软雅黑"/>
                         </a:rPr>
-                        <a:t>494.63</a:t>
+                        <a:t>648.3</a:t>
                       </a:r>
                     </a:p>
                   </a:txBody>
@@ -34918,7 +34942,7 @@
                           <a:latin typeface="Arial"/>
                           <a:ea typeface="微软雅黑"/>
                         </a:rPr>
-                        <a:t>56.61</a:t>
+                        <a:t>77.7</a:t>
                       </a:r>
                     </a:p>
                   </a:txBody>
@@ -34942,7 +34966,7 @@
                           <a:latin typeface="Arial"/>
                           <a:ea typeface="微软雅黑"/>
                         </a:rPr>
-                        <a:t>137.88</a:t>
+                        <a:t>292.5</a:t>
                       </a:r>
                     </a:p>
                   </a:txBody>
@@ -34966,7 +34990,7 @@
                           <a:latin typeface="Arial"/>
                           <a:ea typeface="微软雅黑"/>
                         </a:rPr>
-                        <a:t>1671.65</a:t>
+                        <a:t>2051.2</a:t>
                       </a:r>
                     </a:p>
                   </a:txBody>
@@ -34992,7 +35016,7 @@
                           <a:latin typeface="Arial"/>
                           <a:ea typeface="微软雅黑"/>
                         </a:rPr>
-                        <a:t>Car-A</a:t>
+                        <a:t>SUV</a:t>
                       </a:r>
                     </a:p>
                   </a:txBody>
@@ -35012,7 +35036,7 @@
                           <a:latin typeface="Arial"/>
                           <a:ea typeface="微软雅黑"/>
                         </a:rPr>
-                        <a:t>345</a:t>
+                        <a:t>45</a:t>
                       </a:r>
                     </a:p>
                   </a:txBody>
@@ -35032,7 +35056,7 @@
                           <a:latin typeface="Arial"/>
                           <a:ea typeface="微软雅黑"/>
                         </a:rPr>
-                        <a:t>248.31</a:t>
+                        <a:t>490.8</a:t>
                       </a:r>
                     </a:p>
                   </a:txBody>
@@ -35052,7 +35076,7 @@
                           <a:latin typeface="Arial"/>
                           <a:ea typeface="微软雅黑"/>
                         </a:rPr>
-                        <a:t>23.99</a:t>
+                        <a:t>68.1</a:t>
                       </a:r>
                     </a:p>
                   </a:txBody>
@@ -35072,7 +35096,7 @@
                           <a:latin typeface="Arial"/>
                           <a:ea typeface="微软雅黑"/>
                         </a:rPr>
-                        <a:t>42.3</a:t>
+                        <a:t>155.9</a:t>
                       </a:r>
                     </a:p>
                   </a:txBody>
@@ -35092,7 +35116,7 @@
                           <a:latin typeface="Arial"/>
                           <a:ea typeface="微软雅黑"/>
                         </a:rPr>
-                        <a:t>927.38</a:t>
+                        <a:t>1968.8</a:t>
                       </a:r>
                     </a:p>
                   </a:txBody>
@@ -35138,7 +35162,7 @@
                           <a:latin typeface="Arial"/>
                           <a:ea typeface="微软雅黑"/>
                         </a:rPr>
-                        <a:t>164</a:t>
+                        <a:t>27</a:t>
                       </a:r>
                     </a:p>
                   </a:txBody>
@@ -35162,7 +35186,7 @@
                           <a:latin typeface="Arial"/>
                           <a:ea typeface="微软雅黑"/>
                         </a:rPr>
-                        <a:t>378.88</a:t>
+                        <a:t>368.3</a:t>
                       </a:r>
                     </a:p>
                   </a:txBody>
@@ -35186,7 +35210,7 @@
                           <a:latin typeface="Arial"/>
                           <a:ea typeface="微软雅黑"/>
                         </a:rPr>
-                        <a:t>40.92</a:t>
+                        <a:t>36.4</a:t>
                       </a:r>
                     </a:p>
                   </a:txBody>
@@ -35210,7 +35234,7 @@
                           <a:latin typeface="Arial"/>
                           <a:ea typeface="微软雅黑"/>
                         </a:rPr>
-                        <a:t>87.36</a:t>
+                        <a:t>104.3</a:t>
                       </a:r>
                     </a:p>
                   </a:txBody>
@@ -35234,7 +35258,7 @@
                           <a:latin typeface="Arial"/>
                           <a:ea typeface="微软雅黑"/>
                         </a:rPr>
-                        <a:t>1333.18</a:t>
+                        <a:t>1268.8</a:t>
                       </a:r>
                     </a:p>
                   </a:txBody>
@@ -35260,7 +35284,7 @@
                           <a:latin typeface="Arial"/>
                           <a:ea typeface="微软雅黑"/>
                         </a:rPr>
-                        <a:t>SUV-B</a:t>
+                        <a:t>Car-A</a:t>
                       </a:r>
                     </a:p>
                   </a:txBody>
@@ -35280,7 +35304,7 @@
                           <a:latin typeface="Arial"/>
                           <a:ea typeface="微软雅黑"/>
                         </a:rPr>
-                        <a:t>127</a:t>
+                        <a:t>26</a:t>
                       </a:r>
                     </a:p>
                   </a:txBody>
@@ -35300,7 +35324,7 @@
                           <a:latin typeface="Arial"/>
                           <a:ea typeface="微软雅黑"/>
                         </a:rPr>
-                        <a:t>438.7</a:t>
+                        <a:t>252.7</a:t>
                       </a:r>
                     </a:p>
                   </a:txBody>
@@ -35320,7 +35344,7 @@
                           <a:latin typeface="Arial"/>
                           <a:ea typeface="微软雅黑"/>
                         </a:rPr>
-                        <a:t>50.52</a:t>
+                        <a:t>23.0</a:t>
                       </a:r>
                     </a:p>
                   </a:txBody>
@@ -35340,7 +35364,7 @@
                           <a:latin typeface="Arial"/>
                           <a:ea typeface="微软雅黑"/>
                         </a:rPr>
-                        <a:t>109.46</a:t>
+                        <a:t>61.2</a:t>
                       </a:r>
                     </a:p>
                   </a:txBody>
@@ -35360,7 +35384,7 @@
                           <a:latin typeface="Arial"/>
                           <a:ea typeface="微软雅黑"/>
                         </a:rPr>
-                        <a:t>1477.95</a:t>
+                        <a:t>911.8</a:t>
                       </a:r>
                     </a:p>
                   </a:txBody>
@@ -35382,7 +35406,7 @@
                           <a:latin typeface="Arial"/>
                           <a:ea typeface="微软雅黑"/>
                         </a:rPr>
-                        <a:t>SUV</a:t>
+                        <a:t>MPV-D</a:t>
                       </a:r>
                     </a:p>
                   </a:txBody>
@@ -35406,7 +35430,7 @@
                           <a:latin typeface="Arial"/>
                           <a:ea typeface="微软雅黑"/>
                         </a:rPr>
-                        <a:t>95</a:t>
+                        <a:t>26</a:t>
                       </a:r>
                     </a:p>
                   </a:txBody>
@@ -35430,7 +35454,7 @@
                           <a:latin typeface="Arial"/>
                           <a:ea typeface="微软雅黑"/>
                         </a:rPr>
-                        <a:t>556.42</a:t>
+                        <a:t>513.5</a:t>
                       </a:r>
                     </a:p>
                   </a:txBody>
@@ -35454,7 +35478,7 @@
                           <a:latin typeface="Arial"/>
                           <a:ea typeface="微软雅黑"/>
                         </a:rPr>
-                        <a:t>75.54</a:t>
+                        <a:t>81.7</a:t>
                       </a:r>
                     </a:p>
                   </a:txBody>
@@ -35478,7 +35502,7 @@
                           <a:latin typeface="Arial"/>
                           <a:ea typeface="微软雅黑"/>
                         </a:rPr>
-                        <a:t>126.74</a:t>
+                        <a:t>222.4</a:t>
                       </a:r>
                     </a:p>
                   </a:txBody>
@@ -35502,7 +35526,7 @@
                           <a:latin typeface="Arial"/>
                           <a:ea typeface="微软雅黑"/>
                         </a:rPr>
-                        <a:t>2124.0</a:t>
+                        <a:t>2421.4</a:t>
                       </a:r>
                     </a:p>
                   </a:txBody>
@@ -35528,7 +35552,7 @@
                           <a:latin typeface="Arial"/>
                           <a:ea typeface="微软雅黑"/>
                         </a:rPr>
-                        <a:t>MPV-D</a:t>
+                        <a:t>Car</a:t>
                       </a:r>
                     </a:p>
                   </a:txBody>
@@ -35548,7 +35572,7 @@
                           <a:latin typeface="Arial"/>
                           <a:ea typeface="微软雅黑"/>
                         </a:rPr>
-                        <a:t>83</a:t>
+                        <a:t>20</a:t>
                       </a:r>
                     </a:p>
                   </a:txBody>
@@ -35568,7 +35592,7 @@
                           <a:latin typeface="Arial"/>
                           <a:ea typeface="微软雅黑"/>
                         </a:rPr>
-                        <a:t>574.08</a:t>
+                        <a:t>601.6</a:t>
                       </a:r>
                     </a:p>
                   </a:txBody>
@@ -35588,7 +35612,7 @@
                           <a:latin typeface="Arial"/>
                           <a:ea typeface="微软雅黑"/>
                         </a:rPr>
-                        <a:t>94.23</a:t>
+                        <a:t>71.0</a:t>
                       </a:r>
                     </a:p>
                   </a:txBody>
@@ -35608,7 +35632,7 @@
                           <a:latin typeface="Arial"/>
                           <a:ea typeface="微软雅黑"/>
                         </a:rPr>
-                        <a:t>216.46</a:t>
+                        <a:t>228.8</a:t>
                       </a:r>
                     </a:p>
                   </a:txBody>
@@ -35628,7 +35652,7 @@
                           <a:latin typeface="Arial"/>
                           <a:ea typeface="微软雅黑"/>
                         </a:rPr>
-                        <a:t>2594.36</a:t>
+                        <a:t>1918.6</a:t>
                       </a:r>
                     </a:p>
                   </a:txBody>
@@ -35650,7 +35674,7 @@
                           <a:latin typeface="Arial"/>
                           <a:ea typeface="微软雅黑"/>
                         </a:rPr>
-                        <a:t>Lux SUV-3</a:t>
+                        <a:t>SUV-B</a:t>
                       </a:r>
                     </a:p>
                   </a:txBody>
@@ -35674,7 +35698,7 @@
                           <a:latin typeface="Arial"/>
                           <a:ea typeface="微软雅黑"/>
                         </a:rPr>
-                        <a:t>67</a:t>
+                        <a:t>9</a:t>
                       </a:r>
                     </a:p>
                   </a:txBody>
@@ -35698,7 +35722,7 @@
                           <a:latin typeface="Arial"/>
                           <a:ea typeface="微软雅黑"/>
                         </a:rPr>
-                        <a:t>603.68</a:t>
+                        <a:t>416.9</a:t>
                       </a:r>
                     </a:p>
                   </a:txBody>
@@ -35722,7 +35746,7 @@
                           <a:latin typeface="Arial"/>
                           <a:ea typeface="微软雅黑"/>
                         </a:rPr>
-                        <a:t>86.28</a:t>
+                        <a:t>44.1</a:t>
                       </a:r>
                     </a:p>
                   </a:txBody>
@@ -35746,7 +35770,7 @@
                           <a:latin typeface="Arial"/>
                           <a:ea typeface="微软雅黑"/>
                         </a:rPr>
-                        <a:t>261.67</a:t>
+                        <a:t>181.0</a:t>
                       </a:r>
                     </a:p>
                   </a:txBody>
@@ -35770,7 +35794,7 @@
                           <a:latin typeface="Arial"/>
                           <a:ea typeface="微软雅黑"/>
                         </a:rPr>
-                        <a:t>2310.2</a:t>
+                        <a:t>1432.8</a:t>
                       </a:r>
                     </a:p>
                   </a:txBody>
@@ -35949,7 +35973,7 @@
                 <a:latin typeface="Arial"/>
                 <a:ea typeface="微软雅黑"/>
               </a:rPr>
-              <a:t>数据来源：工信部《道路机动车辆生产企业及产品公告》第341~410批（2021–2026）· 权威底表 v4.3.6 · 共4,613款纯新能源乘用车（全部指标为均值口径）</a:t>
+              <a:t>数据来源：工信部《道路机动车辆生产企业及产品公告》第341~410批（2021–2026）· 权威底表 v4.9.23 · 共5392款纯新能源乘用车（全部指标为均值口径）</a:t>
             </a:r>
           </a:p>
         </p:txBody>
@@ -36261,7 +36285,7 @@
                 <a:latin typeface="Arial"/>
                 <a:ea typeface="微软雅黑"/>
               </a:rPr>
-              <a:t>数据来源：工信部《道路机动车辆生产企业及产品公告》第341~410批（2021–2026）· 权威底表 v4.3.6 · 共4,613款纯新能源乘用车（全部指标为均值口径）</a:t>
+              <a:t>数据来源：工信部《道路机动车辆生产企业及产品公告》第341~410批（2021–2026）· 权威底表 v4.9.23 · 共5392款纯新能源乘用车（全部指标为均值口径）</a:t>
             </a:r>
           </a:p>
         </p:txBody>
@@ -36466,7 +36490,7 @@
                 <a:latin typeface="Arial"/>
                 <a:ea typeface="微软雅黑"/>
               </a:rPr>
-              <a:t>数据来源：工信部《道路机动车辆生产企业及产品公告》第341~410批（2021–2026）· 权威底表 v4.3.6 · 共4,613款纯新能源乘用车（全部指标为均值口径）</a:t>
+              <a:t>数据来源：工信部《道路机动车辆生产企业及产品公告》第341~410批（2021–2026）· 权威底表 v4.9.23 · 共5392款纯新能源乘用车（全部指标为均值口径）</a:t>
             </a:r>
           </a:p>
         </p:txBody>
@@ -36594,6 +36618,9 @@
                     <a:lstStyle/>
                     <a:p>
                       <a:pPr algn="ctr"/>
+                      <a:r>
+                        <a:t/>
+                      </a:r>
                     </a:p>
                   </a:txBody>
                   <a:tcPr>
@@ -36712,7 +36739,7 @@
                           <a:latin typeface="Arial"/>
                           <a:ea typeface="微软雅黑"/>
                         </a:rPr>
-                        <a:t>能量密度</a:t>
+                        <a:t>密度</a:t>
                       </a:r>
                     </a:p>
                   </a:txBody>
@@ -36822,7 +36849,7 @@
                           <a:latin typeface="Arial"/>
                           <a:ea typeface="微软雅黑"/>
                         </a:rPr>
-                        <a:t>0.62</a:t>
+                        <a:t>0.6</a:t>
                       </a:r>
                     </a:p>
                   </a:txBody>
@@ -36842,7 +36869,7 @@
                           <a:latin typeface="Arial"/>
                           <a:ea typeface="微软雅黑"/>
                         </a:rPr>
-                        <a:t>0.77</a:t>
+                        <a:t>0.8</a:t>
                       </a:r>
                     </a:p>
                   </a:txBody>
@@ -36862,7 +36889,7 @@
                           <a:latin typeface="Arial"/>
                           <a:ea typeface="微软雅黑"/>
                         </a:rPr>
-                        <a:t>0.63</a:t>
+                        <a:t>0.6</a:t>
                       </a:r>
                     </a:p>
                   </a:txBody>
@@ -36882,7 +36909,7 @@
                           <a:latin typeface="Arial"/>
                           <a:ea typeface="微软雅黑"/>
                         </a:rPr>
-                        <a:t>0.24</a:t>
+                        <a:t>0.3</a:t>
                       </a:r>
                     </a:p>
                   </a:txBody>
@@ -36976,7 +37003,7 @@
                           <a:latin typeface="Arial"/>
                           <a:ea typeface="微软雅黑"/>
                         </a:rPr>
-                        <a:t>0.65</a:t>
+                        <a:t>0.5</a:t>
                       </a:r>
                     </a:p>
                   </a:txBody>
@@ -37000,7 +37027,7 @@
                           <a:latin typeface="Arial"/>
                           <a:ea typeface="微软雅黑"/>
                         </a:rPr>
-                        <a:t>0.93</a:t>
+                        <a:t>0.9</a:t>
                       </a:r>
                     </a:p>
                   </a:txBody>
@@ -37024,7 +37051,7 @@
                           <a:latin typeface="Arial"/>
                           <a:ea typeface="微软雅黑"/>
                         </a:rPr>
-                        <a:t>0.69</a:t>
+                        <a:t>0.7</a:t>
                       </a:r>
                     </a:p>
                   </a:txBody>
@@ -37048,7 +37075,7 @@
                           <a:latin typeface="Arial"/>
                           <a:ea typeface="微软雅黑"/>
                         </a:rPr>
-                        <a:t>0.6</a:t>
+                        <a:t>0.7</a:t>
                       </a:r>
                     </a:p>
                   </a:txBody>
@@ -37094,7 +37121,7 @@
                           <a:latin typeface="Arial"/>
                           <a:ea typeface="微软雅黑"/>
                         </a:rPr>
-                        <a:t>0.62</a:t>
+                        <a:t>0.6</a:t>
                       </a:r>
                     </a:p>
                   </a:txBody>
@@ -37114,7 +37141,7 @@
                           <a:latin typeface="Arial"/>
                           <a:ea typeface="微软雅黑"/>
                         </a:rPr>
-                        <a:t>0.65</a:t>
+                        <a:t>0.5</a:t>
                       </a:r>
                     </a:p>
                   </a:txBody>
@@ -37154,7 +37181,7 @@
                           <a:latin typeface="Arial"/>
                           <a:ea typeface="微软雅黑"/>
                         </a:rPr>
-                        <a:t>0.64</a:t>
+                        <a:t>0.5</a:t>
                       </a:r>
                     </a:p>
                   </a:txBody>
@@ -37174,7 +37201,7 @@
                           <a:latin typeface="Arial"/>
                           <a:ea typeface="微软雅黑"/>
                         </a:rPr>
-                        <a:t>0.45</a:t>
+                        <a:t>0.3</a:t>
                       </a:r>
                     </a:p>
                   </a:txBody>
@@ -37194,7 +37221,7 @@
                           <a:latin typeface="Arial"/>
                           <a:ea typeface="微软雅黑"/>
                         </a:rPr>
-                        <a:t>0.34</a:t>
+                        <a:t>0.3</a:t>
                       </a:r>
                     </a:p>
                   </a:txBody>
@@ -37240,7 +37267,7 @@
                           <a:latin typeface="Arial"/>
                           <a:ea typeface="微软雅黑"/>
                         </a:rPr>
-                        <a:t>0.77</a:t>
+                        <a:t>0.8</a:t>
                       </a:r>
                     </a:p>
                   </a:txBody>
@@ -37264,7 +37291,7 @@
                           <a:latin typeface="Arial"/>
                           <a:ea typeface="微软雅黑"/>
                         </a:rPr>
-                        <a:t>0.93</a:t>
+                        <a:t>0.9</a:t>
                       </a:r>
                     </a:p>
                   </a:txBody>
@@ -37288,7 +37315,7 @@
                           <a:latin typeface="Arial"/>
                           <a:ea typeface="微软雅黑"/>
                         </a:rPr>
-                        <a:t>0.64</a:t>
+                        <a:t>0.5</a:t>
                       </a:r>
                     </a:p>
                   </a:txBody>
@@ -37336,7 +37363,7 @@
                           <a:latin typeface="Arial"/>
                           <a:ea typeface="微软雅黑"/>
                         </a:rPr>
-                        <a:t>0.58</a:t>
+                        <a:t>0.6</a:t>
                       </a:r>
                     </a:p>
                   </a:txBody>
@@ -37360,7 +37387,7 @@
                           <a:latin typeface="Arial"/>
                           <a:ea typeface="微软雅黑"/>
                         </a:rPr>
-                        <a:t>0.71</a:t>
+                        <a:t>0.8</a:t>
                       </a:r>
                     </a:p>
                   </a:txBody>
@@ -37386,7 +37413,7 @@
                           <a:latin typeface="Arial"/>
                           <a:ea typeface="微软雅黑"/>
                         </a:rPr>
-                        <a:t>能量密度</a:t>
+                        <a:t>密度</a:t>
                       </a:r>
                     </a:p>
                   </a:txBody>
@@ -37406,7 +37433,7 @@
                           <a:latin typeface="Arial"/>
                           <a:ea typeface="微软雅黑"/>
                         </a:rPr>
-                        <a:t>0.63</a:t>
+                        <a:t>0.6</a:t>
                       </a:r>
                     </a:p>
                   </a:txBody>
@@ -37426,7 +37453,7 @@
                           <a:latin typeface="Arial"/>
                           <a:ea typeface="微软雅黑"/>
                         </a:rPr>
-                        <a:t>0.69</a:t>
+                        <a:t>0.7</a:t>
                       </a:r>
                     </a:p>
                   </a:txBody>
@@ -37446,7 +37473,7 @@
                           <a:latin typeface="Arial"/>
                           <a:ea typeface="微软雅黑"/>
                         </a:rPr>
-                        <a:t>0.45</a:t>
+                        <a:t>0.3</a:t>
                       </a:r>
                     </a:p>
                   </a:txBody>
@@ -37466,7 +37493,7 @@
                           <a:latin typeface="Arial"/>
                           <a:ea typeface="微软雅黑"/>
                         </a:rPr>
-                        <a:t>0.58</a:t>
+                        <a:t>0.6</a:t>
                       </a:r>
                     </a:p>
                   </a:txBody>
@@ -37506,7 +37533,7 @@
                           <a:latin typeface="Arial"/>
                           <a:ea typeface="微软雅黑"/>
                         </a:rPr>
-                        <a:t>0.42</a:t>
+                        <a:t>0.5</a:t>
                       </a:r>
                     </a:p>
                   </a:txBody>
@@ -37552,7 +37579,7 @@
                           <a:latin typeface="Arial"/>
                           <a:ea typeface="微软雅黑"/>
                         </a:rPr>
-                        <a:t>0.24</a:t>
+                        <a:t>0.3</a:t>
                       </a:r>
                     </a:p>
                   </a:txBody>
@@ -37576,7 +37603,7 @@
                           <a:latin typeface="Arial"/>
                           <a:ea typeface="微软雅黑"/>
                         </a:rPr>
-                        <a:t>0.6</a:t>
+                        <a:t>0.7</a:t>
                       </a:r>
                     </a:p>
                   </a:txBody>
@@ -37600,7 +37627,7 @@
                           <a:latin typeface="Arial"/>
                           <a:ea typeface="微软雅黑"/>
                         </a:rPr>
-                        <a:t>0.34</a:t>
+                        <a:t>0.3</a:t>
                       </a:r>
                     </a:p>
                   </a:txBody>
@@ -37624,7 +37651,7 @@
                           <a:latin typeface="Arial"/>
                           <a:ea typeface="微软雅黑"/>
                         </a:rPr>
-                        <a:t>0.71</a:t>
+                        <a:t>0.8</a:t>
                       </a:r>
                     </a:p>
                   </a:txBody>
@@ -37648,7 +37675,7 @@
                           <a:latin typeface="Arial"/>
                           <a:ea typeface="微软雅黑"/>
                         </a:rPr>
-                        <a:t>0.42</a:t>
+                        <a:t>0.5</a:t>
                       </a:r>
                     </a:p>
                   </a:txBody>
@@ -37851,7 +37878,7 @@
                 <a:latin typeface="Arial"/>
                 <a:ea typeface="微软雅黑"/>
               </a:rPr>
-              <a:t>数据来源：工信部《道路机动车辆生产企业及产品公告》第341~410批（2021–2026）· 权威底表 v4.3.6 · 共4,613款纯新能源乘用车（全部指标为均值口径）</a:t>
+              <a:t>数据来源：工信部《道路机动车辆生产企业及产品公告》第341~410批（2021–2026）· 权威底表 v4.9.23 · 共5392款纯新能源乘用车（全部指标为均值口径）</a:t>
             </a:r>
           </a:p>
         </p:txBody>
@@ -37980,6 +38007,9 @@
                     <a:lstStyle/>
                     <a:p>
                       <a:pPr algn="ctr"/>
+                      <a:r>
+                        <a:t/>
+                      </a:r>
                     </a:p>
                   </a:txBody>
                   <a:tcPr>
@@ -38098,7 +38128,7 @@
                           <a:latin typeface="Arial"/>
                           <a:ea typeface="微软雅黑"/>
                         </a:rPr>
-                        <a:t>能量密度</a:t>
+                        <a:t>密度</a:t>
                       </a:r>
                     </a:p>
                   </a:txBody>
@@ -38122,7 +38152,7 @@
                           <a:latin typeface="Arial"/>
                           <a:ea typeface="微软雅黑"/>
                         </a:rPr>
-                        <a:t>综合油耗</a:t>
+                        <a:t>电耗</a:t>
                       </a:r>
                     </a:p>
                   </a:txBody>
@@ -38146,7 +38176,7 @@
                           <a:latin typeface="Arial"/>
                           <a:ea typeface="微软雅黑"/>
                         </a:rPr>
-                        <a:t>排量</a:t>
+                        <a:t>油耗</a:t>
                       </a:r>
                     </a:p>
                   </a:txBody>
@@ -38212,7 +38242,7 @@
                           <a:latin typeface="Arial"/>
                           <a:ea typeface="微软雅黑"/>
                         </a:rPr>
-                        <a:t>0.92</a:t>
+                        <a:t>0.9</a:t>
                       </a:r>
                     </a:p>
                   </a:txBody>
@@ -38252,7 +38282,7 @@
                           <a:latin typeface="Arial"/>
                           <a:ea typeface="微软雅黑"/>
                         </a:rPr>
-                        <a:t>0.59</a:t>
+                        <a:t>0.5</a:t>
                       </a:r>
                     </a:p>
                   </a:txBody>
@@ -38272,7 +38302,7 @@
                           <a:latin typeface="Arial"/>
                           <a:ea typeface="微软雅黑"/>
                         </a:rPr>
-                        <a:t>0.63</a:t>
+                        <a:t>0.5</a:t>
                       </a:r>
                     </a:p>
                   </a:txBody>
@@ -38292,7 +38322,7 @@
                           <a:latin typeface="Arial"/>
                           <a:ea typeface="微软雅黑"/>
                         </a:rPr>
-                        <a:t>0.18</a:t>
+                        <a:t>0.3</a:t>
                       </a:r>
                     </a:p>
                   </a:txBody>
@@ -38312,7 +38342,7 @@
                           <a:latin typeface="Arial"/>
                           <a:ea typeface="微软雅黑"/>
                         </a:rPr>
-                        <a:t>0.06</a:t>
+                        <a:t>0.0</a:t>
                       </a:r>
                     </a:p>
                   </a:txBody>
@@ -38358,7 +38388,7 @@
                           <a:latin typeface="Arial"/>
                           <a:ea typeface="微软雅黑"/>
                         </a:rPr>
-                        <a:t>0.92</a:t>
+                        <a:t>0.9</a:t>
                       </a:r>
                     </a:p>
                   </a:txBody>
@@ -38406,7 +38436,7 @@
                           <a:latin typeface="Arial"/>
                           <a:ea typeface="微软雅黑"/>
                         </a:rPr>
-                        <a:t>0.49</a:t>
+                        <a:t>0.4</a:t>
                       </a:r>
                     </a:p>
                   </a:txBody>
@@ -38430,7 +38460,7 @@
                           <a:latin typeface="Arial"/>
                           <a:ea typeface="微软雅黑"/>
                         </a:rPr>
-                        <a:t>0.8</a:t>
+                        <a:t>0.7</a:t>
                       </a:r>
                     </a:p>
                   </a:txBody>
@@ -38454,7 +38484,7 @@
                           <a:latin typeface="Arial"/>
                           <a:ea typeface="微软雅黑"/>
                         </a:rPr>
-                        <a:t>0.68</a:t>
+                        <a:t>0.6</a:t>
                       </a:r>
                     </a:p>
                   </a:txBody>
@@ -38478,7 +38508,7 @@
                           <a:latin typeface="Arial"/>
                           <a:ea typeface="微软雅黑"/>
                         </a:rPr>
-                        <a:t>0.31</a:t>
+                        <a:t>0.6</a:t>
                       </a:r>
                     </a:p>
                   </a:txBody>
@@ -38502,7 +38532,7 @@
                           <a:latin typeface="Arial"/>
                           <a:ea typeface="微软雅黑"/>
                         </a:rPr>
-                        <a:t>0.16</a:t>
+                        <a:t>0.1</a:t>
                       </a:r>
                     </a:p>
                   </a:txBody>
@@ -38568,7 +38598,7 @@
                           <a:latin typeface="Arial"/>
                           <a:ea typeface="微软雅黑"/>
                         </a:rPr>
-                        <a:t>0.49</a:t>
+                        <a:t>0.4</a:t>
                       </a:r>
                     </a:p>
                   </a:txBody>
@@ -38608,7 +38638,7 @@
                           <a:latin typeface="Arial"/>
                           <a:ea typeface="微软雅黑"/>
                         </a:rPr>
-                        <a:t>0.53</a:t>
+                        <a:t>0.5</a:t>
                       </a:r>
                     </a:p>
                   </a:txBody>
@@ -38628,7 +38658,7 @@
                           <a:latin typeface="Arial"/>
                           <a:ea typeface="微软雅黑"/>
                         </a:rPr>
-                        <a:t>0.25</a:t>
+                        <a:t>0.2</a:t>
                       </a:r>
                     </a:p>
                   </a:txBody>
@@ -38648,7 +38678,7 @@
                           <a:latin typeface="Arial"/>
                           <a:ea typeface="微软雅黑"/>
                         </a:rPr>
-                        <a:t>0.23</a:t>
+                        <a:t>0.4</a:t>
                       </a:r>
                     </a:p>
                   </a:txBody>
@@ -38668,7 +38698,7 @@
                           <a:latin typeface="Arial"/>
                           <a:ea typeface="微软雅黑"/>
                         </a:rPr>
-                        <a:t>0.12</a:t>
+                        <a:t>0.2</a:t>
                       </a:r>
                     </a:p>
                   </a:txBody>
@@ -38714,7 +38744,7 @@
                           <a:latin typeface="Arial"/>
                           <a:ea typeface="微软雅黑"/>
                         </a:rPr>
-                        <a:t>0.59</a:t>
+                        <a:t>0.5</a:t>
                       </a:r>
                     </a:p>
                   </a:txBody>
@@ -38738,7 +38768,7 @@
                           <a:latin typeface="Arial"/>
                           <a:ea typeface="微软雅黑"/>
                         </a:rPr>
-                        <a:t>0.8</a:t>
+                        <a:t>0.7</a:t>
                       </a:r>
                     </a:p>
                   </a:txBody>
@@ -38762,7 +38792,7 @@
                           <a:latin typeface="Arial"/>
                           <a:ea typeface="微软雅黑"/>
                         </a:rPr>
-                        <a:t>0.53</a:t>
+                        <a:t>0.5</a:t>
                       </a:r>
                     </a:p>
                   </a:txBody>
@@ -38810,7 +38840,7 @@
                           <a:latin typeface="Arial"/>
                           <a:ea typeface="微软雅黑"/>
                         </a:rPr>
-                        <a:t>0.53</a:t>
+                        <a:t>0.5</a:t>
                       </a:r>
                     </a:p>
                   </a:txBody>
@@ -38834,7 +38864,7 @@
                           <a:latin typeface="Arial"/>
                           <a:ea typeface="微软雅黑"/>
                         </a:rPr>
-                        <a:t>0.54</a:t>
+                        <a:t>0.8</a:t>
                       </a:r>
                     </a:p>
                   </a:txBody>
@@ -38858,7 +38888,7 @@
                           <a:latin typeface="Arial"/>
                           <a:ea typeface="微软雅黑"/>
                         </a:rPr>
-                        <a:t>0.37</a:t>
+                        <a:t>0.5</a:t>
                       </a:r>
                     </a:p>
                   </a:txBody>
@@ -38884,7 +38914,7 @@
                           <a:latin typeface="Arial"/>
                           <a:ea typeface="微软雅黑"/>
                         </a:rPr>
-                        <a:t>能量密度</a:t>
+                        <a:t>密度</a:t>
                       </a:r>
                     </a:p>
                   </a:txBody>
@@ -38904,7 +38934,7 @@
                           <a:latin typeface="Arial"/>
                           <a:ea typeface="微软雅黑"/>
                         </a:rPr>
-                        <a:t>0.63</a:t>
+                        <a:t>0.5</a:t>
                       </a:r>
                     </a:p>
                   </a:txBody>
@@ -38924,7 +38954,7 @@
                           <a:latin typeface="Arial"/>
                           <a:ea typeface="微软雅黑"/>
                         </a:rPr>
-                        <a:t>0.68</a:t>
+                        <a:t>0.6</a:t>
                       </a:r>
                     </a:p>
                   </a:txBody>
@@ -38944,7 +38974,7 @@
                           <a:latin typeface="Arial"/>
                           <a:ea typeface="微软雅黑"/>
                         </a:rPr>
-                        <a:t>0.25</a:t>
+                        <a:t>0.2</a:t>
                       </a:r>
                     </a:p>
                   </a:txBody>
@@ -38964,7 +38994,7 @@
                           <a:latin typeface="Arial"/>
                           <a:ea typeface="微软雅黑"/>
                         </a:rPr>
-                        <a:t>0.53</a:t>
+                        <a:t>0.5</a:t>
                       </a:r>
                     </a:p>
                   </a:txBody>
@@ -39004,7 +39034,7 @@
                           <a:latin typeface="Arial"/>
                           <a:ea typeface="微软雅黑"/>
                         </a:rPr>
-                        <a:t>0.24</a:t>
+                        <a:t>0.5</a:t>
                       </a:r>
                     </a:p>
                   </a:txBody>
@@ -39024,7 +39054,7 @@
                           <a:latin typeface="Arial"/>
                           <a:ea typeface="微软雅黑"/>
                         </a:rPr>
-                        <a:t>0.15</a:t>
+                        <a:t>0.3</a:t>
                       </a:r>
                     </a:p>
                   </a:txBody>
@@ -39046,7 +39076,7 @@
                           <a:latin typeface="Arial"/>
                           <a:ea typeface="微软雅黑"/>
                         </a:rPr>
-                        <a:t>综合油耗</a:t>
+                        <a:t>电耗</a:t>
                       </a:r>
                     </a:p>
                   </a:txBody>
@@ -39070,7 +39100,7 @@
                           <a:latin typeface="Arial"/>
                           <a:ea typeface="微软雅黑"/>
                         </a:rPr>
-                        <a:t>0.18</a:t>
+                        <a:t>0.3</a:t>
                       </a:r>
                     </a:p>
                   </a:txBody>
@@ -39094,7 +39124,7 @@
                           <a:latin typeface="Arial"/>
                           <a:ea typeface="微软雅黑"/>
                         </a:rPr>
-                        <a:t>0.31</a:t>
+                        <a:t>0.6</a:t>
                       </a:r>
                     </a:p>
                   </a:txBody>
@@ -39118,7 +39148,7 @@
                           <a:latin typeface="Arial"/>
                           <a:ea typeface="微软雅黑"/>
                         </a:rPr>
-                        <a:t>0.23</a:t>
+                        <a:t>0.4</a:t>
                       </a:r>
                     </a:p>
                   </a:txBody>
@@ -39142,7 +39172,7 @@
                           <a:latin typeface="Arial"/>
                           <a:ea typeface="微软雅黑"/>
                         </a:rPr>
-                        <a:t>0.54</a:t>
+                        <a:t>0.8</a:t>
                       </a:r>
                     </a:p>
                   </a:txBody>
@@ -39166,7 +39196,7 @@
                           <a:latin typeface="Arial"/>
                           <a:ea typeface="微软雅黑"/>
                         </a:rPr>
-                        <a:t>0.24</a:t>
+                        <a:t>0.5</a:t>
                       </a:r>
                     </a:p>
                   </a:txBody>
@@ -39214,7 +39244,7 @@
                           <a:latin typeface="Arial"/>
                           <a:ea typeface="微软雅黑"/>
                         </a:rPr>
-                        <a:t>0.29</a:t>
+                        <a:t>0.5</a:t>
                       </a:r>
                     </a:p>
                   </a:txBody>
@@ -39240,7 +39270,7 @@
                           <a:latin typeface="Arial"/>
                           <a:ea typeface="微软雅黑"/>
                         </a:rPr>
-                        <a:t>排量</a:t>
+                        <a:t>油耗</a:t>
                       </a:r>
                     </a:p>
                   </a:txBody>
@@ -39260,7 +39290,7 @@
                           <a:latin typeface="Arial"/>
                           <a:ea typeface="微软雅黑"/>
                         </a:rPr>
-                        <a:t>0.06</a:t>
+                        <a:t>0.0</a:t>
                       </a:r>
                     </a:p>
                   </a:txBody>
@@ -39280,7 +39310,7 @@
                           <a:latin typeface="Arial"/>
                           <a:ea typeface="微软雅黑"/>
                         </a:rPr>
-                        <a:t>0.16</a:t>
+                        <a:t>0.1</a:t>
                       </a:r>
                     </a:p>
                   </a:txBody>
@@ -39300,7 +39330,7 @@
                           <a:latin typeface="Arial"/>
                           <a:ea typeface="微软雅黑"/>
                         </a:rPr>
-                        <a:t>0.12</a:t>
+                        <a:t>0.2</a:t>
                       </a:r>
                     </a:p>
                   </a:txBody>
@@ -39320,7 +39350,7 @@
                           <a:latin typeface="Arial"/>
                           <a:ea typeface="微软雅黑"/>
                         </a:rPr>
-                        <a:t>0.37</a:t>
+                        <a:t>0.5</a:t>
                       </a:r>
                     </a:p>
                   </a:txBody>
@@ -39340,7 +39370,7 @@
                           <a:latin typeface="Arial"/>
                           <a:ea typeface="微软雅黑"/>
                         </a:rPr>
-                        <a:t>0.15</a:t>
+                        <a:t>0.3</a:t>
                       </a:r>
                     </a:p>
                   </a:txBody>
@@ -39360,7 +39390,7 @@
                           <a:latin typeface="Arial"/>
                           <a:ea typeface="微软雅黑"/>
                         </a:rPr>
-                        <a:t>0.29</a:t>
+                        <a:t>0.5</a:t>
                       </a:r>
                     </a:p>
                   </a:txBody>
@@ -39555,7 +39585,7 @@
                 <a:latin typeface="Arial"/>
                 <a:ea typeface="微软雅黑"/>
               </a:rPr>
-              <a:t>数据来源：工信部《道路机动车辆生产企业及产品公告》第341~410批（2021–2026）· 权威底表 v4.3.6 · 共4,613款纯新能源乘用车（全部指标为均值口径）</a:t>
+              <a:t>数据来源：工信部《道路机动车辆生产企业及产品公告》第341~410批（2021–2026）· 权威底表 v4.9.23 · 共5392款纯新能源乘用车（全部指标为均值口径）</a:t>
             </a:r>
           </a:p>
         </p:txBody>
@@ -39831,7 +39861,7 @@
                 <a:latin typeface="Arial"/>
                 <a:ea typeface="微软雅黑"/>
               </a:rPr>
-              <a:t>数据来源：工信部《道路机动车辆生产企业及产品公告》第341~410批（2021–2026）· 权威底表 v4.3.6 · 共4,613款纯新能源乘用车（全部指标为均值口径）</a:t>
+              <a:t>数据来源：工信部《道路机动车辆生产企业及产品公告》第341~410批（2021–2026）· 权威底表 v4.9.23 · 共5392款纯新能源乘用车（全部指标为均值口径）</a:t>
             </a:r>
           </a:p>
         </p:txBody>
@@ -39920,7 +39950,7 @@
                 <a:latin typeface="Arial"/>
                 <a:ea typeface="微软雅黑"/>
               </a:rPr>
-              <a:t>洞察  PHEV占比由14.4%（2021）升至49.2%（2025），增程/插混大电池车型为主要增量</a:t>
+              <a:t>洞察  PHEV占比由16.9%（2021）升至46.0%（2025），增程/插混大电池车型为主要增量</a:t>
             </a:r>
           </a:p>
         </p:txBody>
@@ -40107,7 +40137,7 @@
                 <a:latin typeface="Arial"/>
                 <a:ea typeface="微软雅黑"/>
               </a:rPr>
-              <a:t>数据来源：工信部《道路机动车辆生产企业及产品公告》第341~410批（2021–2026）· 权威底表 v4.3.6 · 共4,613款纯新能源乘用车（全部指标为均值口径）</a:t>
+              <a:t>数据来源：工信部《道路机动车辆生产企业及产品公告》第341~410批（2021–2026）· 权威底表 v4.9.23 · 共5392款纯新能源乘用车（全部指标为均值口径）</a:t>
             </a:r>
           </a:p>
         </p:txBody>
@@ -40383,7 +40413,7 @@
                 <a:latin typeface="Arial"/>
                 <a:ea typeface="微软雅黑"/>
               </a:rPr>
-              <a:t>数据来源：工信部《道路机动车辆生产企业及产品公告》第341~410批（2021–2026）· 权威底表 v4.3.6 · 共4,613款纯新能源乘用车（全部指标为均值口径）</a:t>
+              <a:t>数据来源：工信部《道路机动车辆生产企业及产品公告》第341~410批（2021–2026）· 权威底表 v4.9.23 · 共5392款纯新能源乘用车（全部指标为均值口径）</a:t>
             </a:r>
           </a:p>
         </p:txBody>
@@ -40729,7 +40759,7 @@
                           <a:latin typeface="Arial"/>
                           <a:ea typeface="微软雅黑"/>
                         </a:rPr>
-                        <a:t>9.2</a:t>
+                        <a:t/>
                       </a:r>
                     </a:p>
                   </a:txBody>
@@ -40749,7 +40779,7 @@
                           <a:latin typeface="Arial"/>
                           <a:ea typeface="微软雅黑"/>
                         </a:rPr>
-                        <a:t>9.1</a:t>
+                        <a:t>9.5</a:t>
                       </a:r>
                     </a:p>
                   </a:txBody>
@@ -40769,7 +40799,7 @@
                           <a:latin typeface="Arial"/>
                           <a:ea typeface="微软雅黑"/>
                         </a:rPr>
-                        <a:t>8.8</a:t>
+                        <a:t>9.8</a:t>
                       </a:r>
                     </a:p>
                   </a:txBody>
@@ -40789,7 +40819,7 @@
                           <a:latin typeface="Arial"/>
                           <a:ea typeface="微软雅黑"/>
                         </a:rPr>
-                        <a:t>1.0</a:t>
+                        <a:t>6.5</a:t>
                       </a:r>
                     </a:p>
                   </a:txBody>
@@ -40809,7 +40839,7 @@
                           <a:latin typeface="Arial"/>
                           <a:ea typeface="微软雅黑"/>
                         </a:rPr>
-                        <a:t>15.5</a:t>
+                        <a:t>-1.6</a:t>
                       </a:r>
                     </a:p>
                   </a:txBody>
@@ -40879,7 +40909,7 @@
                           <a:latin typeface="Arial"/>
                           <a:ea typeface="微软雅黑"/>
                         </a:rPr>
-                        <a:t>10.3</a:t>
+                        <a:t/>
                       </a:r>
                     </a:p>
                   </a:txBody>
@@ -40903,7 +40933,7 @@
                           <a:latin typeface="Arial"/>
                           <a:ea typeface="微软雅黑"/>
                         </a:rPr>
-                        <a:t>7.8</a:t>
+                        <a:t>11.1</a:t>
                       </a:r>
                     </a:p>
                   </a:txBody>
@@ -40927,7 +40957,7 @@
                           <a:latin typeface="Arial"/>
                           <a:ea typeface="微软雅黑"/>
                         </a:rPr>
-                        <a:t>8.4</a:t>
+                        <a:t>7.5</a:t>
                       </a:r>
                     </a:p>
                   </a:txBody>
@@ -40951,7 +40981,7 @@
                           <a:latin typeface="Arial"/>
                           <a:ea typeface="微软雅黑"/>
                         </a:rPr>
-                        <a:t>-4.2</a:t>
+                        <a:t>7.4</a:t>
                       </a:r>
                     </a:p>
                   </a:txBody>
@@ -40975,7 +41005,7 @@
                           <a:latin typeface="Arial"/>
                           <a:ea typeface="微软雅黑"/>
                         </a:rPr>
-                        <a:t>13.4</a:t>
+                        <a:t>-6.7</a:t>
                       </a:r>
                     </a:p>
                   </a:txBody>
@@ -41041,7 +41071,7 @@
                           <a:latin typeface="Arial"/>
                           <a:ea typeface="微软雅黑"/>
                         </a:rPr>
-                        <a:t>31.2</a:t>
+                        <a:t/>
                       </a:r>
                     </a:p>
                   </a:txBody>
@@ -41061,7 +41091,7 @@
                           <a:latin typeface="Arial"/>
                           <a:ea typeface="微软雅黑"/>
                         </a:rPr>
-                        <a:t>-1.5</a:t>
+                        <a:t>24.1</a:t>
                       </a:r>
                     </a:p>
                   </a:txBody>
@@ -41081,7 +41111,7 @@
                           <a:latin typeface="Arial"/>
                           <a:ea typeface="微软雅黑"/>
                         </a:rPr>
-                        <a:t>5.9</a:t>
+                        <a:t>6.7</a:t>
                       </a:r>
                     </a:p>
                   </a:txBody>
@@ -41101,7 +41131,7 @@
                           <a:latin typeface="Arial"/>
                           <a:ea typeface="微软雅黑"/>
                         </a:rPr>
-                        <a:t>7.6</a:t>
+                        <a:t>2.2</a:t>
                       </a:r>
                     </a:p>
                   </a:txBody>
@@ -41121,7 +41151,7 @@
                           <a:latin typeface="Arial"/>
                           <a:ea typeface="微软雅黑"/>
                         </a:rPr>
-                        <a:t>51.6</a:t>
+                        <a:t>-9.0</a:t>
                       </a:r>
                     </a:p>
                   </a:txBody>
@@ -41191,7 +41221,7 @@
                           <a:latin typeface="Arial"/>
                           <a:ea typeface="微软雅黑"/>
                         </a:rPr>
-                        <a:t>7.3</a:t>
+                        <a:t/>
                       </a:r>
                     </a:p>
                   </a:txBody>
@@ -41215,7 +41245,7 @@
                           <a:latin typeface="Arial"/>
                           <a:ea typeface="微软雅黑"/>
                         </a:rPr>
-                        <a:t>9.7</a:t>
+                        <a:t>9.6</a:t>
                       </a:r>
                     </a:p>
                   </a:txBody>
@@ -41239,7 +41269,7 @@
                           <a:latin typeface="Arial"/>
                           <a:ea typeface="微软雅黑"/>
                         </a:rPr>
-                        <a:t>5.2</a:t>
+                        <a:t>9.5</a:t>
                       </a:r>
                     </a:p>
                   </a:txBody>
@@ -41263,7 +41293,7 @@
                           <a:latin typeface="Arial"/>
                           <a:ea typeface="微软雅黑"/>
                         </a:rPr>
-                        <a:t>-4.3</a:t>
+                        <a:t>5.0</a:t>
                       </a:r>
                     </a:p>
                   </a:txBody>
@@ -41287,7 +41317,7 @@
                           <a:latin typeface="Arial"/>
                           <a:ea typeface="微软雅黑"/>
                         </a:rPr>
-                        <a:t>8.0</a:t>
+                        <a:t>-3.4</a:t>
                       </a:r>
                     </a:p>
                   </a:txBody>
@@ -41353,7 +41383,7 @@
                           <a:latin typeface="Arial"/>
                           <a:ea typeface="微软雅黑"/>
                         </a:rPr>
-                        <a:t>2.2</a:t>
+                        <a:t/>
                       </a:r>
                     </a:p>
                   </a:txBody>
@@ -41373,7 +41403,7 @@
                           <a:latin typeface="Arial"/>
                           <a:ea typeface="微软雅黑"/>
                         </a:rPr>
-                        <a:t>3.2</a:t>
+                        <a:t>2.0</a:t>
                       </a:r>
                     </a:p>
                   </a:txBody>
@@ -41393,7 +41423,7 @@
                           <a:latin typeface="Arial"/>
                           <a:ea typeface="微软雅黑"/>
                         </a:rPr>
-                        <a:t>-7.3</a:t>
+                        <a:t>2.9</a:t>
                       </a:r>
                     </a:p>
                   </a:txBody>
@@ -41413,7 +41443,7 @@
                           <a:latin typeface="Arial"/>
                           <a:ea typeface="微软雅黑"/>
                         </a:rPr>
-                        <a:t>2.9</a:t>
+                        <a:t>-7.2</a:t>
                       </a:r>
                     </a:p>
                   </a:txBody>
@@ -41433,7 +41463,7 @@
                           <a:latin typeface="Arial"/>
                           <a:ea typeface="微软雅黑"/>
                         </a:rPr>
-                        <a:t>9.0</a:t>
+                        <a:t>3.0</a:t>
                       </a:r>
                     </a:p>
                   </a:txBody>
@@ -41608,7 +41638,7 @@
                 <a:latin typeface="Arial"/>
                 <a:ea typeface="微软雅黑"/>
               </a:rPr>
-              <a:t>数据来源：工信部《道路机动车辆生产企业及产品公告》第341~410批（2021–2026）· 权威底表 v4.3.6 · 共4,613款纯新能源乘用车（全部指标为均值口径）</a:t>
+              <a:t>数据来源：工信部《道路机动车辆生产企业及产品公告》第341~410批（2021–2026）· 权威底表 v4.9.23 · 共5392款纯新能源乘用车（全部指标为均值口径）</a:t>
             </a:r>
           </a:p>
         </p:txBody>
@@ -41954,7 +41984,7 @@
                           <a:latin typeface="Arial"/>
                           <a:ea typeface="微软雅黑"/>
                         </a:rPr>
-                        <a:t>12.8</a:t>
+                        <a:t/>
                       </a:r>
                     </a:p>
                   </a:txBody>
@@ -41974,7 +42004,7 @@
                           <a:latin typeface="Arial"/>
                           <a:ea typeface="微软雅黑"/>
                         </a:rPr>
-                        <a:t>1.8</a:t>
+                        <a:t>32.5</a:t>
                       </a:r>
                     </a:p>
                   </a:txBody>
@@ -41994,7 +42024,7 @@
                           <a:latin typeface="Arial"/>
                           <a:ea typeface="微软雅黑"/>
                         </a:rPr>
-                        <a:t>11.2</a:t>
+                        <a:t>2.1</a:t>
                       </a:r>
                     </a:p>
                   </a:txBody>
@@ -42014,7 +42044,7 @@
                           <a:latin typeface="Arial"/>
                           <a:ea typeface="微软雅黑"/>
                         </a:rPr>
-                        <a:t>22.8</a:t>
+                        <a:t>11.0</a:t>
                       </a:r>
                     </a:p>
                   </a:txBody>
@@ -42034,7 +42064,7 @@
                           <a:latin typeface="Arial"/>
                           <a:ea typeface="微软雅黑"/>
                         </a:rPr>
-                        <a:t>33.9</a:t>
+                        <a:t>24.1</a:t>
                       </a:r>
                     </a:p>
                   </a:txBody>
@@ -42104,7 +42134,7 @@
                           <a:latin typeface="Arial"/>
                           <a:ea typeface="微软雅黑"/>
                         </a:rPr>
-                        <a:t>17.0</a:t>
+                        <a:t/>
                       </a:r>
                     </a:p>
                   </a:txBody>
@@ -42128,7 +42158,7 @@
                           <a:latin typeface="Arial"/>
                           <a:ea typeface="微软雅黑"/>
                         </a:rPr>
-                        <a:t>1.5</a:t>
+                        <a:t>-5.9</a:t>
                       </a:r>
                     </a:p>
                   </a:txBody>
@@ -42152,7 +42182,7 @@
                           <a:latin typeface="Arial"/>
                           <a:ea typeface="微软雅黑"/>
                         </a:rPr>
-                        <a:t>6.3</a:t>
+                        <a:t>0.4</a:t>
                       </a:r>
                     </a:p>
                   </a:txBody>
@@ -42176,7 +42206,7 @@
                           <a:latin typeface="Arial"/>
                           <a:ea typeface="微软雅黑"/>
                         </a:rPr>
-                        <a:t>20.6</a:t>
+                        <a:t>5.7</a:t>
                       </a:r>
                     </a:p>
                   </a:txBody>
@@ -42200,7 +42230,7 @@
                           <a:latin typeface="Arial"/>
                           <a:ea typeface="微软雅黑"/>
                         </a:rPr>
-                        <a:t>32.2</a:t>
+                        <a:t>20.9</a:t>
                       </a:r>
                     </a:p>
                   </a:txBody>
@@ -42266,7 +42296,7 @@
                           <a:latin typeface="Arial"/>
                           <a:ea typeface="微软雅黑"/>
                         </a:rPr>
-                        <a:t>0.9</a:t>
+                        <a:t/>
                       </a:r>
                     </a:p>
                   </a:txBody>
@@ -42286,7 +42316,7 @@
                           <a:latin typeface="Arial"/>
                           <a:ea typeface="微软雅黑"/>
                         </a:rPr>
-                        <a:t>6.5</a:t>
+                        <a:t>31.6</a:t>
                       </a:r>
                     </a:p>
                   </a:txBody>
@@ -42306,7 +42336,7 @@
                           <a:latin typeface="Arial"/>
                           <a:ea typeface="微软雅黑"/>
                         </a:rPr>
-                        <a:t>-2.0</a:t>
+                        <a:t>1.1</a:t>
                       </a:r>
                     </a:p>
                   </a:txBody>
@@ -42326,7 +42356,7 @@
                           <a:latin typeface="Arial"/>
                           <a:ea typeface="微软雅黑"/>
                         </a:rPr>
-                        <a:t>4.6</a:t>
+                        <a:t>3.6</a:t>
                       </a:r>
                     </a:p>
                   </a:txBody>
@@ -42346,7 +42376,7 @@
                           <a:latin typeface="Arial"/>
                           <a:ea typeface="微软雅黑"/>
                         </a:rPr>
-                        <a:t>15.7</a:t>
+                        <a:t>-7.0</a:t>
                       </a:r>
                     </a:p>
                   </a:txBody>
@@ -42416,7 +42446,7 @@
                           <a:latin typeface="Arial"/>
                           <a:ea typeface="微软雅黑"/>
                         </a:rPr>
-                        <a:t>5.6</a:t>
+                        <a:t/>
                       </a:r>
                     </a:p>
                   </a:txBody>
@@ -42440,7 +42470,7 @@
                           <a:latin typeface="Arial"/>
                           <a:ea typeface="微软雅黑"/>
                         </a:rPr>
-                        <a:t>1.9</a:t>
+                        <a:t>3.3</a:t>
                       </a:r>
                     </a:p>
                   </a:txBody>
@@ -42464,7 +42494,7 @@
                           <a:latin typeface="Arial"/>
                           <a:ea typeface="微软雅黑"/>
                         </a:rPr>
-                        <a:t>-0.7</a:t>
+                        <a:t>1.7</a:t>
                       </a:r>
                     </a:p>
                   </a:txBody>
@@ -42488,7 +42518,7 @@
                           <a:latin typeface="Arial"/>
                           <a:ea typeface="微软雅黑"/>
                         </a:rPr>
-                        <a:t>7.7</a:t>
+                        <a:t>-0.4</a:t>
                       </a:r>
                     </a:p>
                   </a:txBody>
@@ -42512,7 +42542,7 @@
                           <a:latin typeface="Arial"/>
                           <a:ea typeface="微软雅黑"/>
                         </a:rPr>
-                        <a:t>5.8</a:t>
+                        <a:t>7.4</a:t>
                       </a:r>
                     </a:p>
                   </a:txBody>
@@ -42578,7 +42608,7 @@
                           <a:latin typeface="Arial"/>
                           <a:ea typeface="微软雅黑"/>
                         </a:rPr>
-                        <a:t>7.3</a:t>
+                        <a:t/>
                       </a:r>
                     </a:p>
                   </a:txBody>
@@ -42598,6 +42628,26 @@
                           <a:latin typeface="Arial"/>
                           <a:ea typeface="微软雅黑"/>
                         </a:rPr>
+                        <a:t>7.2</a:t>
+                      </a:r>
+                    </a:p>
+                  </a:txBody>
+                  <a:tcPr/>
+                </a:tc>
+                <a:tc>
+                  <a:txBody>
+                    <a:bodyPr/>
+                    <a:lstStyle/>
+                    <a:p>
+                      <a:pPr algn="ctr"/>
+                      <a:r>
+                        <a:rPr sz="1000" b="0">
+                          <a:solidFill>
+                            <a:srgbClr val="333333"/>
+                          </a:solidFill>
+                          <a:latin typeface="Arial"/>
+                          <a:ea typeface="微软雅黑"/>
+                        </a:rPr>
                         <a:t>0.3</a:t>
                       </a:r>
                     </a:p>
@@ -42618,7 +42668,7 @@
                           <a:latin typeface="Arial"/>
                           <a:ea typeface="微软雅黑"/>
                         </a:rPr>
-                        <a:t>-3.6</a:t>
+                        <a:t>-3.5</a:t>
                       </a:r>
                     </a:p>
                   </a:txBody>
@@ -42638,27 +42688,7 @@
                           <a:latin typeface="Arial"/>
                           <a:ea typeface="微软雅黑"/>
                         </a:rPr>
-                        <a:t>11.3</a:t>
-                      </a:r>
-                    </a:p>
-                  </a:txBody>
-                  <a:tcPr/>
-                </a:tc>
-                <a:tc>
-                  <a:txBody>
-                    <a:bodyPr/>
-                    <a:lstStyle/>
-                    <a:p>
-                      <a:pPr algn="ctr"/>
-                      <a:r>
-                        <a:rPr sz="1000" b="0">
-                          <a:solidFill>
-                            <a:srgbClr val="333333"/>
-                          </a:solidFill>
-                          <a:latin typeface="Arial"/>
-                          <a:ea typeface="微软雅黑"/>
-                        </a:rPr>
-                        <a:t>6.6</a:t>
+                        <a:t>11.2</a:t>
                       </a:r>
                     </a:p>
                   </a:txBody>
@@ -42869,7 +42899,7 @@
                 <a:latin typeface="Arial"/>
                 <a:ea typeface="微软雅黑"/>
               </a:rPr>
-              <a:t>数据来源：工信部《道路机动车辆生产企业及产品公告》第341~410批（2021–2026）· 权威底表 v4.3.6 · 共4,613款纯新能源乘用车（全部指标为均值口径）</a:t>
+              <a:t>数据来源：工信部《道路机动车辆生产企业及产品公告》第341~410批（2021–2026）· 权威底表 v4.9.23 · 共5392款纯新能源乘用车（全部指标为均值口径）</a:t>
             </a:r>
           </a:p>
         </p:txBody>
@@ -43074,7 +43104,7 @@
                 <a:latin typeface="Arial"/>
                 <a:ea typeface="微软雅黑"/>
               </a:rPr>
-              <a:t>数据来源：工信部《道路机动车辆生产企业及产品公告》第341~410批（2021–2026）· 权威底表 v4.3.6 · 共4,613款纯新能源乘用车（全部指标为均值口径）</a:t>
+              <a:t>数据来源：工信部《道路机动车辆生产企业及产品公告》第341~410批（2021–2026）· 权威底表 v4.9.23 · 共5392款纯新能源乘用车（全部指标为均值口径）</a:t>
             </a:r>
           </a:p>
         </p:txBody>
@@ -43325,7 +43355,7 @@
                           <a:latin typeface="Arial"/>
                           <a:ea typeface="微软雅黑"/>
                         </a:rPr>
-                        <a:t>506.98</a:t>
+                        <a:t>489.6</a:t>
                       </a:r>
                     </a:p>
                   </a:txBody>
@@ -43345,7 +43375,7 @@
                           <a:latin typeface="Arial"/>
                           <a:ea typeface="微软雅黑"/>
                         </a:rPr>
-                        <a:t>520.0</a:t>
+                        <a:t>506.0</a:t>
                       </a:r>
                     </a:p>
                   </a:txBody>
@@ -43411,7 +43441,7 @@
                           <a:latin typeface="Arial"/>
                           <a:ea typeface="微软雅黑"/>
                         </a:rPr>
-                        <a:t>64.84</a:t>
+                        <a:t>63.9</a:t>
                       </a:r>
                     </a:p>
                   </a:txBody>
@@ -43435,7 +43465,7 @@
                           <a:latin typeface="Arial"/>
                           <a:ea typeface="微软雅黑"/>
                         </a:rPr>
-                        <a:t>65.1</a:t>
+                        <a:t>64.2</a:t>
                       </a:r>
                     </a:p>
                   </a:txBody>
@@ -43505,7 +43535,7 @@
                           <a:latin typeface="Arial"/>
                           <a:ea typeface="微软雅黑"/>
                         </a:rPr>
-                        <a:t>169.64</a:t>
+                        <a:t>195.7</a:t>
                       </a:r>
                     </a:p>
                   </a:txBody>
@@ -43525,7 +43555,7 @@
                           <a:latin typeface="Arial"/>
                           <a:ea typeface="微软雅黑"/>
                         </a:rPr>
-                        <a:t>150.0</a:t>
+                        <a:t>165.0</a:t>
                       </a:r>
                     </a:p>
                   </a:txBody>
@@ -43591,7 +43621,7 @@
                           <a:latin typeface="Arial"/>
                           <a:ea typeface="微软雅黑"/>
                         </a:rPr>
-                        <a:t>1839.87</a:t>
+                        <a:t>1824.0</a:t>
                       </a:r>
                     </a:p>
                   </a:txBody>
@@ -43615,7 +43645,7 @@
                           <a:latin typeface="Arial"/>
                           <a:ea typeface="微软雅黑"/>
                         </a:rPr>
-                        <a:t>1875.0</a:t>
+                        <a:t>1853.0</a:t>
                       </a:r>
                     </a:p>
                   </a:txBody>
@@ -43685,7 +43715,7 @@
                           <a:latin typeface="Arial"/>
                           <a:ea typeface="微软雅黑"/>
                         </a:rPr>
-                        <a:t>152.5</a:t>
+                        <a:t>152.7</a:t>
                       </a:r>
                     </a:p>
                   </a:txBody>
@@ -43900,7 +43930,7 @@
                 <a:latin typeface="Arial"/>
                 <a:ea typeface="微软雅黑"/>
               </a:rPr>
-              <a:t>数据来源：工信部《道路机动车辆生产企业及产品公告》第341~410批（2021–2026）· 权威底表 v4.3.6 · 共4,613款纯新能源乘用车（全部指标为均值口径）</a:t>
+              <a:t>数据来源：工信部《道路机动车辆生产企业及产品公告》第341~410批（2021–2026）· 权威底表 v4.9.23 · 共5392款纯新能源乘用车（全部指标为均值口径）</a:t>
             </a:r>
           </a:p>
         </p:txBody>
@@ -44151,7 +44181,7 @@
                           <a:latin typeface="Arial"/>
                           <a:ea typeface="微软雅黑"/>
                         </a:rPr>
-                        <a:t>148.98</a:t>
+                        <a:t>154.3</a:t>
                       </a:r>
                     </a:p>
                   </a:txBody>
@@ -44171,7 +44201,7 @@
                           <a:latin typeface="Arial"/>
                           <a:ea typeface="微软雅黑"/>
                         </a:rPr>
-                        <a:t>146.0</a:t>
+                        <a:t>145.0</a:t>
                       </a:r>
                     </a:p>
                   </a:txBody>
@@ -44237,7 +44267,7 @@
                           <a:latin typeface="Arial"/>
                           <a:ea typeface="微软雅黑"/>
                         </a:rPr>
-                        <a:t>31.89</a:t>
+                        <a:t>33.1</a:t>
                       </a:r>
                     </a:p>
                   </a:txBody>
@@ -44261,7 +44291,7 @@
                           <a:latin typeface="Arial"/>
                           <a:ea typeface="微软雅黑"/>
                         </a:rPr>
-                        <a:t>31.7</a:t>
+                        <a:t>32.7</a:t>
                       </a:r>
                     </a:p>
                   </a:txBody>
@@ -44331,7 +44361,7 @@
                           <a:latin typeface="Arial"/>
                           <a:ea typeface="微软雅黑"/>
                         </a:rPr>
-                        <a:t>176.99</a:t>
+                        <a:t>189.9</a:t>
                       </a:r>
                     </a:p>
                   </a:txBody>
@@ -44351,7 +44381,7 @@
                           <a:latin typeface="Arial"/>
                           <a:ea typeface="微软雅黑"/>
                         </a:rPr>
-                        <a:t>150.0</a:t>
+                        <a:t>160.0</a:t>
                       </a:r>
                     </a:p>
                   </a:txBody>
@@ -44417,7 +44447,7 @@
                           <a:latin typeface="Arial"/>
                           <a:ea typeface="微软雅黑"/>
                         </a:rPr>
-                        <a:t>2145.0</a:t>
+                        <a:t>2149.5</a:t>
                       </a:r>
                     </a:p>
                   </a:txBody>
@@ -44511,7 +44541,7 @@
                           <a:latin typeface="Arial"/>
                           <a:ea typeface="微软雅黑"/>
                         </a:rPr>
-                        <a:t>131.04</a:t>
+                        <a:t>131.1</a:t>
                       </a:r>
                     </a:p>
                   </a:txBody>
@@ -44726,7 +44756,7 @@
                 <a:latin typeface="Arial"/>
                 <a:ea typeface="微软雅黑"/>
               </a:rPr>
-              <a:t>数据来源：工信部《道路机动车辆生产企业及产品公告》第341~410批（2021–2026）· 权威底表 v4.3.6 · 共4,613款纯新能源乘用车（全部指标为均值口径）</a:t>
+              <a:t>数据来源：工信部《道路机动车辆生产企业及产品公告》第341~410批（2021–2026）· 权威底表 v4.9.23 · 共5392款纯新能源乘用车（全部指标为均值口径）</a:t>
             </a:r>
           </a:p>
         </p:txBody>
@@ -44977,7 +45007,7 @@
                           <a:latin typeface="Arial"/>
                           <a:ea typeface="微软雅黑"/>
                         </a:rPr>
-                        <a:t>413.05</a:t>
+                        <a:t>407.2</a:t>
                       </a:r>
                     </a:p>
                   </a:txBody>
@@ -44997,7 +45027,7 @@
                           <a:latin typeface="Arial"/>
                           <a:ea typeface="微软雅黑"/>
                         </a:rPr>
-                        <a:t>540.8</a:t>
+                        <a:t>513.0</a:t>
                       </a:r>
                     </a:p>
                   </a:txBody>
@@ -45017,7 +45047,7 @@
                           <a:latin typeface="Arial"/>
                           <a:ea typeface="微软雅黑"/>
                         </a:rPr>
-                        <a:t>30.9</a:t>
+                        <a:t>26.0</a:t>
                       </a:r>
                     </a:p>
                   </a:txBody>
@@ -45063,7 +45093,7 @@
                           <a:latin typeface="Arial"/>
                           <a:ea typeface="微软雅黑"/>
                         </a:rPr>
-                        <a:t>54.06</a:t>
+                        <a:t>54.0</a:t>
                       </a:r>
                     </a:p>
                   </a:txBody>
@@ -45087,7 +45117,7 @@
                           <a:latin typeface="Arial"/>
                           <a:ea typeface="微软雅黑"/>
                         </a:rPr>
-                        <a:t>66.71</a:t>
+                        <a:t>64.6</a:t>
                       </a:r>
                     </a:p>
                   </a:txBody>
@@ -45111,7 +45141,7 @@
                           <a:latin typeface="Arial"/>
                           <a:ea typeface="微软雅黑"/>
                         </a:rPr>
-                        <a:t>23.4</a:t>
+                        <a:t>19.7</a:t>
                       </a:r>
                     </a:p>
                   </a:txBody>
@@ -45157,7 +45187,7 @@
                           <a:latin typeface="Arial"/>
                           <a:ea typeface="微软雅黑"/>
                         </a:rPr>
-                        <a:t>121.92</a:t>
+                        <a:t>154.6</a:t>
                       </a:r>
                     </a:p>
                   </a:txBody>
@@ -45177,7 +45207,7 @@
                           <a:latin typeface="Arial"/>
                           <a:ea typeface="微软雅黑"/>
                         </a:rPr>
-                        <a:t>179.42</a:t>
+                        <a:t>190.2</a:t>
                       </a:r>
                     </a:p>
                   </a:txBody>
@@ -45197,7 +45227,7 @@
                           <a:latin typeface="Arial"/>
                           <a:ea typeface="微软雅黑"/>
                         </a:rPr>
-                        <a:t>47.2</a:t>
+                        <a:t>23.0</a:t>
                       </a:r>
                     </a:p>
                   </a:txBody>
@@ -45243,7 +45273,7 @@
                           <a:latin typeface="Arial"/>
                           <a:ea typeface="微软雅黑"/>
                         </a:rPr>
-                        <a:t>101.55</a:t>
+                        <a:t>86.3</a:t>
                       </a:r>
                     </a:p>
                   </a:txBody>
@@ -45267,7 +45297,7 @@
                           <a:latin typeface="Arial"/>
                           <a:ea typeface="微软雅黑"/>
                         </a:rPr>
-                        <a:t>159.24</a:t>
+                        <a:t>160.8</a:t>
                       </a:r>
                     </a:p>
                   </a:txBody>
@@ -45291,7 +45321,7 @@
                           <a:latin typeface="Arial"/>
                           <a:ea typeface="微软雅黑"/>
                         </a:rPr>
-                        <a:t>56.8</a:t>
+                        <a:t>86.3</a:t>
                       </a:r>
                     </a:p>
                   </a:txBody>
@@ -45317,7 +45347,7 @@
                           <a:latin typeface="Arial"/>
                           <a:ea typeface="微软雅黑"/>
                         </a:rPr>
-                        <a:t>PHEV公告占比(%)</a:t>
+                        <a:t>PHEV平均容量(kWh)</a:t>
                       </a:r>
                     </a:p>
                   </a:txBody>
@@ -45337,7 +45367,7 @@
                           <a:latin typeface="Arial"/>
                           <a:ea typeface="微软雅黑"/>
                         </a:rPr>
-                        <a:t>14.4</a:t>
+                        <a:t>27.9</a:t>
                       </a:r>
                     </a:p>
                   </a:txBody>
@@ -45357,7 +45387,7 @@
                           <a:latin typeface="Arial"/>
                           <a:ea typeface="微软雅黑"/>
                         </a:rPr>
-                        <a:t>49.2</a:t>
+                        <a:t>33.7</a:t>
                       </a:r>
                     </a:p>
                   </a:txBody>
@@ -45377,7 +45407,7 @@
                           <a:latin typeface="Arial"/>
                           <a:ea typeface="微软雅黑"/>
                         </a:rPr>
-                        <a:t>34.8</a:t>
+                        <a:t>20.7</a:t>
                       </a:r>
                     </a:p>
                   </a:txBody>
@@ -45493,7 +45523,7 @@
                 <a:latin typeface="Arial"/>
                 <a:ea typeface="微软雅黑"/>
               </a:rPr>
-              <a:t>数据来源：工信部《道路机动车辆生产企业及产品公告》第341~410批（2021–2026）· 权威底表 v4.3.6 · 共4,613款纯新能源乘用车（全部指标为均值口径）</a:t>
+              <a:t>数据来源：工信部《道路机动车辆生产企业及产品公告》第341~410批（2021–2026）· 权威底表 v4.9.23 · 共5392款纯新能源乘用车（全部指标为均值口径）</a:t>
             </a:r>
           </a:p>
         </p:txBody>
@@ -45529,7 +45559,7 @@
                 <a:latin typeface="Arial"/>
                 <a:ea typeface="微软雅黑"/>
               </a:rPr>
-              <a:t>数据来源：工信部《道路机动车辆生产企业及产品公告》第341~410批（2021–2026）· 权威底表 v4.3.6 · 共4,613款纯新能源乘用车（全部指标为均值口径）</a:t>
+              <a:t>数据来源：工信部《道路机动车辆生产企业及产品公告》第341~410批（2021–2026）· 权威底表 v4.9.23 · 共5392款纯新能源乘用车（全部指标为均值口径）</a:t>
             </a:r>
           </a:p>
         </p:txBody>
@@ -45734,7 +45764,7 @@
                 <a:latin typeface="Arial"/>
                 <a:ea typeface="微软雅黑"/>
               </a:rPr>
-              <a:t>数据来源：工信部《道路机动车辆生产企业及产品公告》第341~410批（2021–2026）· 权威底表 v4.3.6 · 共4,613款纯新能源乘用车（全部指标为均值口径）</a:t>
+              <a:t>数据来源：工信部《道路机动车辆生产企业及产品公告》第341~410批（2021–2026）· 权威底表 v4.9.23 · 共5392款纯新能源乘用车（全部指标为均值口径）</a:t>
             </a:r>
           </a:p>
         </p:txBody>
@@ -45823,7 +45853,7 @@
                 <a:latin typeface="Arial"/>
                 <a:ea typeface="微软雅黑"/>
               </a:rPr>
-              <a:t>洞察  BEV以 SUV-C 为主力（525款，占Top8的21%），级别分化明显</a:t>
+              <a:t>洞察  BEV以 SUV-C 为主力（529款，占Top8的21%），级别分化明显</a:t>
             </a:r>
           </a:p>
         </p:txBody>
@@ -46010,7 +46040,7 @@
                 <a:latin typeface="Arial"/>
                 <a:ea typeface="微软雅黑"/>
               </a:rPr>
-              <a:t>数据来源：工信部《道路机动车辆生产企业及产品公告》第341~410批（2021–2026）· 权威底表 v4.3.6 · 共4,613款纯新能源乘用车（全部指标为均值口径）</a:t>
+              <a:t>数据来源：工信部《道路机动车辆生产企业及产品公告》第341~410批（2021–2026）· 权威底表 v4.9.23 · 共5392款纯新能源乘用车（全部指标为均值口径）</a:t>
             </a:r>
           </a:p>
         </p:txBody>
@@ -46099,7 +46129,7 @@
                 <a:latin typeface="Arial"/>
                 <a:ea typeface="微软雅黑"/>
               </a:rPr>
-              <a:t>洞察  PHEV以 SUV-C 为主力（500款，占Top8的36%），级别分化明显</a:t>
+              <a:t>洞察  PHEV以 SUV-C 为主力（566款，占Top8的36%），级别分化明显</a:t>
             </a:r>
           </a:p>
         </p:txBody>
@@ -46286,7 +46316,7 @@
                 <a:latin typeface="Arial"/>
                 <a:ea typeface="微软雅黑"/>
               </a:rPr>
-              <a:t>数据来源：工信部《道路机动车辆生产企业及产品公告》第341~410批（2021–2026）· 权威底表 v4.3.6 · 共4,613款纯新能源乘用车（全部指标为均值口径）</a:t>
+              <a:t>数据来源：工信部《道路机动车辆生产企业及产品公告》第341~410批（2021–2026）· 权威底表 v4.9.23 · 共5392款纯新能源乘用车（全部指标为均值口径）</a:t>
             </a:r>
           </a:p>
         </p:txBody>
@@ -46562,7 +46592,7 @@
                           <a:latin typeface="Arial"/>
                           <a:ea typeface="微软雅黑"/>
                         </a:rPr>
-                        <a:t>498</a:t>
+                        <a:t>836</a:t>
                       </a:r>
                     </a:p>
                   </a:txBody>
@@ -46582,7 +46612,7 @@
                           <a:latin typeface="Arial"/>
                           <a:ea typeface="微软雅黑"/>
                         </a:rPr>
-                        <a:t>84</a:t>
+                        <a:t>170</a:t>
                       </a:r>
                     </a:p>
                   </a:txBody>
@@ -46602,7 +46632,7 @@
                           <a:latin typeface="Arial"/>
                           <a:ea typeface="微软雅黑"/>
                         </a:rPr>
-                        <a:t>582</a:t>
+                        <a:t>1006</a:t>
                       </a:r>
                     </a:p>
                   </a:txBody>
@@ -46622,7 +46652,7 @@
                           <a:latin typeface="Arial"/>
                           <a:ea typeface="微软雅黑"/>
                         </a:rPr>
-                        <a:t>14.4</a:t>
+                        <a:t>16.9</a:t>
                       </a:r>
                     </a:p>
                   </a:txBody>
@@ -46668,7 +46698,7 @@
                           <a:latin typeface="Arial"/>
                           <a:ea typeface="微软雅黑"/>
                         </a:rPr>
-                        <a:t>474</a:t>
+                        <a:t>520</a:t>
                       </a:r>
                     </a:p>
                   </a:txBody>
@@ -46692,7 +46722,7 @@
                           <a:latin typeface="Arial"/>
                           <a:ea typeface="微软雅黑"/>
                         </a:rPr>
-                        <a:t>128</a:t>
+                        <a:t>135</a:t>
                       </a:r>
                     </a:p>
                   </a:txBody>
@@ -46716,7 +46746,7 @@
                           <a:latin typeface="Arial"/>
                           <a:ea typeface="微软雅黑"/>
                         </a:rPr>
-                        <a:t>602</a:t>
+                        <a:t>655</a:t>
                       </a:r>
                     </a:p>
                   </a:txBody>
@@ -46740,7 +46770,7 @@
                           <a:latin typeface="Arial"/>
                           <a:ea typeface="微软雅黑"/>
                         </a:rPr>
-                        <a:t>21.3</a:t>
+                        <a:t>20.6</a:t>
                       </a:r>
                     </a:p>
                   </a:txBody>
@@ -46786,7 +46816,7 @@
                           <a:latin typeface="Arial"/>
                           <a:ea typeface="微软雅黑"/>
                         </a:rPr>
-                        <a:t>568</a:t>
+                        <a:t>584</a:t>
                       </a:r>
                     </a:p>
                   </a:txBody>
@@ -46806,7 +46836,7 @@
                           <a:latin typeface="Arial"/>
                           <a:ea typeface="微软雅黑"/>
                         </a:rPr>
-                        <a:t>210</a:t>
+                        <a:t>213</a:t>
                       </a:r>
                     </a:p>
                   </a:txBody>
@@ -46826,7 +46856,7 @@
                           <a:latin typeface="Arial"/>
                           <a:ea typeface="微软雅黑"/>
                         </a:rPr>
-                        <a:t>778</a:t>
+                        <a:t>797</a:t>
                       </a:r>
                     </a:p>
                   </a:txBody>
@@ -46846,7 +46876,7 @@
                           <a:latin typeface="Arial"/>
                           <a:ea typeface="微软雅黑"/>
                         </a:rPr>
-                        <a:t>27.0</a:t>
+                        <a:t>26.7</a:t>
                       </a:r>
                     </a:p>
                   </a:txBody>
@@ -46892,7 +46922,7 @@
                           <a:latin typeface="Arial"/>
                           <a:ea typeface="微软雅黑"/>
                         </a:rPr>
-                        <a:t>615</a:t>
+                        <a:t>673</a:t>
                       </a:r>
                     </a:p>
                   </a:txBody>
@@ -46916,7 +46946,7 @@
                           <a:latin typeface="Arial"/>
                           <a:ea typeface="微软雅黑"/>
                         </a:rPr>
-                        <a:t>299</a:t>
+                        <a:t>312</a:t>
                       </a:r>
                     </a:p>
                   </a:txBody>
@@ -46940,7 +46970,7 @@
                           <a:latin typeface="Arial"/>
                           <a:ea typeface="微软雅黑"/>
                         </a:rPr>
-                        <a:t>914</a:t>
+                        <a:t>985</a:t>
                       </a:r>
                     </a:p>
                   </a:txBody>
@@ -46964,7 +46994,7 @@
                           <a:latin typeface="Arial"/>
                           <a:ea typeface="微软雅黑"/>
                         </a:rPr>
-                        <a:t>32.7</a:t>
+                        <a:t>31.7</a:t>
                       </a:r>
                     </a:p>
                   </a:txBody>
@@ -47010,7 +47040,7 @@
                           <a:latin typeface="Arial"/>
                           <a:ea typeface="微软雅黑"/>
                         </a:rPr>
-                        <a:t>567</a:t>
+                        <a:t>647</a:t>
                       </a:r>
                     </a:p>
                   </a:txBody>
@@ -47030,7 +47060,7 @@
                           <a:latin typeface="Arial"/>
                           <a:ea typeface="微软雅黑"/>
                         </a:rPr>
-                        <a:t>550</a:t>
+                        <a:t>551</a:t>
                       </a:r>
                     </a:p>
                   </a:txBody>
@@ -47050,7 +47080,7 @@
                           <a:latin typeface="Arial"/>
                           <a:ea typeface="微软雅黑"/>
                         </a:rPr>
-                        <a:t>1,117</a:t>
+                        <a:t>1198</a:t>
                       </a:r>
                     </a:p>
                   </a:txBody>
@@ -47070,7 +47100,7 @@
                           <a:latin typeface="Arial"/>
                           <a:ea typeface="微软雅黑"/>
                         </a:rPr>
-                        <a:t>49.2</a:t>
+                        <a:t>46.0</a:t>
                       </a:r>
                     </a:p>
                   </a:txBody>
@@ -47116,7 +47146,7 @@
                           <a:latin typeface="Arial"/>
                           <a:ea typeface="微软雅黑"/>
                         </a:rPr>
-                        <a:t>377</a:t>
+                        <a:t>442</a:t>
                       </a:r>
                     </a:p>
                   </a:txBody>
@@ -47140,7 +47170,7 @@
                           <a:latin typeface="Arial"/>
                           <a:ea typeface="微软雅黑"/>
                         </a:rPr>
-                        <a:t>243</a:t>
+                        <a:t>288</a:t>
                       </a:r>
                     </a:p>
                   </a:txBody>
@@ -47164,7 +47194,7 @@
                           <a:latin typeface="Arial"/>
                           <a:ea typeface="微软雅黑"/>
                         </a:rPr>
-                        <a:t>620</a:t>
+                        <a:t>730</a:t>
                       </a:r>
                     </a:p>
                   </a:txBody>
@@ -47188,7 +47218,7 @@
                           <a:latin typeface="Arial"/>
                           <a:ea typeface="微软雅黑"/>
                         </a:rPr>
-                        <a:t>39.2</a:t>
+                        <a:t>39.5</a:t>
                       </a:r>
                     </a:p>
                   </a:txBody>
